--- a/deck/two-tier-scheduler.pptx
+++ b/deck/two-tier-scheduler.pptx
@@ -3372,21 +3372,21 @@
           <a:p>
             <a:pPr algn="l">
               <a:lnSpc>
-                <a:spcPct val="115000"/>
+                <a:spcPct val="118000"/>
               </a:lnSpc>
               <a:spcAft>
                 <a:spcPts val="600"/>
               </a:spcAft>
             </a:pPr>
             <a:r>
-              <a:rPr sz="4000" b="1">
+              <a:rPr sz="3600" b="1">
                 <a:solidFill>
                   <a:srgbClr val="1A1A19"/>
                 </a:solidFill>
                 <a:latin typeface="Calibri"/>
               </a:rPr>
-              <a:t>An Engineering Study of a Two-Tier
-QoS-Aware Scheduler for Private 5G</a:t>
+              <a:t>Design of a Two-Tier QoS-Aware Scheduler
+for Private 5G</a:t>
             </a:r>
           </a:p>
         </p:txBody>
@@ -3399,7 +3399,7 @@
         </p:nvSpPr>
         <p:spPr>
           <a:xfrm>
-            <a:off x="822960" y="3703320"/>
+            <a:off x="822960" y="3657600"/>
             <a:ext cx="2011680" cy="38100"/>
           </a:xfrm>
           <a:prstGeom prst="rect">
@@ -3443,8 +3443,8 @@
         </p:nvSpPr>
         <p:spPr>
           <a:xfrm>
-            <a:off x="822960" y="3977639"/>
-            <a:ext cx="10545775" cy="1280160"/>
+            <a:off x="822960" y="3931920"/>
+            <a:ext cx="10545775" cy="1202055"/>
           </a:xfrm>
           <a:prstGeom prst="rect">
             <a:avLst/>
@@ -3472,7 +3472,7 @@
                 </a:solidFill>
                 <a:latin typeface="Calibri"/>
               </a:rPr>
-              <a:t>Should we replace the proportional-fair scheduler OpenAirInterface ships?</a:t>
+              <a:t>A convex rate planner on a ~1 s horizon, over a per-slot drift-plus-penalty tracker.</a:t>
             </a:r>
           </a:p>
           <a:p>
@@ -3491,7 +3491,7 @@
                 </a:solidFill>
                 <a:latin typeface="Calibri"/>
               </a:rPr>
-              <a:t>The decision, the measurements behind it — and the three modelling errors found on the way.</a:t>
+              <a:t>Motivation, design, and simulation results against the scheduler OpenAirInterface ships — with what remains to land it on hardware.</a:t>
             </a:r>
           </a:p>
         </p:txBody>
@@ -3551,7 +3551,7 @@
                 </a:solidFill>
                 <a:latin typeface="Calibri"/>
               </a:rPr>
-              <a:t>THE DECISION</a:t>
+              <a:t>SUMMARY</a:t>
             </a:r>
           </a:p>
         </p:txBody>
@@ -3593,7 +3593,7 @@
                 </a:solidFill>
                 <a:latin typeface="Calibri"/>
               </a:rPr>
-              <a:t>So: adopt it — and do not build a fallback to PF</a:t>
+              <a:t>What the design adds — and what it costs</a:t>
             </a:r>
           </a:p>
         </p:txBody>
@@ -3650,8 +3650,8 @@
         </p:nvSpPr>
         <p:spPr>
           <a:xfrm>
-            <a:off x="822960" y="1737360"/>
-            <a:ext cx="5394960" cy="2651760"/>
+            <a:off x="822960" y="1719072"/>
+            <a:ext cx="5394960" cy="3180080"/>
           </a:xfrm>
           <a:prstGeom prst="rect">
             <a:avLst/>
@@ -3673,32 +3673,13 @@
               </a:spcAft>
             </a:pPr>
             <a:r>
-              <a:rPr sz="1800" b="1">
+              <a:rPr sz="1700" b="1">
                 <a:solidFill>
                   <a:srgbClr val="008300"/>
                 </a:solidFill>
                 <a:latin typeface="Calibri"/>
               </a:rPr>
-              <a:t>Two wins are unconditional</a:t>
-            </a:r>
-          </a:p>
-          <a:p>
-            <a:pPr algn="l">
-              <a:lnSpc>
-                <a:spcPct val="125000"/>
-              </a:lnSpc>
-              <a:spcAft>
-                <a:spcPts val="1400"/>
-              </a:spcAft>
-            </a:pPr>
-            <a:r>
-              <a:rPr sz="1600" b="0">
-                <a:solidFill>
-                  <a:srgbClr val="5C5B54"/>
-                </a:solidFill>
-                <a:latin typeface="Calibri"/>
-              </a:rPr>
-              <a:t>Configured grants and the deadline-aware tracker address capabilities PF lacks entirely. Both survived every fidelity correction untouched — neither scenario has a multi-flow uplink UE.</a:t>
+              <a:t>Added over the PF baseline</a:t>
             </a:r>
           </a:p>
           <a:p>
@@ -3711,13 +3692,31 @@
               </a:spcAft>
             </a:pPr>
             <a:r>
-              <a:rPr sz="1800" b="1">
-                <a:solidFill>
-                  <a:srgbClr val="EB6834"/>
-                </a:solidFill>
-                <a:latin typeface="Calibri"/>
-              </a:rPr>
-              <a:t>One metric loss, and it is a metric choice</a:t>
+              <a:rPr sz="1500" b="0">
+                <a:solidFill>
+                  <a:srgbClr val="5C5B54"/>
+                </a:solidFill>
+                <a:latin typeface="Calibri"/>
+              </a:rPr>
+              <a:t>• A </a:t>
+            </a:r>
+            <a:r>
+              <a:rPr sz="1500" b="1">
+                <a:solidFill>
+                  <a:srgbClr val="5C5B54"/>
+                </a:solidFill>
+                <a:latin typeface="Calibri"/>
+              </a:rPr>
+              <a:t>rate contract</a:t>
+            </a:r>
+            <a:r>
+              <a:rPr sz="1500" b="0">
+                <a:solidFill>
+                  <a:srgbClr val="5C5B54"/>
+                </a:solidFill>
+                <a:latin typeface="Calibri"/>
+              </a:rPr>
+              <a:t> that is stated and honoured — 10/10 against 8/10 at moderate load; worst-served 44% against 1% in overload.</a:t>
             </a:r>
           </a:p>
           <a:p>
@@ -3730,27 +3729,254 @@
               </a:spcAft>
             </a:pPr>
             <a:r>
-              <a:rPr sz="1600" b="0">
+              <a:rPr sz="1500" b="0">
                 <a:solidFill>
                   <a:srgbClr val="5C5B54"/>
                 </a:solidFill>
                 <a:latin typeface="Calibri"/>
               </a:rPr>
-              <a:t>Under GBR infeasibility a threshold count prefers concentration. We measured whether a knob recovers it: sweeping the max-min floor from 1 to 0 moves contracts only 1/10 → 2/10, against PF's 6/10. It does not.</a:t>
-            </a:r>
-          </a:p>
-        </p:txBody>
-      </p:sp>
-      <p:sp>
-        <p:nvSpPr>
-          <p:cNvPr id="6" name="Rectangle 5"/>
+              <a:t>• A deadline that is </a:t>
+            </a:r>
+            <a:r>
+              <a:rPr sz="1500" b="1">
+                <a:solidFill>
+                  <a:srgbClr val="5C5B54"/>
+                </a:solidFill>
+                <a:latin typeface="Calibri"/>
+              </a:rPr>
+              <a:t>tracked, not hoped for</a:t>
+            </a:r>
+            <a:r>
+              <a:rPr sz="1500" b="0">
+                <a:solidFill>
+                  <a:srgbClr val="5C5B54"/>
+                </a:solidFill>
+                <a:latin typeface="Calibri"/>
+              </a:rPr>
+              <a:t> — 8/8 against 5/8, p99 4.5 against 12.0 ms.</a:t>
+            </a:r>
+          </a:p>
+          <a:p>
+            <a:pPr algn="l">
+              <a:lnSpc>
+                <a:spcPct val="125000"/>
+              </a:lnSpc>
+              <a:spcAft>
+                <a:spcPts val="600"/>
+              </a:spcAft>
+            </a:pPr>
+            <a:r>
+              <a:rPr sz="1500" b="0">
+                <a:solidFill>
+                  <a:srgbClr val="5C5B54"/>
+                </a:solidFill>
+                <a:latin typeface="Calibri"/>
+              </a:rPr>
+              <a:t>• A </a:t>
+            </a:r>
+            <a:r>
+              <a:rPr sz="1500" b="1">
+                <a:solidFill>
+                  <a:srgbClr val="5C5B54"/>
+                </a:solidFill>
+                <a:latin typeface="Calibri"/>
+              </a:rPr>
+              <a:t>control-channel path</a:t>
+            </a:r>
+            <a:r>
+              <a:rPr sz="1500" b="0">
+                <a:solidFill>
+                  <a:srgbClr val="5C5B54"/>
+                </a:solidFill>
+                <a:latin typeface="Calibri"/>
+              </a:rPr>
+              <a:t> for dense periodic traffic — 30/30 against 2/30 where the CCE budget binds.</a:t>
+            </a:r>
+          </a:p>
+          <a:p>
+            <a:pPr algn="l">
+              <a:lnSpc>
+                <a:spcPct val="125000"/>
+              </a:lnSpc>
+              <a:spcAft>
+                <a:spcPts val="600"/>
+              </a:spcAft>
+            </a:pPr>
+            <a:r>
+              <a:rPr sz="1500" b="0">
+                <a:solidFill>
+                  <a:srgbClr val="5C5B54"/>
+                </a:solidFill>
+                <a:latin typeface="Calibri"/>
+              </a:rPr>
+              <a:t>• A </a:t>
+            </a:r>
+            <a:r>
+              <a:rPr sz="1500" b="1">
+                <a:solidFill>
+                  <a:srgbClr val="5C5B54"/>
+                </a:solidFill>
+                <a:latin typeface="Calibri"/>
+              </a:rPr>
+              <a:t>single fairness dial</a:t>
+            </a:r>
+            <a:r>
+              <a:rPr sz="1500" b="0">
+                <a:solidFill>
+                  <a:srgbClr val="5C5B54"/>
+                </a:solidFill>
+                <a:latin typeface="Calibri"/>
+              </a:rPr>
+              <a:t> that self-disables when the GBR set is feasible, plus soft per-slice floors.</a:t>
+            </a:r>
+          </a:p>
+        </p:txBody>
+      </p:sp>
+      <p:sp>
+        <p:nvSpPr>
+          <p:cNvPr id="6" name="TextBox 5"/>
+          <p:cNvSpPr txBox="1"/>
+          <p:nvPr/>
+        </p:nvSpPr>
+        <p:spPr>
+          <a:xfrm>
+            <a:off x="6492240" y="1719072"/>
+            <a:ext cx="4846320" cy="2827655"/>
+          </a:xfrm>
+          <a:prstGeom prst="rect">
+            <a:avLst/>
+          </a:prstGeom>
+          <a:noFill/>
+        </p:spPr>
+        <p:txBody>
+          <a:bodyPr wrap="square">
+            <a:spAutoFit/>
+          </a:bodyPr>
+          <a:lstStyle/>
+          <a:p>
+            <a:pPr algn="l">
+              <a:lnSpc>
+                <a:spcPct val="125000"/>
+              </a:lnSpc>
+              <a:spcAft>
+                <a:spcPts val="600"/>
+              </a:spcAft>
+            </a:pPr>
+            <a:r>
+              <a:rPr sz="1700" b="1">
+                <a:solidFill>
+                  <a:srgbClr val="EB6834"/>
+                </a:solidFill>
+                <a:latin typeface="Calibri"/>
+              </a:rPr>
+              <a:t>Paid for with</a:t>
+            </a:r>
+          </a:p>
+          <a:p>
+            <a:pPr algn="l">
+              <a:lnSpc>
+                <a:spcPct val="125000"/>
+              </a:lnSpc>
+              <a:spcAft>
+                <a:spcPts val="600"/>
+              </a:spcAft>
+            </a:pPr>
+            <a:r>
+              <a:rPr sz="1500" b="0">
+                <a:solidFill>
+                  <a:srgbClr val="5C5B54"/>
+                </a:solidFill>
+                <a:latin typeface="Calibri"/>
+              </a:rPr>
+              <a:t>• About </a:t>
+            </a:r>
+            <a:r>
+              <a:rPr sz="1500" b="1">
+                <a:solidFill>
+                  <a:srgbClr val="5C5B54"/>
+                </a:solidFill>
+                <a:latin typeface="Calibri"/>
+              </a:rPr>
+              <a:t>4% of aggregate throughput</a:t>
+            </a:r>
+            <a:r>
+              <a:rPr sz="1500" b="0">
+                <a:solidFill>
+                  <a:srgbClr val="5C5B54"/>
+                </a:solidFill>
+                <a:latin typeface="Calibri"/>
+              </a:rPr>
+              <a:t> at the max-min floor in deep overload — the price of holding the worst-served flow above zero.</a:t>
+            </a:r>
+          </a:p>
+          <a:p>
+            <a:pPr algn="l">
+              <a:lnSpc>
+                <a:spcPct val="125000"/>
+              </a:lnSpc>
+              <a:spcAft>
+                <a:spcPts val="600"/>
+              </a:spcAft>
+            </a:pPr>
+            <a:r>
+              <a:rPr sz="1500" b="0">
+                <a:solidFill>
+                  <a:srgbClr val="5C5B54"/>
+                </a:solidFill>
+                <a:latin typeface="Calibri"/>
+              </a:rPr>
+              <a:t>• </a:t>
+            </a:r>
+            <a:r>
+              <a:rPr sz="1500" b="1">
+                <a:solidFill>
+                  <a:srgbClr val="5C5B54"/>
+                </a:solidFill>
+                <a:latin typeface="Calibri"/>
+              </a:rPr>
+              <a:t>One convex solve per second</a:t>
+            </a:r>
+            <a:r>
+              <a:rPr sz="1500" b="0">
+                <a:solidFill>
+                  <a:srgbClr val="5C5B54"/>
+                </a:solidFill>
+                <a:latin typeface="Calibri"/>
+              </a:rPr>
+              <a:t> — CVXPY/Clarabel here, GLPK simplex with successive convex approximation in the OAI port.</a:t>
+            </a:r>
+          </a:p>
+          <a:p>
+            <a:pPr algn="l">
+              <a:lnSpc>
+                <a:spcPct val="125000"/>
+              </a:lnSpc>
+              <a:spcAft>
+                <a:spcPts val="600"/>
+              </a:spcAft>
+            </a:pPr>
+            <a:r>
+              <a:rPr sz="1500" b="0">
+                <a:solidFill>
+                  <a:srgbClr val="5C5B54"/>
+                </a:solidFill>
+                <a:latin typeface="Calibri"/>
+              </a:rPr>
+              <a:t>• Per-5QI priority and prioritised-bit-rate configuration that has to actually be set.</a:t>
+            </a:r>
+          </a:p>
+        </p:txBody>
+      </p:sp>
+      <p:sp>
+        <p:nvSpPr>
+          <p:cNvPr id="7" name="Rectangle 6"/>
           <p:cNvSpPr/>
           <p:nvPr/>
         </p:nvSpPr>
         <p:spPr>
           <a:xfrm>
-            <a:off x="6492240" y="1737360"/>
-            <a:ext cx="4846320" cy="2651760"/>
+            <a:off x="822960" y="5155184"/>
+            <a:ext cx="10545775" cy="1546859"/>
           </a:xfrm>
           <a:prstGeom prst="rect">
             <a:avLst/>
@@ -3787,14 +4013,14 @@
       </p:sp>
       <p:sp>
         <p:nvSpPr>
-          <p:cNvPr id="7" name="Rectangle 6"/>
+          <p:cNvPr id="8" name="Rectangle 7"/>
           <p:cNvSpPr/>
           <p:nvPr/>
         </p:nvSpPr>
         <p:spPr>
           <a:xfrm>
-            <a:off x="6492240" y="1737360"/>
-            <a:ext cx="50800" cy="2651760"/>
+            <a:off x="822960" y="5155184"/>
+            <a:ext cx="50800" cy="1546859"/>
           </a:xfrm>
           <a:prstGeom prst="rect">
             <a:avLst/>
@@ -3831,14 +4057,14 @@
       </p:sp>
       <p:sp>
         <p:nvSpPr>
-          <p:cNvPr id="8" name="TextBox 7"/>
+          <p:cNvPr id="9" name="TextBox 8"/>
           <p:cNvSpPr txBox="1"/>
           <p:nvPr/>
         </p:nvSpPr>
         <p:spPr>
           <a:xfrm>
-            <a:off x="6720840" y="1865376"/>
-            <a:ext cx="4389120" cy="2395728"/>
+            <a:off x="1051560" y="5292344"/>
+            <a:ext cx="10088575" cy="1272539"/>
           </a:xfrm>
           <a:prstGeom prst="rect">
             <a:avLst/>
@@ -3860,92 +4086,31 @@
               </a:spcAft>
             </a:pPr>
             <a:r>
-              <a:rPr sz="1600" b="0">
+              <a:rPr sz="1500" b="0">
                 <a:solidFill>
                   <a:srgbClr val="1A1A19"/>
                 </a:solidFill>
                 <a:latin typeface="Calibri"/>
               </a:rPr>
-              <a:t>A scheduler-level switch to PF is the </a:t>
-            </a:r>
-            <a:r>
-              <a:rPr sz="1600" b="1">
+              <a:t>It is also </a:t>
+            </a:r>
+            <a:r>
+              <a:rPr sz="1500" b="1">
                 <a:solidFill>
                   <a:srgbClr val="1A1A19"/>
                 </a:solidFill>
                 <a:latin typeface="Calibri"/>
               </a:rPr>
-              <a:t>wrong instrument</a:t>
-            </a:r>
-            <a:r>
-              <a:rPr sz="1600" b="0">
+              <a:t>markedly less sensitive to control-plane fidelity.</a:t>
+            </a:r>
+            <a:r>
+              <a:rPr sz="1500" b="0">
                 <a:solidFill>
                   <a:srgbClr val="1A1A19"/>
                 </a:solidFill>
                 <a:latin typeface="Calibri"/>
               </a:rPr>
-              <a:t> — it would surrender configured grants and deadline awareness to improve one metric on one flow class.
-Only the max-min floor is regime-dependent. It is a continuous knob, and Tier-1 already computes an </a:t>
-            </a:r>
-            <a:r>
-              <a:rPr sz="1600" b="1">
-                <a:solidFill>
-                  <a:srgbClr val="1A1A19"/>
-                </a:solidFill>
-                <a:latin typeface="Calibri"/>
-              </a:rPr>
-              <a:t>exact feasibility test</a:t>
-            </a:r>
-            <a:r>
-              <a:rPr sz="1600" b="0">
-                <a:solidFill>
-                  <a:srgbClr val="1A1A19"/>
-                </a:solidFill>
-                <a:latin typeface="Calibri"/>
-              </a:rPr>
-              <a:t> — so degradation can be graceful, with no regime guessing.</a:t>
-            </a:r>
-          </a:p>
-        </p:txBody>
-      </p:sp>
-      <p:sp>
-        <p:nvSpPr>
-          <p:cNvPr id="9" name="TextBox 8"/>
-          <p:cNvSpPr txBox="1"/>
-          <p:nvPr/>
-        </p:nvSpPr>
-        <p:spPr>
-          <a:xfrm>
-            <a:off x="822960" y="5623560"/>
-            <a:ext cx="10545775" cy="914400"/>
-          </a:xfrm>
-          <a:prstGeom prst="rect">
-            <a:avLst/>
-          </a:prstGeom>
-          <a:noFill/>
-        </p:spPr>
-        <p:txBody>
-          <a:bodyPr wrap="square">
-            <a:spAutoFit/>
-          </a:bodyPr>
-          <a:lstStyle/>
-          <a:p>
-            <a:pPr algn="l">
-              <a:lnSpc>
-                <a:spcPct val="125000"/>
-              </a:lnSpc>
-              <a:spcAft>
-                <a:spcPts val="600"/>
-              </a:spcAft>
-            </a:pPr>
-            <a:r>
-              <a:rPr sz="1700" b="0">
-                <a:solidFill>
-                  <a:srgbClr val="5C5B54"/>
-                </a:solidFill>
-                <a:latin typeface="Calibri"/>
-              </a:rPr>
-              <a:t>And detection is not needed for safety: with the floor off, the design leads PF on mean and worst-case delivery at both loaded points while keeping both structural wins.</a:t>
+              <a:t> Sweeping the uplink BSR round-trip from 0 to 16 slots, PF's contract count breaks 8/10 → 5/10 and its worst-served flow falls 66% → 30%; the two-tier design moves 10/10 → 8/10 and 80% → 77%, losing 1% of throughput against PF's 10%. Configured-grant flows are invariant to BSR delay by construction.</a:t>
             </a:r>
           </a:p>
         </p:txBody>
@@ -4005,7 +4170,7 @@
                 </a:solidFill>
                 <a:latin typeface="Calibri"/>
               </a:rPr>
-              <a:t>IN CLOSING</a:t>
+              <a:t>STATUS</a:t>
             </a:r>
           </a:p>
         </p:txBody>
@@ -4047,7 +4212,7 @@
                 </a:solidFill>
                 <a:latin typeface="Calibri"/>
               </a:rPr>
-              <a:t>What this is, and what it is not</a:t>
+              <a:t>Where this stands, and what remains</a:t>
             </a:r>
           </a:p>
         </p:txBody>
@@ -4104,8 +4269,8 @@
         </p:nvSpPr>
         <p:spPr>
           <a:xfrm>
-            <a:off x="822960" y="1783080"/>
-            <a:ext cx="5394960" cy="3108960"/>
+            <a:off x="822960" y="1719072"/>
+            <a:ext cx="3291840" cy="3103880"/>
           </a:xfrm>
           <a:prstGeom prst="rect">
             <a:avLst/>
@@ -4127,13 +4292,13 @@
               </a:spcAft>
             </a:pPr>
             <a:r>
-              <a:rPr sz="1800" b="1">
+              <a:rPr sz="1700" b="1">
                 <a:solidFill>
                   <a:srgbClr val="008300"/>
                 </a:solidFill>
                 <a:latin typeface="Calibri"/>
               </a:rPr>
-              <a:t>What we offer</a:t>
+              <a:t>Built and tested</a:t>
             </a:r>
           </a:p>
           <a:p>
@@ -4146,13 +4311,13 @@
               </a:spcAft>
             </a:pPr>
             <a:r>
-              <a:rPr sz="1600" b="0">
+              <a:rPr sz="1500" b="0">
                 <a:solidFill>
                   <a:srgbClr val="5C5B54"/>
                 </a:solidFill>
                 <a:latin typeface="Calibri"/>
               </a:rPr>
-              <a:t>• Independent reproduction of two results, in a simulator sharing no code with the work that first reported them.</a:t>
+              <a:t>• Scheduler library: Tier-1, Tier-2, configured grants, per-UE grants with a TS 38.321 multiplexer, per-slice floors</a:t>
             </a:r>
           </a:p>
           <a:p>
@@ -4165,13 +4330,13 @@
               </a:spcAft>
             </a:pPr>
             <a:r>
-              <a:rPr sz="1600" b="0">
+              <a:rPr sz="1500" b="0">
                 <a:solidFill>
                   <a:srgbClr val="5C5B54"/>
                 </a:solidFill>
                 <a:latin typeface="Calibri"/>
               </a:rPr>
-              <a:t>• Three fidelity corrections, each with the measurement it changed.</a:t>
+              <a:t>• A symbol-accurate NR simulator with PDCCH, BSR and CQI models</a:t>
             </a:r>
           </a:p>
           <a:p>
@@ -4184,15 +4349,38 @@
               </a:spcAft>
             </a:pPr>
             <a:r>
-              <a:rPr sz="1600" b="0">
+              <a:rPr sz="1500" b="0">
                 <a:solidFill>
                   <a:srgbClr val="5C5B54"/>
                 </a:solidFill>
                 <a:latin typeface="Calibri"/>
               </a:rPr>
-              <a:t>• An adoption decision with its reasoning, not just its verdict.</a:t>
-            </a:r>
-          </a:p>
+              <a:t>• Three scenario studies, 70 regression tests, one script per result table</a:t>
+            </a:r>
+          </a:p>
+        </p:txBody>
+      </p:sp>
+      <p:sp>
+        <p:nvSpPr>
+          <p:cNvPr id="6" name="TextBox 5"/>
+          <p:cNvSpPr txBox="1"/>
+          <p:nvPr/>
+        </p:nvSpPr>
+        <p:spPr>
+          <a:xfrm>
+            <a:off x="4434840" y="1719072"/>
+            <a:ext cx="3291840" cy="2475230"/>
+          </a:xfrm>
+          <a:prstGeom prst="rect">
+            <a:avLst/>
+          </a:prstGeom>
+          <a:noFill/>
+        </p:spPr>
+        <p:txBody>
+          <a:bodyPr wrap="square">
+            <a:spAutoFit/>
+          </a:bodyPr>
+          <a:lstStyle/>
           <a:p>
             <a:pPr algn="l">
               <a:lnSpc>
@@ -4203,38 +4391,15 @@
               </a:spcAft>
             </a:pPr>
             <a:r>
-              <a:rPr sz="1600" b="0">
-                <a:solidFill>
-                  <a:srgbClr val="5C5B54"/>
-                </a:solidFill>
-                <a:latin typeface="Calibri"/>
-              </a:rPr>
-              <a:t>• Simulator, scheduler library and one script per result table.</a:t>
-            </a:r>
-          </a:p>
-        </p:txBody>
-      </p:sp>
-      <p:sp>
-        <p:nvSpPr>
-          <p:cNvPr id="6" name="TextBox 5"/>
-          <p:cNvSpPr txBox="1"/>
-          <p:nvPr/>
-        </p:nvSpPr>
-        <p:spPr>
-          <a:xfrm>
-            <a:off x="6492240" y="1783080"/>
-            <a:ext cx="4846320" cy="3108960"/>
-          </a:xfrm>
-          <a:prstGeom prst="rect">
-            <a:avLst/>
-          </a:prstGeom>
-          <a:noFill/>
-        </p:spPr>
-        <p:txBody>
-          <a:bodyPr wrap="square">
-            <a:spAutoFit/>
-          </a:bodyPr>
-          <a:lstStyle/>
+              <a:rPr sz="1700" b="1">
+                <a:solidFill>
+                  <a:srgbClr val="EB6834"/>
+                </a:solidFill>
+                <a:latin typeface="Calibri"/>
+              </a:rPr>
+              <a:t>In progress</a:t>
+            </a:r>
+          </a:p>
           <a:p>
             <a:pPr algn="l">
               <a:lnSpc>
@@ -4245,13 +4410,13 @@
               </a:spcAft>
             </a:pPr>
             <a:r>
-              <a:rPr sz="1800" b="1">
-                <a:solidFill>
-                  <a:srgbClr val="8A8980"/>
-                </a:solidFill>
-                <a:latin typeface="Calibri"/>
-              </a:rPr>
-              <a:t>What we do not claim</a:t>
+              <a:rPr sz="1500" b="0">
+                <a:solidFill>
+                  <a:srgbClr val="5C5B54"/>
+                </a:solidFill>
+                <a:latin typeface="Calibri"/>
+              </a:rPr>
+              <a:t>• OAI integration in a separate repo — Tier-1 as GLPK simplex with successive convex approximation, Tier-2 inside the NR MAC</a:t>
             </a:r>
           </a:p>
           <a:p>
@@ -4264,15 +4429,38 @@
               </a:spcAft>
             </a:pPr>
             <a:r>
-              <a:rPr sz="1600" b="0">
+              <a:rPr sz="1500" b="0">
                 <a:solidFill>
                   <a:srgbClr val="5C5B54"/>
                 </a:solidFill>
                 <a:latin typeface="Calibri"/>
               </a:rPr>
-              <a:t>• Novelty for the design. It composes known parts.</a:t>
-            </a:r>
-          </a:p>
+              <a:t>• Porting the max-min stage and the per-5QI priority mapping onto that branch</a:t>
+            </a:r>
+          </a:p>
+        </p:txBody>
+      </p:sp>
+      <p:sp>
+        <p:nvSpPr>
+          <p:cNvPr id="7" name="TextBox 6"/>
+          <p:cNvSpPr txBox="1"/>
+          <p:nvPr/>
+        </p:nvSpPr>
+        <p:spPr>
+          <a:xfrm>
+            <a:off x="8046720" y="1719072"/>
+            <a:ext cx="3291840" cy="3180079"/>
+          </a:xfrm>
+          <a:prstGeom prst="rect">
+            <a:avLst/>
+          </a:prstGeom>
+          <a:noFill/>
+        </p:spPr>
+        <p:txBody>
+          <a:bodyPr wrap="square">
+            <a:spAutoFit/>
+          </a:bodyPr>
+          <a:lstStyle/>
           <a:p>
             <a:pPr algn="l">
               <a:lnSpc>
@@ -4283,13 +4471,13 @@
               </a:spcAft>
             </a:pPr>
             <a:r>
-              <a:rPr sz="1600" b="0">
-                <a:solidFill>
-                  <a:srgbClr val="5C5B54"/>
-                </a:solidFill>
-                <a:latin typeface="Calibri"/>
-              </a:rPr>
-              <a:t>• Silicon. This is simulation; comparative, not absolute. An OAI integration is the next step and is under way.</a:t>
+              <a:rPr sz="1700" b="1">
+                <a:solidFill>
+                  <a:srgbClr val="8A8980"/>
+                </a:solidFill>
+                <a:latin typeface="Calibri"/>
+              </a:rPr>
+              <a:t>To test on hardware</a:t>
             </a:r>
           </a:p>
           <a:p>
@@ -4302,27 +4490,84 @@
               </a:spcAft>
             </a:pPr>
             <a:r>
-              <a:rPr sz="1600" b="0">
+              <a:rPr sz="1500" b="0">
                 <a:solidFill>
                   <a:srgbClr val="5C5B54"/>
                 </a:solidFill>
                 <a:latin typeface="Calibri"/>
               </a:rPr>
-              <a:t>• External validity beyond three synthetic single-cell scenarios — no churn, no mobility, no inter-cell interference.</a:t>
-            </a:r>
-          </a:p>
-        </p:txBody>
-      </p:sp>
-      <p:sp>
-        <p:nvSpPr>
-          <p:cNvPr id="7" name="Rectangle 6"/>
+              <a:t>• End-to-end runs on OAI with COTS UEs</a:t>
+            </a:r>
+          </a:p>
+          <a:p>
+            <a:pPr algn="l">
+              <a:lnSpc>
+                <a:spcPct val="125000"/>
+              </a:lnSpc>
+              <a:spcAft>
+                <a:spcPts val="600"/>
+              </a:spcAft>
+            </a:pPr>
+            <a:r>
+              <a:rPr sz="1500" b="0">
+                <a:solidFill>
+                  <a:srgbClr val="5C5B54"/>
+                </a:solidFill>
+                <a:latin typeface="Calibri"/>
+              </a:rPr>
+              <a:t>• Tier-1 solve time inside a real 1 s budget</a:t>
+            </a:r>
+          </a:p>
+          <a:p>
+            <a:pPr algn="l">
+              <a:lnSpc>
+                <a:spcPct val="125000"/>
+              </a:lnSpc>
+              <a:spcAft>
+                <a:spcPts val="600"/>
+              </a:spcAft>
+            </a:pPr>
+            <a:r>
+              <a:rPr sz="1500" b="0">
+                <a:solidFill>
+                  <a:srgbClr val="5C5B54"/>
+                </a:solidFill>
+                <a:latin typeface="Calibri"/>
+              </a:rPr>
+              <a:t>• What the simulator omits: HARQ PRB cost, uplink grant timing, mobility, UE churn</a:t>
+            </a:r>
+          </a:p>
+          <a:p>
+            <a:pPr algn="l">
+              <a:lnSpc>
+                <a:spcPct val="125000"/>
+              </a:lnSpc>
+              <a:spcAft>
+                <a:spcPts val="600"/>
+              </a:spcAft>
+            </a:pPr>
+            <a:r>
+              <a:rPr sz="1500" b="0">
+                <a:solidFill>
+                  <a:srgbClr val="5C5B54"/>
+                </a:solidFill>
+                <a:latin typeface="Calibri"/>
+              </a:rPr>
+              <a:t>• Multi-cell and inter-cell interference</a:t>
+            </a:r>
+          </a:p>
+        </p:txBody>
+      </p:sp>
+      <p:sp>
+        <p:nvSpPr>
+          <p:cNvPr id="8" name="Rectangle 7"/>
           <p:cNvSpPr/>
           <p:nvPr/>
         </p:nvSpPr>
         <p:spPr>
           <a:xfrm>
-            <a:off x="822960" y="5349240"/>
-            <a:ext cx="10545775" cy="1234440"/>
+            <a:off x="822960" y="5200904"/>
+            <a:ext cx="10545775" cy="1620520"/>
           </a:xfrm>
           <a:prstGeom prst="rect">
             <a:avLst/>
@@ -4359,20 +4604,20 @@
       </p:sp>
       <p:sp>
         <p:nvSpPr>
-          <p:cNvPr id="8" name="Rectangle 7"/>
+          <p:cNvPr id="9" name="Rectangle 8"/>
           <p:cNvSpPr/>
           <p:nvPr/>
         </p:nvSpPr>
         <p:spPr>
           <a:xfrm>
-            <a:off x="822960" y="5349240"/>
-            <a:ext cx="50800" cy="1234440"/>
+            <a:off x="822960" y="5200904"/>
+            <a:ext cx="50800" cy="1620520"/>
           </a:xfrm>
           <a:prstGeom prst="rect">
             <a:avLst/>
           </a:prstGeom>
           <a:solidFill>
-            <a:srgbClr val="8A8980"/>
+            <a:srgbClr val="EB6834"/>
           </a:solidFill>
           <a:ln>
             <a:noFill/>
@@ -4403,14 +4648,14 @@
       </p:sp>
       <p:sp>
         <p:nvSpPr>
-          <p:cNvPr id="9" name="TextBox 8"/>
+          <p:cNvPr id="10" name="TextBox 9"/>
           <p:cNvSpPr txBox="1"/>
           <p:nvPr/>
         </p:nvSpPr>
         <p:spPr>
           <a:xfrm>
-            <a:off x="1051560" y="5477256"/>
-            <a:ext cx="10088575" cy="978408"/>
+            <a:off x="1051560" y="5338064"/>
+            <a:ext cx="10088575" cy="1346200"/>
           </a:xfrm>
           <a:prstGeom prst="rect">
             <a:avLst/>
@@ -4438,7 +4683,7 @@
                 </a:solidFill>
                 <a:latin typeface="Calibri"/>
               </a:rPr>
-              <a:t>The remaining unmodelled effects we know of — uplink grant timing, HARQ retransmissions consuming PRBs — would </a:t>
+              <a:t>The design is settled and the simulation case is made: against the PF scheduler OAI ships, it adds rate contracts, deadline tracking and a control-channel path, at a cost we can state and bound. </a:t>
             </a:r>
             <a:r>
               <a:rPr sz="1600" b="1">
@@ -4447,7 +4692,7 @@
                 </a:solidFill>
                 <a:latin typeface="Calibri"/>
               </a:rPr>
-              <a:t>widen</a:t>
+              <a:t>The open work is landing it on real hardware</a:t>
             </a:r>
             <a:r>
               <a:rPr sz="1600" b="0">
@@ -4456,7 +4701,7 @@
                 </a:solidFill>
                 <a:latin typeface="Calibri"/>
               </a:rPr>
-              <a:t> the configured-grant advantage, not narrow it. Though after the last three slides, we note that is asserted from mechanism, not measured.</a:t>
+              <a:t> — everything above is comparative, in a simulator, and silicon is the next step.</a:t>
             </a:r>
           </a:p>
         </p:txBody>
@@ -4516,7 +4761,7 @@
                 </a:solidFill>
                 <a:latin typeface="Calibri"/>
               </a:rPr>
-              <a:t>THE SETTING</a:t>
+              <a:t>MOTIVATION</a:t>
             </a:r>
           </a:p>
         </p:txBody>
@@ -4558,7 +4803,7 @@
                 </a:solidFill>
                 <a:latin typeface="Calibri"/>
               </a:rPr>
-              <a:t>One cell, three kinds of promise</a:t>
+              <a:t>The factory floor asks for three different things</a:t>
             </a:r>
           </a:p>
         </p:txBody>
@@ -4616,7 +4861,7 @@
         <p:spPr>
           <a:xfrm>
             <a:off x="822960" y="1783080"/>
-            <a:ext cx="10545775" cy="457200"/>
+            <a:ext cx="10545775" cy="739140"/>
           </a:xfrm>
           <a:prstGeom prst="rect">
             <a:avLst/>
@@ -4644,7 +4889,7 @@
                 </a:solidFill>
                 <a:latin typeface="Calibri"/>
               </a:rPr>
-              <a:t>A factory floor puts traffic on one carrier whose classes want qualitatively different things:</a:t>
+              <a:t>One private 5G cell, one carrier, and traffic classes that differ in kind rather than in volume:</a:t>
             </a:r>
           </a:p>
         </p:txBody>
@@ -4658,7 +4903,7 @@
           <p:nvPr/>
         </p:nvGraphicFramePr>
         <p:xfrm>
-          <a:off x="822960" y="2377440"/>
+          <a:off x="822960" y="2778252"/>
           <a:ext cx="10545774" cy="1243584"/>
         </p:xfrm>
         <a:graphic>
@@ -4668,10 +4913,10 @@
                 <a:tableStyleId>{5C22544A-7EE6-4342-B048-85BDC9FD1C3A}</a:tableStyleId>
               </a:tblPr>
               <a:tblGrid>
-                <a:gridCol w="1432142"/>
-                <a:gridCol w="3124674"/>
-                <a:gridCol w="2603895"/>
-                <a:gridCol w="3385063"/>
+                <a:gridCol w="1414677"/>
+                <a:gridCol w="3215175"/>
+                <a:gridCol w="2572140"/>
+                <a:gridCol w="3343782"/>
               </a:tblGrid>
               <a:tr h="310896">
                 <a:tc>
@@ -4733,7 +4978,7 @@
                           </a:solidFill>
                           <a:latin typeface="Calibri"/>
                         </a:rPr>
-                        <a:t>What it wants</a:t>
+                        <a:t>What it needs</a:t>
                       </a:r>
                     </a:p>
                   </a:txBody>
@@ -4756,7 +5001,7 @@
                           </a:solidFill>
                           <a:latin typeface="Calibri"/>
                         </a:rPr>
-                        <a:t>What failure looks like</a:t>
+                        <a:t>How you know it failed</a:t>
                       </a:r>
                     </a:p>
                   </a:txBody>
@@ -4804,7 +5049,7 @@
                           </a:solidFill>
                           <a:latin typeface="Calibri"/>
                         </a:rPr>
-                        <a:t>Robot camera / LIDAR uplink</a:t>
+                        <a:t>Robot camera and LIDAR uplink</a:t>
                       </a:r>
                     </a:p>
                   </a:txBody>
@@ -4850,7 +5095,7 @@
                           </a:solidFill>
                           <a:latin typeface="Calibri"/>
                         </a:rPr>
-                        <a:t>Visible artefacts, lost frames</a:t>
+                        <a:t>Dropped frames, blind robot</a:t>
                       </a:r>
                     </a:p>
                   </a:txBody>
@@ -4992,7 +5237,7 @@
                           </a:solidFill>
                           <a:latin typeface="Calibri"/>
                         </a:rPr>
-                        <a:t>Firmware, log upload</a:t>
+                        <a:t>Firmware push, log upload</a:t>
                       </a:r>
                     </a:p>
                   </a:txBody>
@@ -5061,8 +5306,8 @@
         </p:nvSpPr>
         <p:spPr>
           <a:xfrm>
-            <a:off x="822960" y="4114800"/>
-            <a:ext cx="10545775" cy="1051560"/>
+            <a:off x="822960" y="4296156"/>
+            <a:ext cx="10545775" cy="1325879"/>
           </a:xfrm>
           <a:prstGeom prst="rect">
             <a:avLst/>
@@ -5105,8 +5350,8 @@
         </p:nvSpPr>
         <p:spPr>
           <a:xfrm>
-            <a:off x="822960" y="4114800"/>
-            <a:ext cx="50800" cy="1051560"/>
+            <a:off x="822960" y="4296156"/>
+            <a:ext cx="50800" cy="1325879"/>
           </a:xfrm>
           <a:prstGeom prst="rect">
             <a:avLst/>
@@ -5149,8 +5394,8 @@
         </p:nvSpPr>
         <p:spPr>
           <a:xfrm>
-            <a:off x="1051560" y="4242816"/>
-            <a:ext cx="10088575" cy="795528"/>
+            <a:off x="1051560" y="4433316"/>
+            <a:ext cx="10088575" cy="1051559"/>
           </a:xfrm>
           <a:prstGeom prst="rect">
             <a:avLst/>
@@ -5178,7 +5423,7 @@
                 </a:solidFill>
                 <a:latin typeface="Calibri"/>
               </a:rPr>
-              <a:t>Proportional fair — the LTE/NR default, and what OAI ships — represents </a:t>
+              <a:t>OpenAirInterface's NR MAC schedules with a </a:t>
             </a:r>
             <a:r>
               <a:rPr sz="1600" b="1">
@@ -5187,7 +5432,7 @@
                 </a:solidFill>
                 <a:latin typeface="Calibri"/>
               </a:rPr>
-              <a:t>neither a rate contract nor a deadline</a:t>
+              <a:t>proportional-fair metric over per-UE grants</a:t>
             </a:r>
             <a:r>
               <a:rPr sz="1600" b="0">
@@ -5196,7 +5441,7 @@
                 </a:solidFill>
                 <a:latin typeface="Calibri"/>
               </a:rPr>
-              <a:t>. It is a good answer to a question the factory is not asking.</a:t>
+              <a:t>. PF has no term for a rate contract, no term for a deadline, and no configured-grant path for periodic traffic. It is a good answer to a question the factory is not asking.</a:t>
             </a:r>
           </a:p>
         </p:txBody>
@@ -5209,8 +5454,8 @@
         </p:nvSpPr>
         <p:spPr>
           <a:xfrm>
-            <a:off x="822960" y="5440680"/>
-            <a:ext cx="10545775" cy="548640"/>
+            <a:off x="822960" y="5896355"/>
+            <a:ext cx="10545775" cy="665480"/>
           </a:xfrm>
           <a:prstGeom prst="rect">
             <a:avLst/>
@@ -5238,7 +5483,7 @@
                 </a:solidFill>
                 <a:latin typeface="Calibri"/>
               </a:rPr>
-              <a:t>A GBR flow wants a specific rate or nothing of value. A delay flow wants its bytes before a deadline, after which they are worthless.</a:t>
+              <a:t>A robot whose video is switched off entirely is a failure in a way a uniformly degraded fleet is not — a distinction a throughput-fair metric cannot see, let alone act on.</a:t>
             </a:r>
           </a:p>
         </p:txBody>
@@ -5298,7 +5543,7 @@
                 </a:solidFill>
                 <a:latin typeface="Calibri"/>
               </a:rPr>
-              <a:t>WHAT WE BUILT</a:t>
+              <a:t>INFORMING THE DESIGN</a:t>
             </a:r>
           </a:p>
         </p:txBody>
@@ -5340,7 +5585,7 @@
                 </a:solidFill>
                 <a:latin typeface="Calibri"/>
               </a:rPr>
-              <a:t>The design — and we claim no novelty for it</a:t>
+              <a:t>What the prior art told us to do — and not to</a:t>
             </a:r>
           </a:p>
         </p:txBody>
@@ -5397,8 +5642,8 @@
         </p:nvSpPr>
         <p:spPr>
           <a:xfrm>
-            <a:off x="822960" y="1783080"/>
-            <a:ext cx="5394960" cy="2926080"/>
+            <a:off x="822960" y="1719072"/>
+            <a:ext cx="5394960" cy="3750944"/>
           </a:xfrm>
           <a:prstGeom prst="rect">
             <a:avLst/>
@@ -5420,32 +5665,13 @@
               </a:spcAft>
             </a:pPr>
             <a:r>
-              <a:rPr sz="1700" b="1">
-                <a:solidFill>
-                  <a:srgbClr val="EB6834"/>
-                </a:solidFill>
-                <a:latin typeface="Calibri"/>
-              </a:rPr>
-              <a:t>Tier-1  ·  every ~1 s</a:t>
-            </a:r>
-          </a:p>
-          <a:p>
-            <a:pPr algn="l">
-              <a:lnSpc>
-                <a:spcPct val="125000"/>
-              </a:lnSpc>
-              <a:spcAft>
-                <a:spcPts val="1400"/>
-              </a:spcAft>
-            </a:pPr>
-            <a:r>
-              <a:rPr sz="1600" b="0">
-                <a:solidFill>
-                  <a:srgbClr val="5C5B54"/>
-                </a:solidFill>
-                <a:latin typeface="Calibri"/>
-              </a:rPr>
-              <a:t>A convex program sets a target rate per flow: max-min GBR floor, then minimise contract shortfall, then maximise weighted log utility.</a:t>
+              <a:rPr sz="1800" b="1">
+                <a:solidFill>
+                  <a:srgbClr val="008300"/>
+                </a:solidFill>
+                <a:latin typeface="Calibri"/>
+              </a:rPr>
+              <a:t>Adopted</a:t>
             </a:r>
           </a:p>
           <a:p>
@@ -5458,32 +5684,22 @@
               </a:spcAft>
             </a:pPr>
             <a:r>
-              <a:rPr sz="1700" b="1">
-                <a:solidFill>
-                  <a:srgbClr val="EB6834"/>
-                </a:solidFill>
-                <a:latin typeface="Calibri"/>
-              </a:rPr>
-              <a:t>Tier-2  ·  every slot</a:t>
-            </a:r>
-          </a:p>
-          <a:p>
-            <a:pPr algn="l">
-              <a:lnSpc>
-                <a:spcPct val="125000"/>
-              </a:lnSpc>
-              <a:spcAft>
-                <a:spcPts val="1400"/>
-              </a:spcAft>
-            </a:pPr>
-            <a:r>
-              <a:rPr sz="1600" b="0">
+              <a:rPr sz="1500" b="1">
                 <a:solidFill>
                   <a:srgbClr val="5C5B54"/>
                 </a:solidFill>
                 <a:latin typeface="Calibri"/>
               </a:rPr>
-              <a:t>Drift-plus-penalty virtual queues track those targets. Grants are per UE — one DCI, one transport block — filled by a MAC logical-channel multiplexer.</a:t>
+              <a:t>Two timescales.</a:t>
+            </a:r>
+            <a:r>
+              <a:rPr sz="1500" b="0">
+                <a:solidFill>
+                  <a:srgbClr val="5C5B54"/>
+                </a:solidFill>
+                <a:latin typeface="Calibri"/>
+              </a:rPr>
+              <a:t> A slow declarative program over a fast per-slot controller — the pattern behind NVS (Kokku 2012) and the O-RAN RIC split. We instantiate it; we do not claim it.</a:t>
             </a:r>
           </a:p>
           <a:p>
@@ -5496,13 +5712,22 @@
               </a:spcAft>
             </a:pPr>
             <a:r>
-              <a:rPr sz="1700" b="1">
-                <a:solidFill>
-                  <a:srgbClr val="EB6834"/>
-                </a:solidFill>
-                <a:latin typeface="Calibri"/>
-              </a:rPr>
-              <a:t>Configured grants</a:t>
+              <a:rPr sz="1500" b="1">
+                <a:solidFill>
+                  <a:srgbClr val="5C5B54"/>
+                </a:solidFill>
+                <a:latin typeface="Calibri"/>
+              </a:rPr>
+              <a:t>Network utility maximisation</a:t>
+            </a:r>
+            <a:r>
+              <a:rPr sz="1500" b="0">
+                <a:solidFill>
+                  <a:srgbClr val="5C5B54"/>
+                </a:solidFill>
+                <a:latin typeface="Calibri"/>
+              </a:rPr>
+              <a:t> (Kelly 1998) for the slow tier — an objective a plant engineer can read and audit.</a:t>
             </a:r>
           </a:p>
           <a:p>
@@ -5515,27 +5740,162 @@
               </a:spcAft>
             </a:pPr>
             <a:r>
-              <a:rPr sz="1600" b="0">
+              <a:rPr sz="1500" b="1">
                 <a:solidFill>
                   <a:srgbClr val="5C5B54"/>
                 </a:solidFill>
                 <a:latin typeface="Calibri"/>
               </a:rPr>
-              <a:t>Periodic flows get standing allocations, self-gated so they stand aside when they would hurt.</a:t>
-            </a:r>
-          </a:p>
-        </p:txBody>
-      </p:sp>
-      <p:sp>
-        <p:nvSpPr>
-          <p:cNvPr id="6" name="Rectangle 5"/>
+              <a:t>Drift-plus-penalty</a:t>
+            </a:r>
+            <a:r>
+              <a:rPr sz="1500" b="0">
+                <a:solidFill>
+                  <a:srgbClr val="5C5B54"/>
+                </a:solidFill>
+                <a:latin typeface="Calibri"/>
+              </a:rPr>
+              <a:t> (Neely 2010) for the fast tier — it solves the per-slot problem, and needs a target, which Tier-1 supplies.</a:t>
+            </a:r>
+          </a:p>
+          <a:p>
+            <a:pPr algn="l">
+              <a:lnSpc>
+                <a:spcPct val="125000"/>
+              </a:lnSpc>
+              <a:spcAft>
+                <a:spcPts val="600"/>
+              </a:spcAft>
+            </a:pPr>
+            <a:r>
+              <a:rPr sz="1500" b="1">
+                <a:solidFill>
+                  <a:srgbClr val="5C5B54"/>
+                </a:solidFill>
+                <a:latin typeface="Calibri"/>
+              </a:rPr>
+              <a:t>Configured grants</a:t>
+            </a:r>
+            <a:r>
+              <a:rPr sz="1500" b="0">
+                <a:solidFill>
+                  <a:srgbClr val="5C5B54"/>
+                </a:solidFill>
+                <a:latin typeface="Calibri"/>
+              </a:rPr>
+              <a:t> dominate latency for time-critical industrial traffic (Larrañaga 2023, ns-3 / 5G-LENA).</a:t>
+            </a:r>
+          </a:p>
+        </p:txBody>
+      </p:sp>
+      <p:sp>
+        <p:nvSpPr>
+          <p:cNvPr id="6" name="TextBox 5"/>
+          <p:cNvSpPr txBox="1"/>
+          <p:nvPr/>
+        </p:nvSpPr>
+        <p:spPr>
+          <a:xfrm>
+            <a:off x="6492240" y="1719072"/>
+            <a:ext cx="4846320" cy="3322320"/>
+          </a:xfrm>
+          <a:prstGeom prst="rect">
+            <a:avLst/>
+          </a:prstGeom>
+          <a:noFill/>
+        </p:spPr>
+        <p:txBody>
+          <a:bodyPr wrap="square">
+            <a:spAutoFit/>
+          </a:bodyPr>
+          <a:lstStyle/>
+          <a:p>
+            <a:pPr algn="l">
+              <a:lnSpc>
+                <a:spcPct val="125000"/>
+              </a:lnSpc>
+              <a:spcAft>
+                <a:spcPts val="600"/>
+              </a:spcAft>
+            </a:pPr>
+            <a:r>
+              <a:rPr sz="1800" b="1">
+                <a:solidFill>
+                  <a:srgbClr val="E34948"/>
+                </a:solidFill>
+                <a:latin typeface="Calibri"/>
+              </a:rPr>
+              <a:t>Ruled out, and why</a:t>
+            </a:r>
+          </a:p>
+          <a:p>
+            <a:pPr algn="l">
+              <a:lnSpc>
+                <a:spcPct val="125000"/>
+              </a:lnSpc>
+              <a:spcAft>
+                <a:spcPts val="600"/>
+              </a:spcAft>
+            </a:pPr>
+            <a:r>
+              <a:rPr sz="1500" b="1">
+                <a:solidFill>
+                  <a:srgbClr val="5C5B54"/>
+                </a:solidFill>
+                <a:latin typeface="Calibri"/>
+              </a:rPr>
+              <a:t>Tuned PF variants</a:t>
+            </a:r>
+            <a:r>
+              <a:rPr sz="1500" b="0">
+                <a:solidFill>
+                  <a:srgbClr val="5C5B54"/>
+                </a:solidFill>
+                <a:latin typeface="Calibri"/>
+              </a:rPr>
+              <a:t> — M-LWDF, Exp-rule. Excellent on delay; on rate they saturate, because a multiplicative deficit weight equalises a weighted 1/R_avg and cannot reach an arbitrary unequal target. Monghal (2008) measured exactly that.</a:t>
+            </a:r>
+          </a:p>
+          <a:p>
+            <a:pPr algn="l">
+              <a:lnSpc>
+                <a:spcPct val="125000"/>
+              </a:lnSpc>
+              <a:spcAft>
+                <a:spcPts val="600"/>
+              </a:spcAft>
+            </a:pPr>
+            <a:r>
+              <a:rPr sz="1500" b="1">
+                <a:solidFill>
+                  <a:srgbClr val="5C5B54"/>
+                </a:solidFill>
+                <a:latin typeface="Calibri"/>
+              </a:rPr>
+              <a:t>Learned schedulers.</a:t>
+            </a:r>
+            <a:r>
+              <a:rPr sz="1500" b="0">
+                <a:solidFill>
+                  <a:srgbClr val="5C5B54"/>
+                </a:solidFill>
+                <a:latin typeface="Calibri"/>
+              </a:rPr>
+              <a:t> Kela (2024), arguing from inside that literature, finds deployable deep schedulers do not yet exist — real-time cost, 3GPP compliance, and poor generalisation across bandwidth and traffic mix.</a:t>
+            </a:r>
+          </a:p>
+        </p:txBody>
+      </p:sp>
+      <p:sp>
+        <p:nvSpPr>
+          <p:cNvPr id="7" name="Rectangle 6"/>
           <p:cNvSpPr/>
           <p:nvPr/>
         </p:nvSpPr>
         <p:spPr>
           <a:xfrm>
-            <a:off x="6583680" y="1783080"/>
-            <a:ext cx="4754880" cy="2651760"/>
+            <a:off x="822960" y="5771768"/>
+            <a:ext cx="10545775" cy="1031240"/>
           </a:xfrm>
           <a:prstGeom prst="rect">
             <a:avLst/>
@@ -5572,20 +5932,20 @@
       </p:sp>
       <p:sp>
         <p:nvSpPr>
-          <p:cNvPr id="7" name="Rectangle 6"/>
+          <p:cNvPr id="8" name="Rectangle 7"/>
           <p:cNvSpPr/>
           <p:nvPr/>
         </p:nvSpPr>
         <p:spPr>
           <a:xfrm>
-            <a:off x="6583680" y="1783080"/>
-            <a:ext cx="50800" cy="2651760"/>
+            <a:off x="822960" y="5771768"/>
+            <a:ext cx="50800" cy="1031240"/>
           </a:xfrm>
           <a:prstGeom prst="rect">
             <a:avLst/>
           </a:prstGeom>
           <a:solidFill>
-            <a:srgbClr val="8A8980"/>
+            <a:srgbClr val="EB6834"/>
           </a:solidFill>
           <a:ln>
             <a:noFill/>
@@ -5616,14 +5976,14 @@
       </p:sp>
       <p:sp>
         <p:nvSpPr>
-          <p:cNvPr id="8" name="TextBox 7"/>
+          <p:cNvPr id="9" name="TextBox 8"/>
           <p:cNvSpPr txBox="1"/>
           <p:nvPr/>
         </p:nvSpPr>
         <p:spPr>
           <a:xfrm>
-            <a:off x="6812280" y="1911096"/>
-            <a:ext cx="4297680" cy="2395728"/>
+            <a:off x="1051560" y="5908928"/>
+            <a:ext cx="10088575" cy="756920"/>
           </a:xfrm>
           <a:prstGeom prst="rect">
             <a:avLst/>
@@ -5651,8 +6011,7 @@
                 </a:solidFill>
                 <a:latin typeface="Calibri"/>
               </a:rPr>
-              <a:t>This composes established parts — network utility maximisation over a slow horizon feeding Lyapunov drift-plus-penalty per slot.
-</a:t>
+              <a:t>Two commitments follow: an </a:t>
             </a:r>
             <a:r>
               <a:rPr sz="1600" b="1">
@@ -5661,7 +6020,7 @@
                 </a:solidFill>
                 <a:latin typeface="Calibri"/>
               </a:rPr>
-              <a:t>It is the pattern behind NVS and the O-RAN RIC split.</a:t>
+              <a:t>integrator, not a metric multiplier</a:t>
             </a:r>
             <a:r>
               <a:rPr sz="1600" b="0">
@@ -5670,49 +6029,25 @@
                 </a:solidFill>
                 <a:latin typeface="Calibri"/>
               </a:rPr>
-              <a:t> We present it because the composition, and the places it goes wrong, are instructive.</a:t>
-            </a:r>
-          </a:p>
-        </p:txBody>
-      </p:sp>
-      <p:sp>
-        <p:nvSpPr>
-          <p:cNvPr id="9" name="TextBox 8"/>
-          <p:cNvSpPr txBox="1"/>
-          <p:nvPr/>
-        </p:nvSpPr>
-        <p:spPr>
-          <a:xfrm>
-            <a:off x="822960" y="5897880"/>
-            <a:ext cx="10545775" cy="731520"/>
-          </a:xfrm>
-          <a:prstGeom prst="rect">
-            <a:avLst/>
-          </a:prstGeom>
-          <a:noFill/>
-        </p:spPr>
-        <p:txBody>
-          <a:bodyPr wrap="square">
-            <a:spAutoFit/>
-          </a:bodyPr>
-          <a:lstStyle/>
-          <a:p>
-            <a:pPr algn="l">
-              <a:lnSpc>
-                <a:spcPct val="125000"/>
-              </a:lnSpc>
-              <a:spcAft>
-                <a:spcPts val="600"/>
-              </a:spcAft>
-            </a:pPr>
+              <a:t> in the fast tier, so an arbitrary target vector is reachable; and a </a:t>
+            </a:r>
+            <a:r>
+              <a:rPr sz="1600" b="1">
+                <a:solidFill>
+                  <a:srgbClr val="1A1A19"/>
+                </a:solidFill>
+                <a:latin typeface="Calibri"/>
+              </a:rPr>
+              <a:t>convex program with one auditable fairness dial</a:t>
+            </a:r>
             <a:r>
               <a:rPr sz="1600" b="0">
                 <a:solidFill>
-                  <a:srgbClr val="8A8980"/>
-                </a:solidFill>
-                <a:latin typeface="Calibri"/>
-              </a:rPr>
-              <a:t>Evaluated against Round Robin, Proportional Fair and a class-aware Gradient baseline. All four grant per UE, so the comparison isolates QoS-awareness rather than grant granularity.</a:t>
+                  <a:srgbClr val="1A1A19"/>
+                </a:solidFill>
+                <a:latin typeface="Calibri"/>
+              </a:rPr>
+              <a:t> in the slow tier.</a:t>
             </a:r>
           </a:p>
         </p:txBody>
@@ -5772,7 +6107,7 @@
                 </a:solidFill>
                 <a:latin typeface="Calibri"/>
               </a:rPr>
-              <a:t>RESULT · SENSOR_DENSE</a:t>
+              <a:t>THE DESIGN  ·  EVERY ~1 S</a:t>
             </a:r>
           </a:p>
         </p:txBody>
@@ -5814,7 +6149,7 @@
                 </a:solidFill>
                 <a:latin typeface="Calibri"/>
               </a:rPr>
-              <a:t>Where it wins outright (1): the control channel binds</a:t>
+              <a:t>Tier-1: what rate should each flow target?</a:t>
             </a:r>
           </a:p>
         </p:txBody>
@@ -5871,8 +6206,8 @@
         </p:nvSpPr>
         <p:spPr>
           <a:xfrm>
-            <a:off x="822960" y="1783080"/>
-            <a:ext cx="10545775" cy="457200"/>
+            <a:off x="822960" y="1664208"/>
+            <a:ext cx="5760720" cy="352424"/>
           </a:xfrm>
           <a:prstGeom prst="rect">
             <a:avLst/>
@@ -5894,13 +6229,2580 @@
               </a:spcAft>
             </a:pPr>
             <a:r>
+              <a:rPr sz="1500" b="0">
+                <a:solidFill>
+                  <a:srgbClr val="5C5B54"/>
+                </a:solidFill>
+                <a:latin typeface="Calibri"/>
+              </a:rPr>
+              <a:t>Rates r_i ≥ 0, slacks s ≥ 0, one feasible set F(floor):</a:t>
+            </a:r>
+          </a:p>
+        </p:txBody>
+      </p:sp>
+      <p:sp>
+        <p:nvSpPr>
+          <p:cNvPr id="6" name="TextBox 5"/>
+          <p:cNvSpPr txBox="1"/>
+          <p:nvPr/>
+        </p:nvSpPr>
+        <p:spPr>
+          <a:xfrm>
+            <a:off x="822960" y="2144649"/>
+            <a:ext cx="5760720" cy="2141118"/>
+          </a:xfrm>
+          <a:prstGeom prst="rect">
+            <a:avLst/>
+          </a:prstGeom>
+          <a:noFill/>
+        </p:spPr>
+        <p:txBody>
+          <a:bodyPr wrap="square">
+            <a:spAutoFit/>
+          </a:bodyPr>
+          <a:lstStyle/>
+          <a:p>
+            <a:pPr algn="l">
+              <a:lnSpc>
+                <a:spcPct val="130000"/>
+              </a:lnSpc>
+              <a:spcAft>
+                <a:spcPts val="0"/>
+              </a:spcAft>
+            </a:pPr>
+            <a:r>
+              <a:rPr sz="1400" b="0">
+                <a:solidFill>
+                  <a:srgbClr val="1A1A19"/>
+                </a:solidFill>
+                <a:latin typeface="Consolas"/>
+              </a:rPr>
+              <a:t>Σ_{i∈d} r_i / SE_i  ≤  C_d</a:t>
+            </a:r>
+          </a:p>
+          <a:p>
+            <a:pPr algn="l">
+              <a:lnSpc>
+                <a:spcPct val="110000"/>
+              </a:lnSpc>
+              <a:spcAft>
+                <a:spcPts val="700"/>
+              </a:spcAft>
+            </a:pPr>
+            <a:r>
+              <a:rPr sz="1100" b="0">
+                <a:solidFill>
+                  <a:srgbClr val="8A8980"/>
+                </a:solidFill>
+                <a:latin typeface="Calibri"/>
+              </a:rPr>
+              <a:t>capacity in PRB-symbols, special slot included</a:t>
+            </a:r>
+          </a:p>
+          <a:p>
+            <a:pPr algn="l">
+              <a:lnSpc>
+                <a:spcPct val="130000"/>
+              </a:lnSpc>
+              <a:spcAft>
+                <a:spcPts val="0"/>
+              </a:spcAft>
+            </a:pPr>
+            <a:r>
+              <a:rPr sz="1400" b="0">
+                <a:solidFill>
+                  <a:srgbClr val="1A1A19"/>
+                </a:solidFill>
+                <a:latin typeface="Consolas"/>
+              </a:rPr>
+              <a:t>r_i + s_i  ≥  G_i</a:t>
+            </a:r>
+          </a:p>
+          <a:p>
+            <a:pPr algn="l">
+              <a:lnSpc>
+                <a:spcPct val="110000"/>
+              </a:lnSpc>
+              <a:spcAft>
+                <a:spcPts val="700"/>
+              </a:spcAft>
+            </a:pPr>
+            <a:r>
+              <a:rPr sz="1100" b="0">
+                <a:solidFill>
+                  <a:srgbClr val="8A8980"/>
+                </a:solidFill>
+                <a:latin typeface="Calibri"/>
+              </a:rPr>
+              <a:t>GBR contract — soft, so overload stays feasible</a:t>
+            </a:r>
+          </a:p>
+          <a:p>
+            <a:pPr algn="l">
+              <a:lnSpc>
+                <a:spcPct val="130000"/>
+              </a:lnSpc>
+              <a:spcAft>
+                <a:spcPts val="0"/>
+              </a:spcAft>
+            </a:pPr>
+            <a:r>
+              <a:rPr sz="1400" b="0">
+                <a:solidFill>
+                  <a:srgbClr val="1A1A19"/>
+                </a:solidFill>
+                <a:latin typeface="Consolas"/>
+              </a:rPr>
+              <a:t>r_i  ≥  floor_i</a:t>
+            </a:r>
+          </a:p>
+          <a:p>
+            <a:pPr algn="l">
+              <a:lnSpc>
+                <a:spcPct val="110000"/>
+              </a:lnSpc>
+              <a:spcAft>
+                <a:spcPts val="700"/>
+              </a:spcAft>
+            </a:pPr>
+            <a:r>
+              <a:rPr sz="1100" b="0">
+                <a:solidFill>
+                  <a:srgbClr val="8A8980"/>
+                </a:solidFill>
+                <a:latin typeface="Calibri"/>
+              </a:rPr>
+              <a:t>max-min floor — hard</a:t>
+            </a:r>
+          </a:p>
+          <a:p>
+            <a:pPr algn="l">
+              <a:lnSpc>
+                <a:spcPct val="130000"/>
+              </a:lnSpc>
+              <a:spcAft>
+                <a:spcPts val="0"/>
+              </a:spcAft>
+            </a:pPr>
+            <a:r>
+              <a:rPr sz="1400" b="0">
+                <a:solidFill>
+                  <a:srgbClr val="1A1A19"/>
+                </a:solidFill>
+                <a:latin typeface="Consolas"/>
+              </a:rPr>
+              <a:t>Σ_{i∈σ} r_i/SE_i + s_σ  ≥  φ_σ·C_d</a:t>
+            </a:r>
+          </a:p>
+          <a:p>
+            <a:pPr algn="l">
+              <a:lnSpc>
+                <a:spcPct val="110000"/>
+              </a:lnSpc>
+              <a:spcAft>
+                <a:spcPts val="700"/>
+              </a:spcAft>
+            </a:pPr>
+            <a:r>
+              <a:rPr sz="1100" b="0">
+                <a:solidFill>
+                  <a:srgbClr val="8A8980"/>
+                </a:solidFill>
+                <a:latin typeface="Calibri"/>
+              </a:rPr>
+              <a:t>slice share — soft, demand-capped, work-conserving</a:t>
+            </a:r>
+          </a:p>
+        </p:txBody>
+      </p:sp>
+      <p:sp>
+        <p:nvSpPr>
+          <p:cNvPr id="7" name="TextBox 6"/>
+          <p:cNvSpPr txBox="1"/>
+          <p:nvPr/>
+        </p:nvSpPr>
+        <p:spPr>
+          <a:xfrm>
+            <a:off x="822960" y="4432071"/>
+            <a:ext cx="5760720" cy="352424"/>
+          </a:xfrm>
+          <a:prstGeom prst="rect">
+            <a:avLst/>
+          </a:prstGeom>
+          <a:noFill/>
+        </p:spPr>
+        <p:txBody>
+          <a:bodyPr wrap="square">
+            <a:spAutoFit/>
+          </a:bodyPr>
+          <a:lstStyle/>
+          <a:p>
+            <a:pPr algn="l">
+              <a:lnSpc>
+                <a:spcPct val="125000"/>
+              </a:lnSpc>
+              <a:spcAft>
+                <a:spcPts val="600"/>
+              </a:spcAft>
+            </a:pPr>
+            <a:r>
+              <a:rPr sz="1500" b="0">
+                <a:solidFill>
+                  <a:srgbClr val="5C5B54"/>
+                </a:solidFill>
+                <a:latin typeface="Calibri"/>
+              </a:rPr>
+              <a:t>Solved in three stages, in that order:</a:t>
+            </a:r>
+          </a:p>
+        </p:txBody>
+      </p:sp>
+      <p:sp>
+        <p:nvSpPr>
+          <p:cNvPr id="8" name="TextBox 7"/>
+          <p:cNvSpPr txBox="1"/>
+          <p:nvPr/>
+        </p:nvSpPr>
+        <p:spPr>
+          <a:xfrm>
+            <a:off x="822960" y="4912512"/>
+            <a:ext cx="5760720" cy="1249324"/>
+          </a:xfrm>
+          <a:prstGeom prst="rect">
+            <a:avLst/>
+          </a:prstGeom>
+          <a:noFill/>
+        </p:spPr>
+        <p:txBody>
+          <a:bodyPr wrap="square">
+            <a:spAutoFit/>
+          </a:bodyPr>
+          <a:lstStyle/>
+          <a:p>
+            <a:pPr algn="l">
+              <a:lnSpc>
+                <a:spcPct val="130000"/>
+              </a:lnSpc>
+              <a:spcAft>
+                <a:spcPts val="0"/>
+              </a:spcAft>
+            </a:pPr>
+            <a:r>
+              <a:rPr sz="1400" b="0">
+                <a:solidFill>
+                  <a:srgbClr val="1A1A19"/>
+                </a:solidFill>
+                <a:latin typeface="Consolas"/>
+              </a:rPr>
+              <a:t>A.  t* = max t  s.t.  r_i ≥ t·Ĝ_i  ∀ GBR</a:t>
+            </a:r>
+          </a:p>
+          <a:p>
+            <a:pPr algn="l">
+              <a:lnSpc>
+                <a:spcPct val="110000"/>
+              </a:lnSpc>
+              <a:spcAft>
+                <a:spcPts val="700"/>
+              </a:spcAft>
+            </a:pPr>
+            <a:r>
+              <a:rPr sz="1100" b="0">
+                <a:solidFill>
+                  <a:srgbClr val="8A8980"/>
+                </a:solidFill>
+                <a:latin typeface="Calibri"/>
+              </a:rPr>
+              <a:t>then  floor_i = α·t*·Ĝ_i</a:t>
+            </a:r>
+          </a:p>
+          <a:p>
+            <a:pPr algn="l">
+              <a:lnSpc>
+                <a:spcPct val="130000"/>
+              </a:lnSpc>
+              <a:spcAft>
+                <a:spcPts val="700"/>
+              </a:spcAft>
+            </a:pPr>
+            <a:r>
+              <a:rPr sz="1400" b="0">
+                <a:solidFill>
+                  <a:srgbClr val="1A1A19"/>
+                </a:solidFill>
+                <a:latin typeface="Consolas"/>
+              </a:rPr>
+              <a:t>B1. S* = min Σ p_i·s_i + p_σ Σ SE_σ·s_σ</a:t>
+            </a:r>
+          </a:p>
+          <a:p>
+            <a:pPr algn="l">
+              <a:lnSpc>
+                <a:spcPct val="130000"/>
+              </a:lnSpc>
+              <a:spcAft>
+                <a:spcPts val="700"/>
+              </a:spcAft>
+            </a:pPr>
+            <a:r>
+              <a:rPr sz="1400" b="0">
+                <a:solidFill>
+                  <a:srgbClr val="1A1A19"/>
+                </a:solidFill>
+                <a:latin typeface="Consolas"/>
+              </a:rPr>
+              <a:t>B2.      max Σ w_c·log(r_i+ε)  s.t. Σ p_i·s_i ≤ S*</a:t>
+            </a:r>
+          </a:p>
+        </p:txBody>
+      </p:sp>
+      <p:sp>
+        <p:nvSpPr>
+          <p:cNvPr id="9" name="Rectangle 8"/>
+          <p:cNvSpPr/>
+          <p:nvPr/>
+        </p:nvSpPr>
+        <p:spPr>
+          <a:xfrm>
+            <a:off x="6949440" y="1691640"/>
+            <a:ext cx="4434840" cy="2099310"/>
+          </a:xfrm>
+          <a:prstGeom prst="rect">
+            <a:avLst/>
+          </a:prstGeom>
+          <a:solidFill>
+            <a:srgbClr val="F5F4F0"/>
+          </a:solidFill>
+          <a:ln>
+            <a:noFill/>
+          </a:ln>
+          <a:effectLst/>
+        </p:spPr>
+        <p:style>
+          <a:lnRef idx="1">
+            <a:schemeClr val="accent1"/>
+          </a:lnRef>
+          <a:fillRef idx="3">
+            <a:schemeClr val="accent1"/>
+          </a:fillRef>
+          <a:effectRef idx="2">
+            <a:schemeClr val="accent1"/>
+          </a:effectRef>
+          <a:fontRef idx="minor">
+            <a:schemeClr val="lt1"/>
+          </a:fontRef>
+        </p:style>
+        <p:txBody>
+          <a:bodyPr rtlCol="0" anchor="ctr"/>
+          <a:lstStyle/>
+          <a:p>
+            <a:pPr algn="ctr"/>
+          </a:p>
+        </p:txBody>
+      </p:sp>
+      <p:sp>
+        <p:nvSpPr>
+          <p:cNvPr id="10" name="Rectangle 9"/>
+          <p:cNvSpPr/>
+          <p:nvPr/>
+        </p:nvSpPr>
+        <p:spPr>
+          <a:xfrm>
+            <a:off x="6949440" y="1691640"/>
+            <a:ext cx="50800" cy="2099310"/>
+          </a:xfrm>
+          <a:prstGeom prst="rect">
+            <a:avLst/>
+          </a:prstGeom>
+          <a:solidFill>
+            <a:srgbClr val="EB6834"/>
+          </a:solidFill>
+          <a:ln>
+            <a:noFill/>
+          </a:ln>
+          <a:effectLst/>
+        </p:spPr>
+        <p:style>
+          <a:lnRef idx="1">
+            <a:schemeClr val="accent1"/>
+          </a:lnRef>
+          <a:fillRef idx="3">
+            <a:schemeClr val="accent1"/>
+          </a:fillRef>
+          <a:effectRef idx="2">
+            <a:schemeClr val="accent1"/>
+          </a:effectRef>
+          <a:fontRef idx="minor">
+            <a:schemeClr val="lt1"/>
+          </a:fontRef>
+        </p:style>
+        <p:txBody>
+          <a:bodyPr rtlCol="0" anchor="ctr"/>
+          <a:lstStyle/>
+          <a:p>
+            <a:pPr algn="ctr"/>
+          </a:p>
+        </p:txBody>
+      </p:sp>
+      <p:sp>
+        <p:nvSpPr>
+          <p:cNvPr id="11" name="TextBox 10"/>
+          <p:cNvSpPr txBox="1"/>
+          <p:nvPr/>
+        </p:nvSpPr>
+        <p:spPr>
+          <a:xfrm>
+            <a:off x="7178040" y="1828800"/>
+            <a:ext cx="3977640" cy="1824990"/>
+          </a:xfrm>
+          <a:prstGeom prst="rect">
+            <a:avLst/>
+          </a:prstGeom>
+          <a:noFill/>
+        </p:spPr>
+        <p:txBody>
+          <a:bodyPr wrap="square">
+            <a:spAutoFit/>
+          </a:bodyPr>
+          <a:lstStyle/>
+          <a:p>
+            <a:pPr algn="l">
+              <a:lnSpc>
+                <a:spcPct val="125000"/>
+              </a:lnSpc>
+              <a:spcAft>
+                <a:spcPts val="600"/>
+              </a:spcAft>
+            </a:pPr>
+            <a:r>
+              <a:rPr sz="1500" b="1">
+                <a:solidFill>
+                  <a:srgbClr val="1A1A19"/>
+                </a:solidFill>
+                <a:latin typeface="Calibri"/>
+              </a:rPr>
+              <a:t>Order the objectives; do not weight them.</a:t>
+            </a:r>
+            <a:r>
+              <a:rPr sz="1500" b="0">
+                <a:solidFill>
+                  <a:srgbClr val="1A1A19"/>
+                </a:solidFill>
+                <a:latin typeface="Calibri"/>
+              </a:rPr>
+              <a:t> Folded into one, the two terms sit 3.3×10⁷ apart — two solvers returned optimal_inaccurate and disagreed 3.6× on one flow's rate. Split into B1 then B2, both match the analytic optimum to 100 bps.</a:t>
+            </a:r>
+          </a:p>
+        </p:txBody>
+      </p:sp>
+      <p:sp>
+        <p:nvSpPr>
+          <p:cNvPr id="12" name="Rectangle 11"/>
+          <p:cNvSpPr/>
+          <p:nvPr/>
+        </p:nvSpPr>
+        <p:spPr>
+          <a:xfrm>
+            <a:off x="6949440" y="3973830"/>
+            <a:ext cx="4434840" cy="2099310"/>
+          </a:xfrm>
+          <a:prstGeom prst="rect">
+            <a:avLst/>
+          </a:prstGeom>
+          <a:solidFill>
+            <a:srgbClr val="F5F4F0"/>
+          </a:solidFill>
+          <a:ln>
+            <a:noFill/>
+          </a:ln>
+          <a:effectLst/>
+        </p:spPr>
+        <p:style>
+          <a:lnRef idx="1">
+            <a:schemeClr val="accent1"/>
+          </a:lnRef>
+          <a:fillRef idx="3">
+            <a:schemeClr val="accent1"/>
+          </a:fillRef>
+          <a:effectRef idx="2">
+            <a:schemeClr val="accent1"/>
+          </a:effectRef>
+          <a:fontRef idx="minor">
+            <a:schemeClr val="lt1"/>
+          </a:fontRef>
+        </p:style>
+        <p:txBody>
+          <a:bodyPr rtlCol="0" anchor="ctr"/>
+          <a:lstStyle/>
+          <a:p>
+            <a:pPr algn="ctr"/>
+          </a:p>
+        </p:txBody>
+      </p:sp>
+      <p:sp>
+        <p:nvSpPr>
+          <p:cNvPr id="13" name="Rectangle 12"/>
+          <p:cNvSpPr/>
+          <p:nvPr/>
+        </p:nvSpPr>
+        <p:spPr>
+          <a:xfrm>
+            <a:off x="6949440" y="3973830"/>
+            <a:ext cx="50800" cy="2099310"/>
+          </a:xfrm>
+          <a:prstGeom prst="rect">
+            <a:avLst/>
+          </a:prstGeom>
+          <a:solidFill>
+            <a:srgbClr val="008300"/>
+          </a:solidFill>
+          <a:ln>
+            <a:noFill/>
+          </a:ln>
+          <a:effectLst/>
+        </p:spPr>
+        <p:style>
+          <a:lnRef idx="1">
+            <a:schemeClr val="accent1"/>
+          </a:lnRef>
+          <a:fillRef idx="3">
+            <a:schemeClr val="accent1"/>
+          </a:fillRef>
+          <a:effectRef idx="2">
+            <a:schemeClr val="accent1"/>
+          </a:effectRef>
+          <a:fontRef idx="minor">
+            <a:schemeClr val="lt1"/>
+          </a:fontRef>
+        </p:style>
+        <p:txBody>
+          <a:bodyPr rtlCol="0" anchor="ctr"/>
+          <a:lstStyle/>
+          <a:p>
+            <a:pPr algn="ctr"/>
+          </a:p>
+        </p:txBody>
+      </p:sp>
+      <p:sp>
+        <p:nvSpPr>
+          <p:cNvPr id="14" name="TextBox 13"/>
+          <p:cNvSpPr txBox="1"/>
+          <p:nvPr/>
+        </p:nvSpPr>
+        <p:spPr>
+          <a:xfrm>
+            <a:off x="7178040" y="4110990"/>
+            <a:ext cx="3977640" cy="1824990"/>
+          </a:xfrm>
+          <a:prstGeom prst="rect">
+            <a:avLst/>
+          </a:prstGeom>
+          <a:noFill/>
+        </p:spPr>
+        <p:txBody>
+          <a:bodyPr wrap="square">
+            <a:spAutoFit/>
+          </a:bodyPr>
+          <a:lstStyle/>
+          <a:p>
+            <a:pPr algn="l">
+              <a:lnSpc>
+                <a:spcPct val="125000"/>
+              </a:lnSpc>
+              <a:spcAft>
+                <a:spcPts val="600"/>
+              </a:spcAft>
+            </a:pPr>
+            <a:r>
+              <a:rPr sz="1500" b="1">
+                <a:solidFill>
+                  <a:srgbClr val="1A1A19"/>
+                </a:solidFill>
+                <a:latin typeface="Calibri"/>
+              </a:rPr>
+              <a:t>t * is the largest fraction of contract every GBR flow can hold at once.</a:t>
+            </a:r>
+            <a:r>
+              <a:rPr sz="1500" b="0">
+                <a:solidFill>
+                  <a:srgbClr val="1A1A19"/>
+                </a:solidFill>
+                <a:latin typeface="Calibri"/>
+              </a:rPr>
+              <a:t> t* = 1 means the set is feasible, the floor binds nothing, and stage A is free — which is why it is on by default. α trades the guarantee against throughput.</a:t>
+            </a:r>
+          </a:p>
+        </p:txBody>
+      </p:sp>
+    </p:spTree>
+  </p:cSld>
+  <p:clrMapOvr>
+    <a:masterClrMapping/>
+  </p:clrMapOvr>
+</p:sld>
+</file>
+
+<file path=ppt/slides/slide5.xml><?xml version="1.0" encoding="utf-8"?>
+<p:sld xmlns:a="http://schemas.openxmlformats.org/drawingml/2006/main" xmlns:p="http://schemas.openxmlformats.org/presentationml/2006/main" xmlns:r="http://schemas.openxmlformats.org/officeDocument/2006/relationships">
+  <p:cSld>
+    <p:spTree>
+      <p:nvGrpSpPr>
+        <p:cNvPr id="1" name=""/>
+        <p:cNvGrpSpPr/>
+        <p:nvPr/>
+      </p:nvGrpSpPr>
+      <p:grpSpPr/>
+      <p:sp>
+        <p:nvSpPr>
+          <p:cNvPr id="2" name="TextBox 1"/>
+          <p:cNvSpPr txBox="1"/>
+          <p:nvPr/>
+        </p:nvSpPr>
+        <p:spPr>
+          <a:xfrm>
+            <a:off x="822960" y="502920"/>
+            <a:ext cx="10545775" cy="274320"/>
+          </a:xfrm>
+          <a:prstGeom prst="rect">
+            <a:avLst/>
+          </a:prstGeom>
+          <a:noFill/>
+        </p:spPr>
+        <p:txBody>
+          <a:bodyPr wrap="square">
+            <a:spAutoFit/>
+          </a:bodyPr>
+          <a:lstStyle/>
+          <a:p>
+            <a:pPr algn="l">
+              <a:lnSpc>
+                <a:spcPct val="125000"/>
+              </a:lnSpc>
+              <a:spcAft>
+                <a:spcPts val="600"/>
+              </a:spcAft>
+            </a:pPr>
+            <a:r>
+              <a:rPr sz="1100" b="1">
+                <a:solidFill>
+                  <a:srgbClr val="8A8980"/>
+                </a:solidFill>
+                <a:latin typeface="Calibri"/>
+              </a:rPr>
+              <a:t>THE DESIGN  ·  EVERY SLOT</a:t>
+            </a:r>
+          </a:p>
+        </p:txBody>
+      </p:sp>
+      <p:sp>
+        <p:nvSpPr>
+          <p:cNvPr id="3" name="TextBox 2"/>
+          <p:cNvSpPr txBox="1"/>
+          <p:nvPr/>
+        </p:nvSpPr>
+        <p:spPr>
+          <a:xfrm>
+            <a:off x="822960" y="813816"/>
+            <a:ext cx="10545775" cy="640080"/>
+          </a:xfrm>
+          <a:prstGeom prst="rect">
+            <a:avLst/>
+          </a:prstGeom>
+          <a:noFill/>
+        </p:spPr>
+        <p:txBody>
+          <a:bodyPr wrap="square">
+            <a:spAutoFit/>
+          </a:bodyPr>
+          <a:lstStyle/>
+          <a:p>
+            <a:pPr algn="l">
+              <a:lnSpc>
+                <a:spcPct val="125000"/>
+              </a:lnSpc>
+              <a:spcAft>
+                <a:spcPts val="600"/>
+              </a:spcAft>
+            </a:pPr>
+            <a:r>
+              <a:rPr sz="3000" b="1">
+                <a:solidFill>
+                  <a:srgbClr val="1A1A19"/>
+                </a:solidFill>
+                <a:latin typeface="Calibri"/>
+              </a:rPr>
+              <a:t>Tier-2: hit that target, slot by slot</a:t>
+            </a:r>
+          </a:p>
+        </p:txBody>
+      </p:sp>
+      <p:sp>
+        <p:nvSpPr>
+          <p:cNvPr id="4" name="Rectangle 3"/>
+          <p:cNvSpPr/>
+          <p:nvPr/>
+        </p:nvSpPr>
+        <p:spPr>
+          <a:xfrm>
+            <a:off x="822960" y="1481328"/>
+            <a:ext cx="10545775" cy="15875"/>
+          </a:xfrm>
+          <a:prstGeom prst="rect">
+            <a:avLst/>
+          </a:prstGeom>
+          <a:solidFill>
+            <a:srgbClr val="DDDCD6"/>
+          </a:solidFill>
+          <a:ln>
+            <a:noFill/>
+          </a:ln>
+          <a:effectLst/>
+        </p:spPr>
+        <p:style>
+          <a:lnRef idx="1">
+            <a:schemeClr val="accent1"/>
+          </a:lnRef>
+          <a:fillRef idx="3">
+            <a:schemeClr val="accent1"/>
+          </a:fillRef>
+          <a:effectRef idx="2">
+            <a:schemeClr val="accent1"/>
+          </a:effectRef>
+          <a:fontRef idx="minor">
+            <a:schemeClr val="lt1"/>
+          </a:fontRef>
+        </p:style>
+        <p:txBody>
+          <a:bodyPr rtlCol="0" anchor="ctr"/>
+          <a:lstStyle/>
+          <a:p>
+            <a:pPr algn="ctr"/>
+          </a:p>
+        </p:txBody>
+      </p:sp>
+      <p:sp>
+        <p:nvSpPr>
+          <p:cNvPr id="5" name="TextBox 4"/>
+          <p:cNvSpPr txBox="1"/>
+          <p:nvPr/>
+        </p:nvSpPr>
+        <p:spPr>
+          <a:xfrm>
+            <a:off x="822960" y="1664208"/>
+            <a:ext cx="5760720" cy="628650"/>
+          </a:xfrm>
+          <a:prstGeom prst="rect">
+            <a:avLst/>
+          </a:prstGeom>
+          <a:noFill/>
+        </p:spPr>
+        <p:txBody>
+          <a:bodyPr wrap="square">
+            <a:spAutoFit/>
+          </a:bodyPr>
+          <a:lstStyle/>
+          <a:p>
+            <a:pPr algn="l">
+              <a:lnSpc>
+                <a:spcPct val="125000"/>
+              </a:lnSpc>
+              <a:spcAft>
+                <a:spcPts val="600"/>
+              </a:spcAft>
+            </a:pPr>
+            <a:r>
+              <a:rPr sz="1500" b="0">
+                <a:solidFill>
+                  <a:srgbClr val="5C5B54"/>
+                </a:solidFill>
+                <a:latin typeface="Calibri"/>
+              </a:rPr>
+              <a:t>Every flow carries a virtual queue — an accumulator in bits, not a buffer of data:</a:t>
+            </a:r>
+          </a:p>
+        </p:txBody>
+      </p:sp>
+      <p:sp>
+        <p:nvSpPr>
+          <p:cNvPr id="6" name="TextBox 5"/>
+          <p:cNvSpPr txBox="1"/>
+          <p:nvPr/>
+        </p:nvSpPr>
+        <p:spPr>
+          <a:xfrm>
+            <a:off x="822960" y="2420874"/>
+            <a:ext cx="5760720" cy="1427581"/>
+          </a:xfrm>
+          <a:prstGeom prst="rect">
+            <a:avLst/>
+          </a:prstGeom>
+          <a:noFill/>
+        </p:spPr>
+        <p:txBody>
+          <a:bodyPr wrap="square">
+            <a:spAutoFit/>
+          </a:bodyPr>
+          <a:lstStyle/>
+          <a:p>
+            <a:pPr algn="l">
+              <a:lnSpc>
+                <a:spcPct val="130000"/>
+              </a:lnSpc>
+              <a:spcAft>
+                <a:spcPts val="0"/>
+              </a:spcAft>
+            </a:pPr>
+            <a:r>
+              <a:rPr sz="1400" b="0">
+                <a:solidFill>
+                  <a:srgbClr val="1A1A19"/>
+                </a:solidFill>
+                <a:latin typeface="Consolas"/>
+              </a:rPr>
+              <a:t>Q_i += r_i·Δ ;  Q_i ← min(Q_i, ceil_i)</a:t>
+            </a:r>
+          </a:p>
+          <a:p>
+            <a:pPr algn="l">
+              <a:lnSpc>
+                <a:spcPct val="110000"/>
+              </a:lnSpc>
+              <a:spcAft>
+                <a:spcPts val="700"/>
+              </a:spcAft>
+            </a:pPr>
+            <a:r>
+              <a:rPr sz="1100" b="0">
+                <a:solidFill>
+                  <a:srgbClr val="8A8980"/>
+                </a:solidFill>
+                <a:latin typeface="Calibri"/>
+              </a:rPr>
+              <a:t>grow by the Tier-1 target, then clamp</a:t>
+            </a:r>
+          </a:p>
+          <a:p>
+            <a:pPr algn="l">
+              <a:lnSpc>
+                <a:spcPct val="130000"/>
+              </a:lnSpc>
+              <a:spcAft>
+                <a:spcPts val="700"/>
+              </a:spcAft>
+            </a:pPr>
+            <a:r>
+              <a:rPr sz="1400" b="0">
+                <a:solidFill>
+                  <a:srgbClr val="1A1A19"/>
+                </a:solidFill>
+                <a:latin typeface="Consolas"/>
+              </a:rPr>
+              <a:t>serve ;  Q_i ← max(0, Q_i − delivered_i)</a:t>
+            </a:r>
+          </a:p>
+          <a:p>
+            <a:pPr algn="l">
+              <a:lnSpc>
+                <a:spcPct val="130000"/>
+              </a:lnSpc>
+              <a:spcAft>
+                <a:spcPts val="0"/>
+              </a:spcAft>
+            </a:pPr>
+            <a:r>
+              <a:rPr sz="1400" b="0">
+                <a:solidFill>
+                  <a:srgbClr val="1A1A19"/>
+                </a:solidFill>
+                <a:latin typeface="Consolas"/>
+              </a:rPr>
+              <a:t>ceil_i = max(0, min(r_i·W, A_i^W) − D_i^W)</a:t>
+            </a:r>
+          </a:p>
+          <a:p>
+            <a:pPr algn="l">
+              <a:lnSpc>
+                <a:spcPct val="110000"/>
+              </a:lnSpc>
+              <a:spcAft>
+                <a:spcPts val="700"/>
+              </a:spcAft>
+            </a:pPr>
+            <a:r>
+              <a:rPr sz="1100" b="0">
+                <a:solidFill>
+                  <a:srgbClr val="8A8980"/>
+                </a:solidFill>
+                <a:latin typeface="Calibri"/>
+              </a:rPr>
+              <a:t>the debt the flow legitimately accrued over the window W</a:t>
+            </a:r>
+          </a:p>
+        </p:txBody>
+      </p:sp>
+      <p:sp>
+        <p:nvSpPr>
+          <p:cNvPr id="7" name="TextBox 6"/>
+          <p:cNvSpPr txBox="1"/>
+          <p:nvPr/>
+        </p:nvSpPr>
+        <p:spPr>
+          <a:xfrm>
+            <a:off x="822960" y="3994759"/>
+            <a:ext cx="5760720" cy="352424"/>
+          </a:xfrm>
+          <a:prstGeom prst="rect">
+            <a:avLst/>
+          </a:prstGeom>
+          <a:noFill/>
+        </p:spPr>
+        <p:txBody>
+          <a:bodyPr wrap="square">
+            <a:spAutoFit/>
+          </a:bodyPr>
+          <a:lstStyle/>
+          <a:p>
+            <a:pPr algn="l">
+              <a:lnSpc>
+                <a:spcPct val="125000"/>
+              </a:lnSpc>
+              <a:spcAft>
+                <a:spcPts val="600"/>
+              </a:spcAft>
+            </a:pPr>
+            <a:r>
+              <a:rPr sz="1500" b="0">
+                <a:solidFill>
+                  <a:srgbClr val="5C5B54"/>
+                </a:solidFill>
+                <a:latin typeface="Calibri"/>
+              </a:rPr>
+              <a:t>Ranking, and then the transport block:</a:t>
+            </a:r>
+          </a:p>
+        </p:txBody>
+      </p:sp>
+      <p:sp>
+        <p:nvSpPr>
+          <p:cNvPr id="8" name="TextBox 7"/>
+          <p:cNvSpPr txBox="1"/>
+          <p:nvPr/>
+        </p:nvSpPr>
+        <p:spPr>
+          <a:xfrm>
+            <a:off x="822960" y="4475200"/>
+            <a:ext cx="5760720" cy="1427581"/>
+          </a:xfrm>
+          <a:prstGeom prst="rect">
+            <a:avLst/>
+          </a:prstGeom>
+          <a:noFill/>
+        </p:spPr>
+        <p:txBody>
+          <a:bodyPr wrap="square">
+            <a:spAutoFit/>
+          </a:bodyPr>
+          <a:lstStyle/>
+          <a:p>
+            <a:pPr algn="l">
+              <a:lnSpc>
+                <a:spcPct val="130000"/>
+              </a:lnSpc>
+              <a:spcAft>
+                <a:spcPts val="0"/>
+              </a:spcAft>
+            </a:pPr>
+            <a:r>
+              <a:rPr sz="1400" b="0">
+                <a:solidFill>
+                  <a:srgbClr val="1A1A19"/>
+                </a:solidFill>
+                <a:latin typeface="Consolas"/>
+              </a:rPr>
+              <a:t>Q̃_i = Q_i + w_d·(HoL_i/PDB_i)^κ · max_j Q_j</a:t>
+            </a:r>
+          </a:p>
+          <a:p>
+            <a:pPr algn="l">
+              <a:lnSpc>
+                <a:spcPct val="110000"/>
+              </a:lnSpc>
+              <a:spcAft>
+                <a:spcPts val="700"/>
+              </a:spcAft>
+            </a:pPr>
+            <a:r>
+              <a:rPr sz="1100" b="0">
+                <a:solidFill>
+                  <a:srgbClr val="8A8980"/>
+                </a:solidFill>
+                <a:latin typeface="Calibri"/>
+              </a:rPr>
+              <a:t>deadline urgency, scaled by the system-wide max queue</a:t>
+            </a:r>
+          </a:p>
+          <a:p>
+            <a:pPr algn="l">
+              <a:lnSpc>
+                <a:spcPct val="130000"/>
+              </a:lnSpc>
+              <a:spcAft>
+                <a:spcPts val="0"/>
+              </a:spcAft>
+            </a:pPr>
+            <a:r>
+              <a:rPr sz="1400" b="0">
+                <a:solidFill>
+                  <a:srgbClr val="1A1A19"/>
+                </a:solidFill>
+                <a:latin typeface="Consolas"/>
+              </a:rPr>
+              <a:t>M_u = ( Σ_{i∈u} Q̃_i ) · SE_u</a:t>
+            </a:r>
+          </a:p>
+          <a:p>
+            <a:pPr algn="l">
+              <a:lnSpc>
+                <a:spcPct val="110000"/>
+              </a:lnSpc>
+              <a:spcAft>
+                <a:spcPts val="700"/>
+              </a:spcAft>
+            </a:pPr>
+            <a:r>
+              <a:rPr sz="1100" b="0">
+                <a:solidFill>
+                  <a:srgbClr val="8A8980"/>
+                </a:solidFill>
+                <a:latin typeface="Calibri"/>
+              </a:rPr>
+              <a:t>rank UEs — opportunistic and rate-tracking at once</a:t>
+            </a:r>
+          </a:p>
+          <a:p>
+            <a:pPr algn="l">
+              <a:lnSpc>
+                <a:spcPct val="130000"/>
+              </a:lnSpc>
+              <a:spcAft>
+                <a:spcPts val="700"/>
+              </a:spcAft>
+            </a:pPr>
+            <a:r>
+              <a:rPr sz="1400" b="0">
+                <a:solidFill>
+                  <a:srgbClr val="1A1A19"/>
+                </a:solidFill>
+                <a:latin typeface="Consolas"/>
+              </a:rPr>
+              <a:t>fill the TB by TS 38.321 LCP: priority, then Q̃_i</a:t>
+            </a:r>
+          </a:p>
+        </p:txBody>
+      </p:sp>
+      <p:sp>
+        <p:nvSpPr>
+          <p:cNvPr id="9" name="Rectangle 8"/>
+          <p:cNvSpPr/>
+          <p:nvPr/>
+        </p:nvSpPr>
+        <p:spPr>
+          <a:xfrm>
+            <a:off x="6949440" y="1691640"/>
+            <a:ext cx="4434840" cy="1546859"/>
+          </a:xfrm>
+          <a:prstGeom prst="rect">
+            <a:avLst/>
+          </a:prstGeom>
+          <a:solidFill>
+            <a:srgbClr val="F5F4F0"/>
+          </a:solidFill>
+          <a:ln>
+            <a:noFill/>
+          </a:ln>
+          <a:effectLst/>
+        </p:spPr>
+        <p:style>
+          <a:lnRef idx="1">
+            <a:schemeClr val="accent1"/>
+          </a:lnRef>
+          <a:fillRef idx="3">
+            <a:schemeClr val="accent1"/>
+          </a:fillRef>
+          <a:effectRef idx="2">
+            <a:schemeClr val="accent1"/>
+          </a:effectRef>
+          <a:fontRef idx="minor">
+            <a:schemeClr val="lt1"/>
+          </a:fontRef>
+        </p:style>
+        <p:txBody>
+          <a:bodyPr rtlCol="0" anchor="ctr"/>
+          <a:lstStyle/>
+          <a:p>
+            <a:pPr algn="ctr"/>
+          </a:p>
+        </p:txBody>
+      </p:sp>
+      <p:sp>
+        <p:nvSpPr>
+          <p:cNvPr id="10" name="Rectangle 9"/>
+          <p:cNvSpPr/>
+          <p:nvPr/>
+        </p:nvSpPr>
+        <p:spPr>
+          <a:xfrm>
+            <a:off x="6949440" y="1691640"/>
+            <a:ext cx="50800" cy="1546859"/>
+          </a:xfrm>
+          <a:prstGeom prst="rect">
+            <a:avLst/>
+          </a:prstGeom>
+          <a:solidFill>
+            <a:srgbClr val="EB6834"/>
+          </a:solidFill>
+          <a:ln>
+            <a:noFill/>
+          </a:ln>
+          <a:effectLst/>
+        </p:spPr>
+        <p:style>
+          <a:lnRef idx="1">
+            <a:schemeClr val="accent1"/>
+          </a:lnRef>
+          <a:fillRef idx="3">
+            <a:schemeClr val="accent1"/>
+          </a:fillRef>
+          <a:effectRef idx="2">
+            <a:schemeClr val="accent1"/>
+          </a:effectRef>
+          <a:fontRef idx="minor">
+            <a:schemeClr val="lt1"/>
+          </a:fontRef>
+        </p:style>
+        <p:txBody>
+          <a:bodyPr rtlCol="0" anchor="ctr"/>
+          <a:lstStyle/>
+          <a:p>
+            <a:pPr algn="ctr"/>
+          </a:p>
+        </p:txBody>
+      </p:sp>
+      <p:sp>
+        <p:nvSpPr>
+          <p:cNvPr id="11" name="TextBox 10"/>
+          <p:cNvSpPr txBox="1"/>
+          <p:nvPr/>
+        </p:nvSpPr>
+        <p:spPr>
+          <a:xfrm>
+            <a:off x="7178040" y="1828800"/>
+            <a:ext cx="3977640" cy="1272539"/>
+          </a:xfrm>
+          <a:prstGeom prst="rect">
+            <a:avLst/>
+          </a:prstGeom>
+          <a:noFill/>
+        </p:spPr>
+        <p:txBody>
+          <a:bodyPr wrap="square">
+            <a:spAutoFit/>
+          </a:bodyPr>
+          <a:lstStyle/>
+          <a:p>
+            <a:pPr algn="l">
+              <a:lnSpc>
+                <a:spcPct val="125000"/>
+              </a:lnSpc>
+              <a:spcAft>
+                <a:spcPts val="600"/>
+              </a:spcAft>
+            </a:pPr>
+            <a:r>
+              <a:rPr sz="1500" b="0">
+                <a:solidFill>
+                  <a:srgbClr val="1A1A19"/>
+                </a:solidFill>
+                <a:latin typeface="Calibri"/>
+              </a:rPr>
+              <a:t>Q_i is a </a:t>
+            </a:r>
+            <a:r>
+              <a:rPr sz="1500" b="1">
+                <a:solidFill>
+                  <a:srgbClr val="1A1A19"/>
+                </a:solidFill>
+                <a:latin typeface="Calibri"/>
+              </a:rPr>
+              <a:t>non-saturating integrator</a:t>
+            </a:r>
+            <a:r>
+              <a:rPr sz="1500" b="0">
+                <a:solidFill>
+                  <a:srgbClr val="1A1A19"/>
+                </a:solidFill>
+                <a:latin typeface="Calibri"/>
+              </a:rPr>
+              <a:t>, so it can reach an arbitrary, unequal target vector — precisely what a multiplicative urgency metric cannot do at any weight.</a:t>
+            </a:r>
+          </a:p>
+        </p:txBody>
+      </p:sp>
+      <p:sp>
+        <p:nvSpPr>
+          <p:cNvPr id="12" name="Rectangle 11"/>
+          <p:cNvSpPr/>
+          <p:nvPr/>
+        </p:nvSpPr>
+        <p:spPr>
+          <a:xfrm>
+            <a:off x="6949440" y="3421379"/>
+            <a:ext cx="4434840" cy="1546859"/>
+          </a:xfrm>
+          <a:prstGeom prst="rect">
+            <a:avLst/>
+          </a:prstGeom>
+          <a:solidFill>
+            <a:srgbClr val="F5F4F0"/>
+          </a:solidFill>
+          <a:ln>
+            <a:noFill/>
+          </a:ln>
+          <a:effectLst/>
+        </p:spPr>
+        <p:style>
+          <a:lnRef idx="1">
+            <a:schemeClr val="accent1"/>
+          </a:lnRef>
+          <a:fillRef idx="3">
+            <a:schemeClr val="accent1"/>
+          </a:fillRef>
+          <a:effectRef idx="2">
+            <a:schemeClr val="accent1"/>
+          </a:effectRef>
+          <a:fontRef idx="minor">
+            <a:schemeClr val="lt1"/>
+          </a:fontRef>
+        </p:style>
+        <p:txBody>
+          <a:bodyPr rtlCol="0" anchor="ctr"/>
+          <a:lstStyle/>
+          <a:p>
+            <a:pPr algn="ctr"/>
+          </a:p>
+        </p:txBody>
+      </p:sp>
+      <p:sp>
+        <p:nvSpPr>
+          <p:cNvPr id="13" name="Rectangle 12"/>
+          <p:cNvSpPr/>
+          <p:nvPr/>
+        </p:nvSpPr>
+        <p:spPr>
+          <a:xfrm>
+            <a:off x="6949440" y="3421379"/>
+            <a:ext cx="50800" cy="1546859"/>
+          </a:xfrm>
+          <a:prstGeom prst="rect">
+            <a:avLst/>
+          </a:prstGeom>
+          <a:solidFill>
+            <a:srgbClr val="8A8980"/>
+          </a:solidFill>
+          <a:ln>
+            <a:noFill/>
+          </a:ln>
+          <a:effectLst/>
+        </p:spPr>
+        <p:style>
+          <a:lnRef idx="1">
+            <a:schemeClr val="accent1"/>
+          </a:lnRef>
+          <a:fillRef idx="3">
+            <a:schemeClr val="accent1"/>
+          </a:fillRef>
+          <a:effectRef idx="2">
+            <a:schemeClr val="accent1"/>
+          </a:effectRef>
+          <a:fontRef idx="minor">
+            <a:schemeClr val="lt1"/>
+          </a:fontRef>
+        </p:style>
+        <p:txBody>
+          <a:bodyPr rtlCol="0" anchor="ctr"/>
+          <a:lstStyle/>
+          <a:p>
+            <a:pPr algn="ctr"/>
+          </a:p>
+        </p:txBody>
+      </p:sp>
+      <p:sp>
+        <p:nvSpPr>
+          <p:cNvPr id="14" name="TextBox 13"/>
+          <p:cNvSpPr txBox="1"/>
+          <p:nvPr/>
+        </p:nvSpPr>
+        <p:spPr>
+          <a:xfrm>
+            <a:off x="7178040" y="3558539"/>
+            <a:ext cx="3977640" cy="1272539"/>
+          </a:xfrm>
+          <a:prstGeom prst="rect">
+            <a:avLst/>
+          </a:prstGeom>
+          <a:noFill/>
+        </p:spPr>
+        <p:txBody>
+          <a:bodyPr wrap="square">
+            <a:spAutoFit/>
+          </a:bodyPr>
+          <a:lstStyle/>
+          <a:p>
+            <a:pPr algn="l">
+              <a:lnSpc>
+                <a:spcPct val="125000"/>
+              </a:lnSpc>
+              <a:spcAft>
+                <a:spcPts val="600"/>
+              </a:spcAft>
+            </a:pPr>
+            <a:r>
+              <a:rPr sz="1500" b="0">
+                <a:solidFill>
+                  <a:srgbClr val="1A1A19"/>
+                </a:solidFill>
+                <a:latin typeface="Calibri"/>
+              </a:rPr>
+              <a:t>Clamping to a </a:t>
+            </a:r>
+            <a:r>
+              <a:rPr sz="1500" b="1">
+                <a:solidFill>
+                  <a:srgbClr val="1A1A19"/>
+                </a:solidFill>
+                <a:latin typeface="Calibri"/>
+              </a:rPr>
+              <a:t>windowed arrival count</a:t>
+            </a:r>
+            <a:r>
+              <a:rPr sz="1500" b="0">
+                <a:solidFill>
+                  <a:srgbClr val="1A1A19"/>
+                </a:solidFill>
+                <a:latin typeface="Calibri"/>
+              </a:rPr>
+              <a:t>, not instantaneous backlog: a bursty video flow empties between frames, and clamping there erases its legitimate debt.</a:t>
+            </a:r>
+          </a:p>
+        </p:txBody>
+      </p:sp>
+      <p:sp>
+        <p:nvSpPr>
+          <p:cNvPr id="15" name="Rectangle 14"/>
+          <p:cNvSpPr/>
+          <p:nvPr/>
+        </p:nvSpPr>
+        <p:spPr>
+          <a:xfrm>
+            <a:off x="6949440" y="5151118"/>
+            <a:ext cx="4434840" cy="1546859"/>
+          </a:xfrm>
+          <a:prstGeom prst="rect">
+            <a:avLst/>
+          </a:prstGeom>
+          <a:solidFill>
+            <a:srgbClr val="F5F4F0"/>
+          </a:solidFill>
+          <a:ln>
+            <a:noFill/>
+          </a:ln>
+          <a:effectLst/>
+        </p:spPr>
+        <p:style>
+          <a:lnRef idx="1">
+            <a:schemeClr val="accent1"/>
+          </a:lnRef>
+          <a:fillRef idx="3">
+            <a:schemeClr val="accent1"/>
+          </a:fillRef>
+          <a:effectRef idx="2">
+            <a:schemeClr val="accent1"/>
+          </a:effectRef>
+          <a:fontRef idx="minor">
+            <a:schemeClr val="lt1"/>
+          </a:fontRef>
+        </p:style>
+        <p:txBody>
+          <a:bodyPr rtlCol="0" anchor="ctr"/>
+          <a:lstStyle/>
+          <a:p>
+            <a:pPr algn="ctr"/>
+          </a:p>
+        </p:txBody>
+      </p:sp>
+      <p:sp>
+        <p:nvSpPr>
+          <p:cNvPr id="16" name="Rectangle 15"/>
+          <p:cNvSpPr/>
+          <p:nvPr/>
+        </p:nvSpPr>
+        <p:spPr>
+          <a:xfrm>
+            <a:off x="6949440" y="5151118"/>
+            <a:ext cx="50800" cy="1546859"/>
+          </a:xfrm>
+          <a:prstGeom prst="rect">
+            <a:avLst/>
+          </a:prstGeom>
+          <a:solidFill>
+            <a:srgbClr val="008300"/>
+          </a:solidFill>
+          <a:ln>
+            <a:noFill/>
+          </a:ln>
+          <a:effectLst/>
+        </p:spPr>
+        <p:style>
+          <a:lnRef idx="1">
+            <a:schemeClr val="accent1"/>
+          </a:lnRef>
+          <a:fillRef idx="3">
+            <a:schemeClr val="accent1"/>
+          </a:fillRef>
+          <a:effectRef idx="2">
+            <a:schemeClr val="accent1"/>
+          </a:effectRef>
+          <a:fontRef idx="minor">
+            <a:schemeClr val="lt1"/>
+          </a:fontRef>
+        </p:style>
+        <p:txBody>
+          <a:bodyPr rtlCol="0" anchor="ctr"/>
+          <a:lstStyle/>
+          <a:p>
+            <a:pPr algn="ctr"/>
+          </a:p>
+        </p:txBody>
+      </p:sp>
+      <p:sp>
+        <p:nvSpPr>
+          <p:cNvPr id="17" name="TextBox 16"/>
+          <p:cNvSpPr txBox="1"/>
+          <p:nvPr/>
+        </p:nvSpPr>
+        <p:spPr>
+          <a:xfrm>
+            <a:off x="7178040" y="5288278"/>
+            <a:ext cx="3977640" cy="1272539"/>
+          </a:xfrm>
+          <a:prstGeom prst="rect">
+            <a:avLst/>
+          </a:prstGeom>
+          <a:noFill/>
+        </p:spPr>
+        <p:txBody>
+          <a:bodyPr wrap="square">
+            <a:spAutoFit/>
+          </a:bodyPr>
+          <a:lstStyle/>
+          <a:p>
+            <a:pPr algn="l">
+              <a:lnSpc>
+                <a:spcPct val="125000"/>
+              </a:lnSpc>
+              <a:spcAft>
+                <a:spcPts val="600"/>
+              </a:spcAft>
+            </a:pPr>
+            <a:r>
+              <a:rPr sz="1500" b="1">
+                <a:solidFill>
+                  <a:srgbClr val="1A1A19"/>
+                </a:solidFill>
+                <a:latin typeface="Calibri"/>
+              </a:rPr>
+              <a:t>Configured grants</a:t>
+            </a:r>
+            <a:r>
+              <a:rPr sz="1500" b="0">
+                <a:solidFill>
+                  <a:srgbClr val="1A1A19"/>
+                </a:solidFill>
+                <a:latin typeface="Calibri"/>
+              </a:rPr>
+              <a:t> carry the periodic flows — standing allocations in priority tiers, self-gating where they would starve the dynamic pool.</a:t>
+            </a:r>
+          </a:p>
+        </p:txBody>
+      </p:sp>
+    </p:spTree>
+  </p:cSld>
+  <p:clrMapOvr>
+    <a:masterClrMapping/>
+  </p:clrMapOvr>
+</p:sld>
+</file>
+
+<file path=ppt/slides/slide6.xml><?xml version="1.0" encoding="utf-8"?>
+<p:sld xmlns:a="http://schemas.openxmlformats.org/drawingml/2006/main" xmlns:p="http://schemas.openxmlformats.org/presentationml/2006/main" xmlns:r="http://schemas.openxmlformats.org/officeDocument/2006/relationships">
+  <p:cSld>
+    <p:spTree>
+      <p:nvGrpSpPr>
+        <p:cNvPr id="1" name=""/>
+        <p:cNvGrpSpPr/>
+        <p:nvPr/>
+      </p:nvGrpSpPr>
+      <p:grpSpPr/>
+      <p:sp>
+        <p:nvSpPr>
+          <p:cNvPr id="2" name="TextBox 1"/>
+          <p:cNvSpPr txBox="1"/>
+          <p:nvPr/>
+        </p:nvSpPr>
+        <p:spPr>
+          <a:xfrm>
+            <a:off x="822960" y="502920"/>
+            <a:ext cx="10545775" cy="274320"/>
+          </a:xfrm>
+          <a:prstGeom prst="rect">
+            <a:avLst/>
+          </a:prstGeom>
+          <a:noFill/>
+        </p:spPr>
+        <p:txBody>
+          <a:bodyPr wrap="square">
+            <a:spAutoFit/>
+          </a:bodyPr>
+          <a:lstStyle/>
+          <a:p>
+            <a:pPr algn="l">
+              <a:lnSpc>
+                <a:spcPct val="125000"/>
+              </a:lnSpc>
+              <a:spcAft>
+                <a:spcPts val="600"/>
+              </a:spcAft>
+            </a:pPr>
+            <a:r>
+              <a:rPr sz="1100" b="1">
+                <a:solidFill>
+                  <a:srgbClr val="8A8980"/>
+                </a:solidFill>
+                <a:latin typeface="Calibri"/>
+              </a:rPr>
+              <a:t>EVALUATION</a:t>
+            </a:r>
+          </a:p>
+        </p:txBody>
+      </p:sp>
+      <p:sp>
+        <p:nvSpPr>
+          <p:cNvPr id="3" name="TextBox 2"/>
+          <p:cNvSpPr txBox="1"/>
+          <p:nvPr/>
+        </p:nvSpPr>
+        <p:spPr>
+          <a:xfrm>
+            <a:off x="822960" y="813816"/>
+            <a:ext cx="10545775" cy="640080"/>
+          </a:xfrm>
+          <a:prstGeom prst="rect">
+            <a:avLst/>
+          </a:prstGeom>
+          <a:noFill/>
+        </p:spPr>
+        <p:txBody>
+          <a:bodyPr wrap="square">
+            <a:spAutoFit/>
+          </a:bodyPr>
+          <a:lstStyle/>
+          <a:p>
+            <a:pPr algn="l">
+              <a:lnSpc>
+                <a:spcPct val="125000"/>
+              </a:lnSpc>
+              <a:spcAft>
+                <a:spcPts val="600"/>
+              </a:spcAft>
+            </a:pPr>
+            <a:r>
+              <a:rPr sz="3000" b="1">
+                <a:solidFill>
+                  <a:srgbClr val="1A1A19"/>
+                </a:solidFill>
+                <a:latin typeface="Calibri"/>
+              </a:rPr>
+              <a:t>The simulator: what it models, and what it does not</a:t>
+            </a:r>
+          </a:p>
+        </p:txBody>
+      </p:sp>
+      <p:sp>
+        <p:nvSpPr>
+          <p:cNvPr id="4" name="Rectangle 3"/>
+          <p:cNvSpPr/>
+          <p:nvPr/>
+        </p:nvSpPr>
+        <p:spPr>
+          <a:xfrm>
+            <a:off x="822960" y="1481328"/>
+            <a:ext cx="10545775" cy="15875"/>
+          </a:xfrm>
+          <a:prstGeom prst="rect">
+            <a:avLst/>
+          </a:prstGeom>
+          <a:solidFill>
+            <a:srgbClr val="DDDCD6"/>
+          </a:solidFill>
+          <a:ln>
+            <a:noFill/>
+          </a:ln>
+          <a:effectLst/>
+        </p:spPr>
+        <p:style>
+          <a:lnRef idx="1">
+            <a:schemeClr val="accent1"/>
+          </a:lnRef>
+          <a:fillRef idx="3">
+            <a:schemeClr val="accent1"/>
+          </a:fillRef>
+          <a:effectRef idx="2">
+            <a:schemeClr val="accent1"/>
+          </a:effectRef>
+          <a:fontRef idx="minor">
+            <a:schemeClr val="lt1"/>
+          </a:fontRef>
+        </p:style>
+        <p:txBody>
+          <a:bodyPr rtlCol="0" anchor="ctr"/>
+          <a:lstStyle/>
+          <a:p>
+            <a:pPr algn="ctr"/>
+          </a:p>
+        </p:txBody>
+      </p:sp>
+      <p:sp>
+        <p:nvSpPr>
+          <p:cNvPr id="5" name="TextBox 4"/>
+          <p:cNvSpPr txBox="1"/>
+          <p:nvPr/>
+        </p:nvSpPr>
+        <p:spPr>
+          <a:xfrm>
+            <a:off x="822960" y="1719072"/>
+            <a:ext cx="5394960" cy="2503805"/>
+          </a:xfrm>
+          <a:prstGeom prst="rect">
+            <a:avLst/>
+          </a:prstGeom>
+          <a:noFill/>
+        </p:spPr>
+        <p:txBody>
+          <a:bodyPr wrap="square">
+            <a:spAutoFit/>
+          </a:bodyPr>
+          <a:lstStyle/>
+          <a:p>
+            <a:pPr algn="l">
+              <a:lnSpc>
+                <a:spcPct val="125000"/>
+              </a:lnSpc>
+              <a:spcAft>
+                <a:spcPts val="600"/>
+              </a:spcAft>
+            </a:pPr>
+            <a:r>
+              <a:rPr sz="1700" b="1">
+                <a:solidFill>
+                  <a:srgbClr val="008300"/>
+                </a:solidFill>
+                <a:latin typeface="Calibri"/>
+              </a:rPr>
+              <a:t>Modelled</a:t>
+            </a:r>
+          </a:p>
+          <a:p>
+            <a:pPr algn="l">
+              <a:lnSpc>
+                <a:spcPct val="125000"/>
+              </a:lnSpc>
+              <a:spcAft>
+                <a:spcPts val="600"/>
+              </a:spcAft>
+            </a:pPr>
+            <a:r>
+              <a:rPr sz="1500" b="0">
+                <a:solidFill>
+                  <a:srgbClr val="5C5B54"/>
+                </a:solidFill>
+                <a:latin typeface="Calibri"/>
+              </a:rPr>
+              <a:t>• The slot-by-slot PRB grid, with the TDD special slot</a:t>
+            </a:r>
+          </a:p>
+          <a:p>
+            <a:pPr algn="l">
+              <a:lnSpc>
+                <a:spcPct val="125000"/>
+              </a:lnSpc>
+              <a:spcAft>
+                <a:spcPts val="600"/>
+              </a:spcAft>
+            </a:pPr>
+            <a:r>
+              <a:rPr sz="1500" b="0">
+                <a:solidFill>
+                  <a:srgbClr val="5C5B54"/>
+                </a:solidFill>
+                <a:latin typeface="Calibri"/>
+              </a:rPr>
+              <a:t>• The PDCCH/CCE budget, with DCI aggregation levels</a:t>
+            </a:r>
+          </a:p>
+          <a:p>
+            <a:pPr algn="l">
+              <a:lnSpc>
+                <a:spcPct val="125000"/>
+              </a:lnSpc>
+              <a:spcAft>
+                <a:spcPts val="600"/>
+              </a:spcAft>
+            </a:pPr>
+            <a:r>
+              <a:rPr sz="1500" b="0">
+                <a:solidFill>
+                  <a:srgbClr val="5C5B54"/>
+                </a:solidFill>
+                <a:latin typeface="Calibri"/>
+              </a:rPr>
+              <a:t>• The uplink BSR round-trip — delay plus loss</a:t>
+            </a:r>
+          </a:p>
+          <a:p>
+            <a:pPr algn="l">
+              <a:lnSpc>
+                <a:spcPct val="125000"/>
+              </a:lnSpc>
+              <a:spcAft>
+                <a:spcPts val="600"/>
+              </a:spcAft>
+            </a:pPr>
+            <a:r>
+              <a:rPr sz="1500" b="0">
+                <a:solidFill>
+                  <a:srgbClr val="5C5B54"/>
+                </a:solidFill>
+                <a:latin typeface="Calibri"/>
+              </a:rPr>
+              <a:t>• CQI delay and loss; BLER from MCS/SNR mismatch</a:t>
+            </a:r>
+          </a:p>
+          <a:p>
+            <a:pPr algn="l">
+              <a:lnSpc>
+                <a:spcPct val="125000"/>
+              </a:lnSpc>
+              <a:spcAft>
+                <a:spcPts val="600"/>
+              </a:spcAft>
+            </a:pPr>
+            <a:r>
+              <a:rPr sz="1500" b="0">
+                <a:solidFill>
+                  <a:srgbClr val="5C5B54"/>
+                </a:solidFill>
+                <a:latin typeface="Calibri"/>
+              </a:rPr>
+              <a:t>• Per-UE AR(1) SNR through an MCS staircase</a:t>
+            </a:r>
+          </a:p>
+          <a:p>
+            <a:pPr algn="l">
+              <a:lnSpc>
+                <a:spcPct val="125000"/>
+              </a:lnSpc>
+              <a:spcAft>
+                <a:spcPts val="600"/>
+              </a:spcAft>
+            </a:pPr>
+            <a:r>
+              <a:rPr sz="1500" b="0">
+                <a:solidFill>
+                  <a:srgbClr val="5C5B54"/>
+                </a:solidFill>
+                <a:latin typeface="Calibri"/>
+              </a:rPr>
+              <a:t>• Per-flow buffers, HoL timestamps, PDB expiry</a:t>
+            </a:r>
+          </a:p>
+        </p:txBody>
+      </p:sp>
+      <p:sp>
+        <p:nvSpPr>
+          <p:cNvPr id="6" name="TextBox 5"/>
+          <p:cNvSpPr txBox="1"/>
+          <p:nvPr/>
+        </p:nvSpPr>
+        <p:spPr>
+          <a:xfrm>
+            <a:off x="6492240" y="1719072"/>
+            <a:ext cx="4846320" cy="2627630"/>
+          </a:xfrm>
+          <a:prstGeom prst="rect">
+            <a:avLst/>
+          </a:prstGeom>
+          <a:noFill/>
+        </p:spPr>
+        <p:txBody>
+          <a:bodyPr wrap="square">
+            <a:spAutoFit/>
+          </a:bodyPr>
+          <a:lstStyle/>
+          <a:p>
+            <a:pPr algn="l">
+              <a:lnSpc>
+                <a:spcPct val="125000"/>
+              </a:lnSpc>
+              <a:spcAft>
+                <a:spcPts val="600"/>
+              </a:spcAft>
+            </a:pPr>
+            <a:r>
+              <a:rPr sz="1700" b="1">
+                <a:solidFill>
+                  <a:srgbClr val="8A8980"/>
+                </a:solidFill>
+                <a:latin typeface="Calibri"/>
+              </a:rPr>
+              <a:t>Not modelled</a:t>
+            </a:r>
+          </a:p>
+          <a:p>
+            <a:pPr algn="l">
+              <a:lnSpc>
+                <a:spcPct val="125000"/>
+              </a:lnSpc>
+              <a:spcAft>
+                <a:spcPts val="600"/>
+              </a:spcAft>
+            </a:pPr>
+            <a:r>
+              <a:rPr sz="1500" b="0">
+                <a:solidFill>
+                  <a:srgbClr val="5C5B54"/>
+                </a:solidFill>
+                <a:latin typeface="Calibri"/>
+              </a:rPr>
+              <a:t>• LDPC and I/Q; HARQ as a state machine — a fixed delay and a BLER discount instead</a:t>
+            </a:r>
+          </a:p>
+          <a:p>
+            <a:pPr algn="l">
+              <a:lnSpc>
+                <a:spcPct val="125000"/>
+              </a:lnSpc>
+              <a:spcAft>
+                <a:spcPts val="600"/>
+              </a:spcAft>
+            </a:pPr>
+            <a:r>
+              <a:rPr sz="1500" b="0">
+                <a:solidFill>
+                  <a:srgbClr val="5C5B54"/>
+                </a:solidFill>
+                <a:latin typeface="Calibri"/>
+              </a:rPr>
+              <a:t>• Per-packet RLC segmentation, MU-MIMO</a:t>
+            </a:r>
+          </a:p>
+          <a:p>
+            <a:pPr algn="l">
+              <a:lnSpc>
+                <a:spcPct val="125000"/>
+              </a:lnSpc>
+              <a:spcAft>
+                <a:spcPts val="600"/>
+              </a:spcAft>
+            </a:pPr>
+            <a:r>
+              <a:rPr sz="1500" b="0">
+                <a:solidFill>
+                  <a:srgbClr val="5C5B54"/>
+                </a:solidFill>
+                <a:latin typeface="Calibri"/>
+              </a:rPr>
+              <a:t>• Mobility, UE churn, inter-cell interference</a:t>
+            </a:r>
+          </a:p>
+          <a:p>
+            <a:pPr algn="l">
+              <a:lnSpc>
+                <a:spcPct val="125000"/>
+              </a:lnSpc>
+              <a:spcAft>
+                <a:spcPts val="600"/>
+              </a:spcAft>
+            </a:pPr>
+            <a:r>
+              <a:rPr sz="1500" b="0">
+                <a:solidFill>
+                  <a:srgbClr val="8A8980"/>
+                </a:solidFill>
+                <a:latin typeface="Calibri"/>
+              </a:rPr>
+              <a:t>So the results are </a:t>
+            </a:r>
+            <a:r>
+              <a:rPr sz="1500" b="1">
+                <a:solidFill>
+                  <a:srgbClr val="8A8980"/>
+                </a:solidFill>
+                <a:latin typeface="Calibri"/>
+              </a:rPr>
+              <a:t>comparative, not absolute</a:t>
+            </a:r>
+            <a:r>
+              <a:rPr sz="1500" b="0">
+                <a:solidFill>
+                  <a:srgbClr val="8A8980"/>
+                </a:solidFill>
+                <a:latin typeface="Calibri"/>
+              </a:rPr>
+              <a:t> — and what we omit would widen the configured-grant margin, not narrow it.</a:t>
+            </a:r>
+          </a:p>
+        </p:txBody>
+      </p:sp>
+      <p:sp>
+        <p:nvSpPr>
+          <p:cNvPr id="7" name="TextBox 6"/>
+          <p:cNvSpPr txBox="1"/>
+          <p:nvPr/>
+        </p:nvSpPr>
+        <p:spPr>
+          <a:xfrm>
+            <a:off x="822960" y="4557014"/>
+            <a:ext cx="10545775" cy="352424"/>
+          </a:xfrm>
+          <a:prstGeom prst="rect">
+            <a:avLst/>
+          </a:prstGeom>
+          <a:noFill/>
+        </p:spPr>
+        <p:txBody>
+          <a:bodyPr wrap="square">
+            <a:spAutoFit/>
+          </a:bodyPr>
+          <a:lstStyle/>
+          <a:p>
+            <a:pPr algn="l">
+              <a:lnSpc>
+                <a:spcPct val="125000"/>
+              </a:lnSpc>
+              <a:spcAft>
+                <a:spcPts val="600"/>
+              </a:spcAft>
+            </a:pPr>
+            <a:r>
+              <a:rPr sz="1500" b="0">
+                <a:solidFill>
+                  <a:srgbClr val="5C5B54"/>
+                </a:solidFill>
+                <a:latin typeface="Calibri"/>
+              </a:rPr>
+              <a:t>Three workloads, each sized so a different bottleneck binds:</a:t>
+            </a:r>
+          </a:p>
+        </p:txBody>
+      </p:sp>
+      <p:graphicFrame>
+        <p:nvGraphicFramePr>
+          <p:cNvPr id="8" name="Table 7"/>
+          <p:cNvGraphicFramePr>
+            <a:graphicFrameLocks noGrp="1"/>
+          </p:cNvGraphicFramePr>
+          <p:nvPr/>
+        </p:nvGraphicFramePr>
+        <p:xfrm>
+          <a:off x="822960" y="5128895"/>
+          <a:ext cx="10545773" cy="1170432"/>
+        </p:xfrm>
+        <a:graphic>
+          <a:graphicData uri="http://schemas.openxmlformats.org/drawingml/2006/table">
+            <a:tbl>
+              <a:tblPr firstRow="1" bandRow="1">
+                <a:tableStyleId>{5C22544A-7EE6-4342-B048-85BDC9FD1C3A}</a:tableStyleId>
+              </a:tblPr>
+              <a:tblGrid>
+                <a:gridCol w="2002362"/>
+                <a:gridCol w="2536325"/>
+                <a:gridCol w="3470761"/>
+                <a:gridCol w="2536325"/>
+              </a:tblGrid>
+              <a:tr h="292608">
+                <a:tc>
+                  <a:txBody>
+                    <a:bodyPr/>
+                    <a:lstStyle/>
+                    <a:p>
+                      <a:pPr algn="l"/>
+                      <a:r>
+                        <a:rPr sz="1400" b="1">
+                          <a:solidFill>
+                            <a:srgbClr val="1A1A19"/>
+                          </a:solidFill>
+                          <a:latin typeface="Calibri"/>
+                        </a:rPr>
+                        <a:t>Scenario</a:t>
+                      </a:r>
+                    </a:p>
+                  </a:txBody>
+                  <a:tcPr marL="82296" marT="27432" marB="27432">
+                    <a:solidFill>
+                      <a:srgbClr val="F5F4F0"/>
+                    </a:solidFill>
+                  </a:tcPr>
+                </a:tc>
+                <a:tc>
+                  <a:txBody>
+                    <a:bodyPr/>
+                    <a:lstStyle/>
+                    <a:p>
+                      <a:pPr algn="l"/>
+                      <a:r>
+                        <a:rPr sz="1400" b="1">
+                          <a:solidFill>
+                            <a:srgbClr val="1A1A19"/>
+                          </a:solidFill>
+                          <a:latin typeface="Calibri"/>
+                        </a:rPr>
+                        <a:t>Carrier / TDD</a:t>
+                      </a:r>
+                    </a:p>
+                  </a:txBody>
+                  <a:tcPr marL="82296" marT="27432" marB="27432">
+                    <a:solidFill>
+                      <a:srgbClr val="F5F4F0"/>
+                    </a:solidFill>
+                  </a:tcPr>
+                </a:tc>
+                <a:tc>
+                  <a:txBody>
+                    <a:bodyPr/>
+                    <a:lstStyle/>
+                    <a:p>
+                      <a:pPr algn="l"/>
+                      <a:r>
+                        <a:rPr sz="1400" b="1">
+                          <a:solidFill>
+                            <a:srgbClr val="1A1A19"/>
+                          </a:solidFill>
+                          <a:latin typeface="Calibri"/>
+                        </a:rPr>
+                        <a:t>Workload</a:t>
+                      </a:r>
+                    </a:p>
+                  </a:txBody>
+                  <a:tcPr marL="82296" marT="27432" marB="27432">
+                    <a:solidFill>
+                      <a:srgbClr val="F5F4F0"/>
+                    </a:solidFill>
+                  </a:tcPr>
+                </a:tc>
+                <a:tc>
+                  <a:txBody>
+                    <a:bodyPr/>
+                    <a:lstStyle/>
+                    <a:p>
+                      <a:pPr algn="l"/>
+                      <a:r>
+                        <a:rPr sz="1400" b="1">
+                          <a:solidFill>
+                            <a:srgbClr val="1A1A19"/>
+                          </a:solidFill>
+                          <a:latin typeface="Calibri"/>
+                        </a:rPr>
+                        <a:t>What binds</a:t>
+                      </a:r>
+                    </a:p>
+                  </a:txBody>
+                  <a:tcPr marL="82296" marT="27432" marB="27432">
+                    <a:solidFill>
+                      <a:srgbClr val="F5F4F0"/>
+                    </a:solidFill>
+                  </a:tcPr>
+                </a:tc>
+              </a:tr>
+              <a:tr h="292608">
+                <a:tc>
+                  <a:txBody>
+                    <a:bodyPr/>
+                    <a:lstStyle/>
+                    <a:p>
+                      <a:pPr algn="l"/>
+                      <a:r>
+                        <a:rPr sz="1400" b="0">
+                          <a:solidFill>
+                            <a:srgbClr val="5C5B54"/>
+                          </a:solidFill>
+                          <a:latin typeface="Calibri"/>
+                        </a:rPr>
+                        <a:t>factory_robots</a:t>
+                      </a:r>
+                    </a:p>
+                  </a:txBody>
+                  <a:tcPr marL="82296" marT="27432" marB="27432">
+                    <a:solidFill>
+                      <a:srgbClr val="FFFFFF"/>
+                    </a:solidFill>
+                  </a:tcPr>
+                </a:tc>
+                <a:tc>
+                  <a:txBody>
+                    <a:bodyPr/>
+                    <a:lstStyle/>
+                    <a:p>
+                      <a:pPr algn="l"/>
+                      <a:r>
+                        <a:rPr sz="1400" b="0">
+                          <a:solidFill>
+                            <a:srgbClr val="5C5B54"/>
+                          </a:solidFill>
+                          <a:latin typeface="Calibri"/>
+                        </a:rPr>
+                        <a:t>40 MHz, μ=2, DSUUU</a:t>
+                      </a:r>
+                    </a:p>
+                  </a:txBody>
+                  <a:tcPr marL="82296" marT="27432" marB="27432">
+                    <a:solidFill>
+                      <a:srgbClr val="FFFFFF"/>
+                    </a:solidFill>
+                  </a:tcPr>
+                </a:tc>
+                <a:tc>
+                  <a:txBody>
+                    <a:bodyPr/>
+                    <a:lstStyle/>
+                    <a:p>
+                      <a:pPr algn="l"/>
+                      <a:r>
+                        <a:rPr sz="1400" b="0">
+                          <a:solidFill>
+                            <a:srgbClr val="5C5B54"/>
+                          </a:solidFill>
+                          <a:latin typeface="Calibri"/>
+                        </a:rPr>
+                        <a:t>10 robots, 24 flows, 14–24 dB</a:t>
+                      </a:r>
+                    </a:p>
+                  </a:txBody>
+                  <a:tcPr marL="82296" marT="27432" marB="27432">
+                    <a:solidFill>
+                      <a:srgbClr val="FFFFFF"/>
+                    </a:solidFill>
+                  </a:tcPr>
+                </a:tc>
+                <a:tc>
+                  <a:txBody>
+                    <a:bodyPr/>
+                    <a:lstStyle/>
+                    <a:p>
+                      <a:pPr algn="l"/>
+                      <a:r>
+                        <a:rPr sz="1400" b="0">
+                          <a:solidFill>
+                            <a:srgbClr val="5C5B54"/>
+                          </a:solidFill>
+                          <a:latin typeface="Calibri"/>
+                        </a:rPr>
+                        <a:t>Uplink data channel</a:t>
+                      </a:r>
+                    </a:p>
+                  </a:txBody>
+                  <a:tcPr marL="82296" marT="27432" marB="27432">
+                    <a:solidFill>
+                      <a:srgbClr val="FFFFFF"/>
+                    </a:solidFill>
+                  </a:tcPr>
+                </a:tc>
+              </a:tr>
+              <a:tr h="292608">
+                <a:tc>
+                  <a:txBody>
+                    <a:bodyPr/>
+                    <a:lstStyle/>
+                    <a:p>
+                      <a:pPr algn="l"/>
+                      <a:r>
+                        <a:rPr sz="1400" b="0">
+                          <a:solidFill>
+                            <a:srgbClr val="5C5B54"/>
+                          </a:solidFill>
+                          <a:latin typeface="Calibri"/>
+                        </a:rPr>
+                        <a:t>sensor_dense</a:t>
+                      </a:r>
+                    </a:p>
+                  </a:txBody>
+                  <a:tcPr marL="82296" marT="27432" marB="27432">
+                    <a:solidFill>
+                      <a:srgbClr val="FFFFFF"/>
+                    </a:solidFill>
+                  </a:tcPr>
+                </a:tc>
+                <a:tc>
+                  <a:txBody>
+                    <a:bodyPr/>
+                    <a:lstStyle/>
+                    <a:p>
+                      <a:pPr algn="l"/>
+                      <a:r>
+                        <a:rPr sz="1400" b="0">
+                          <a:solidFill>
+                            <a:srgbClr val="5C5B54"/>
+                          </a:solidFill>
+                          <a:latin typeface="Calibri"/>
+                        </a:rPr>
+                        <a:t>30 MHz, μ=1, DSUUU</a:t>
+                      </a:r>
+                    </a:p>
+                  </a:txBody>
+                  <a:tcPr marL="82296" marT="27432" marB="27432">
+                    <a:solidFill>
+                      <a:srgbClr val="FFFFFF"/>
+                    </a:solidFill>
+                  </a:tcPr>
+                </a:tc>
+                <a:tc>
+                  <a:txBody>
+                    <a:bodyPr/>
+                    <a:lstStyle/>
+                    <a:p>
+                      <a:pPr algn="l"/>
+                      <a:r>
+                        <a:rPr sz="1400" b="0">
+                          <a:solidFill>
+                            <a:srgbClr val="5C5B54"/>
+                          </a:solidFill>
+                          <a:latin typeface="Calibri"/>
+                        </a:rPr>
+                        <a:t>30 periodic sensors, 15 ms PDB</a:t>
+                      </a:r>
+                    </a:p>
+                  </a:txBody>
+                  <a:tcPr marL="82296" marT="27432" marB="27432">
+                    <a:solidFill>
+                      <a:srgbClr val="FFFFFF"/>
+                    </a:solidFill>
+                  </a:tcPr>
+                </a:tc>
+                <a:tc>
+                  <a:txBody>
+                    <a:bodyPr/>
+                    <a:lstStyle/>
+                    <a:p>
+                      <a:pPr algn="l"/>
+                      <a:r>
+                        <a:rPr sz="1400" b="0">
+                          <a:solidFill>
+                            <a:srgbClr val="5C5B54"/>
+                          </a:solidFill>
+                          <a:latin typeface="Calibri"/>
+                        </a:rPr>
+                        <a:t>PDCCH / CCE budget</a:t>
+                      </a:r>
+                    </a:p>
+                  </a:txBody>
+                  <a:tcPr marL="82296" marT="27432" marB="27432">
+                    <a:solidFill>
+                      <a:srgbClr val="FFFFFF"/>
+                    </a:solidFill>
+                  </a:tcPr>
+                </a:tc>
+              </a:tr>
+              <a:tr h="292608">
+                <a:tc>
+                  <a:txBody>
+                    <a:bodyPr/>
+                    <a:lstStyle/>
+                    <a:p>
+                      <a:pPr algn="l"/>
+                      <a:r>
+                        <a:rPr sz="1400" b="0">
+                          <a:solidFill>
+                            <a:srgbClr val="5C5B54"/>
+                          </a:solidFill>
+                          <a:latin typeface="Calibri"/>
+                        </a:rPr>
+                        <a:t>latency_bound</a:t>
+                      </a:r>
+                    </a:p>
+                  </a:txBody>
+                  <a:tcPr marL="82296" marT="27432" marB="27432">
+                    <a:solidFill>
+                      <a:srgbClr val="FFFFFF"/>
+                    </a:solidFill>
+                  </a:tcPr>
+                </a:tc>
+                <a:tc>
+                  <a:txBody>
+                    <a:bodyPr/>
+                    <a:lstStyle/>
+                    <a:p>
+                      <a:pPr algn="l"/>
+                      <a:r>
+                        <a:rPr sz="1400" b="0">
+                          <a:solidFill>
+                            <a:srgbClr val="5C5B54"/>
+                          </a:solidFill>
+                          <a:latin typeface="Calibri"/>
+                        </a:rPr>
+                        <a:t>40 MHz, μ=1, DDDSU</a:t>
+                      </a:r>
+                    </a:p>
+                  </a:txBody>
+                  <a:tcPr marL="82296" marT="27432" marB="27432">
+                    <a:solidFill>
+                      <a:srgbClr val="FFFFFF"/>
+                    </a:solidFill>
+                  </a:tcPr>
+                </a:tc>
+                <a:tc>
+                  <a:txBody>
+                    <a:bodyPr/>
+                    <a:lstStyle/>
+                    <a:p>
+                      <a:pPr algn="l"/>
+                      <a:r>
+                        <a:rPr sz="1400" b="0">
+                          <a:solidFill>
+                            <a:srgbClr val="5C5B54"/>
+                          </a:solidFill>
+                          <a:latin typeface="Calibri"/>
+                        </a:rPr>
+                        <a:t>8 × 5 Mbps + 80 Mbps bulk</a:t>
+                      </a:r>
+                    </a:p>
+                  </a:txBody>
+                  <a:tcPr marL="82296" marT="27432" marB="27432">
+                    <a:solidFill>
+                      <a:srgbClr val="FFFFFF"/>
+                    </a:solidFill>
+                  </a:tcPr>
+                </a:tc>
+                <a:tc>
+                  <a:txBody>
+                    <a:bodyPr/>
+                    <a:lstStyle/>
+                    <a:p>
+                      <a:pPr algn="l"/>
+                      <a:r>
+                        <a:rPr sz="1400" b="0">
+                          <a:solidFill>
+                            <a:srgbClr val="5C5B54"/>
+                          </a:solidFill>
+                          <a:latin typeface="Calibri"/>
+                        </a:rPr>
+                        <a:t>Deadlines under saturation</a:t>
+                      </a:r>
+                    </a:p>
+                  </a:txBody>
+                  <a:tcPr marL="82296" marT="27432" marB="27432">
+                    <a:solidFill>
+                      <a:srgbClr val="FFFFFF"/>
+                    </a:solidFill>
+                  </a:tcPr>
+                </a:tc>
+              </a:tr>
+            </a:tbl>
+          </a:graphicData>
+        </a:graphic>
+      </p:graphicFrame>
+    </p:spTree>
+  </p:cSld>
+  <p:clrMapOvr>
+    <a:masterClrMapping/>
+  </p:clrMapOvr>
+</p:sld>
+</file>
+
+<file path=ppt/slides/slide7.xml><?xml version="1.0" encoding="utf-8"?>
+<p:sld xmlns:a="http://schemas.openxmlformats.org/drawingml/2006/main" xmlns:p="http://schemas.openxmlformats.org/presentationml/2006/main" xmlns:r="http://schemas.openxmlformats.org/officeDocument/2006/relationships">
+  <p:cSld>
+    <p:spTree>
+      <p:nvGrpSpPr>
+        <p:cNvPr id="1" name=""/>
+        <p:cNvGrpSpPr/>
+        <p:nvPr/>
+      </p:nvGrpSpPr>
+      <p:grpSpPr/>
+      <p:sp>
+        <p:nvSpPr>
+          <p:cNvPr id="2" name="TextBox 1"/>
+          <p:cNvSpPr txBox="1"/>
+          <p:nvPr/>
+        </p:nvSpPr>
+        <p:spPr>
+          <a:xfrm>
+            <a:off x="822960" y="502920"/>
+            <a:ext cx="10545775" cy="274320"/>
+          </a:xfrm>
+          <a:prstGeom prst="rect">
+            <a:avLst/>
+          </a:prstGeom>
+          <a:noFill/>
+        </p:spPr>
+        <p:txBody>
+          <a:bodyPr wrap="square">
+            <a:spAutoFit/>
+          </a:bodyPr>
+          <a:lstStyle/>
+          <a:p>
+            <a:pPr algn="l">
+              <a:lnSpc>
+                <a:spcPct val="125000"/>
+              </a:lnSpc>
+              <a:spcAft>
+                <a:spcPts val="600"/>
+              </a:spcAft>
+            </a:pPr>
+            <a:r>
+              <a:rPr sz="1100" b="1">
+                <a:solidFill>
+                  <a:srgbClr val="8A8980"/>
+                </a:solidFill>
+                <a:latin typeface="Calibri"/>
+              </a:rPr>
+              <a:t>SENSOR_DENSE  ·  THE CONTROL CHANNEL BINDS</a:t>
+            </a:r>
+          </a:p>
+        </p:txBody>
+      </p:sp>
+      <p:sp>
+        <p:nvSpPr>
+          <p:cNvPr id="3" name="TextBox 2"/>
+          <p:cNvSpPr txBox="1"/>
+          <p:nvPr/>
+        </p:nvSpPr>
+        <p:spPr>
+          <a:xfrm>
+            <a:off x="822960" y="813816"/>
+            <a:ext cx="10545775" cy="640080"/>
+          </a:xfrm>
+          <a:prstGeom prst="rect">
+            <a:avLst/>
+          </a:prstGeom>
+          <a:noFill/>
+        </p:spPr>
+        <p:txBody>
+          <a:bodyPr wrap="square">
+            <a:spAutoFit/>
+          </a:bodyPr>
+          <a:lstStyle/>
+          <a:p>
+            <a:pPr algn="l">
+              <a:lnSpc>
+                <a:spcPct val="125000"/>
+              </a:lnSpc>
+              <a:spcAft>
+                <a:spcPts val="600"/>
+              </a:spcAft>
+            </a:pPr>
+            <a:r>
+              <a:rPr sz="3000" b="1">
+                <a:solidFill>
+                  <a:srgbClr val="1A1A19"/>
+                </a:solidFill>
+                <a:latin typeface="Calibri"/>
+              </a:rPr>
+              <a:t>Result 1: a capability PF does not have</a:t>
+            </a:r>
+          </a:p>
+        </p:txBody>
+      </p:sp>
+      <p:sp>
+        <p:nvSpPr>
+          <p:cNvPr id="4" name="Rectangle 3"/>
+          <p:cNvSpPr/>
+          <p:nvPr/>
+        </p:nvSpPr>
+        <p:spPr>
+          <a:xfrm>
+            <a:off x="822960" y="1481328"/>
+            <a:ext cx="10545775" cy="15875"/>
+          </a:xfrm>
+          <a:prstGeom prst="rect">
+            <a:avLst/>
+          </a:prstGeom>
+          <a:solidFill>
+            <a:srgbClr val="DDDCD6"/>
+          </a:solidFill>
+          <a:ln>
+            <a:noFill/>
+          </a:ln>
+          <a:effectLst/>
+        </p:spPr>
+        <p:style>
+          <a:lnRef idx="1">
+            <a:schemeClr val="accent1"/>
+          </a:lnRef>
+          <a:fillRef idx="3">
+            <a:schemeClr val="accent1"/>
+          </a:fillRef>
+          <a:effectRef idx="2">
+            <a:schemeClr val="accent1"/>
+          </a:effectRef>
+          <a:fontRef idx="minor">
+            <a:schemeClr val="lt1"/>
+          </a:fontRef>
+        </p:style>
+        <p:txBody>
+          <a:bodyPr rtlCol="0" anchor="ctr"/>
+          <a:lstStyle/>
+          <a:p>
+            <a:pPr algn="ctr"/>
+          </a:p>
+        </p:txBody>
+      </p:sp>
+      <p:sp>
+        <p:nvSpPr>
+          <p:cNvPr id="5" name="TextBox 4"/>
+          <p:cNvSpPr txBox="1"/>
+          <p:nvPr/>
+        </p:nvSpPr>
+        <p:spPr>
+          <a:xfrm>
+            <a:off x="822960" y="1783080"/>
+            <a:ext cx="10545775" cy="702310"/>
+          </a:xfrm>
+          <a:prstGeom prst="rect">
+            <a:avLst/>
+          </a:prstGeom>
+          <a:noFill/>
+        </p:spPr>
+        <p:txBody>
+          <a:bodyPr wrap="square">
+            <a:spAutoFit/>
+          </a:bodyPr>
+          <a:lstStyle/>
+          <a:p>
+            <a:pPr algn="l">
+              <a:lnSpc>
+                <a:spcPct val="125000"/>
+              </a:lnSpc>
+              <a:spcAft>
+                <a:spcPts val="600"/>
+              </a:spcAft>
+            </a:pPr>
+            <a:r>
               <a:rPr sz="1700" b="0">
                 <a:solidFill>
                   <a:srgbClr val="5C5B54"/>
                 </a:solidFill>
                 <a:latin typeface="Calibri"/>
               </a:rPr>
-              <a:t>30 dense periodic uplink sensors, 15 ms deadline. The DCI/CCE budget runs out before the data channel does.</a:t>
+              <a:t>30 dense periodic uplink sensors with a 15 ms deadline. The DCI/CCE budget runs out before the data channel does.</a:t>
             </a:r>
           </a:p>
         </p:txBody>
@@ -5914,8 +8816,8 @@
           <p:nvPr/>
         </p:nvGraphicFramePr>
         <p:xfrm>
-          <a:off x="822960" y="2606040"/>
-          <a:ext cx="6949440" cy="1243584"/>
+          <a:off x="822960" y="2759710"/>
+          <a:ext cx="7863837" cy="1243584"/>
         </p:xfrm>
         <a:graphic>
           <a:graphicData uri="http://schemas.openxmlformats.org/drawingml/2006/table">
@@ -5924,9 +8826,11 @@
                 <a:tableStyleId>{5C22544A-7EE6-4342-B048-85BDC9FD1C3A}</a:tableStyleId>
               </a:tblPr>
               <a:tblGrid>
-                <a:gridCol w="3474720"/>
-                <a:gridCol w="1737360"/>
-                <a:gridCol w="1737360"/>
+                <a:gridCol w="2405409"/>
+                <a:gridCol w="1202704"/>
+                <a:gridCol w="1202704"/>
+                <a:gridCol w="1572768"/>
+                <a:gridCol w="1480252"/>
               </a:tblGrid>
               <a:tr h="310896">
                 <a:tc>
@@ -5965,7 +8869,53 @@
                           </a:solidFill>
                           <a:latin typeface="Calibri"/>
                         </a:rPr>
+                        <a:t>Total</a:t>
+                      </a:r>
+                    </a:p>
+                  </a:txBody>
+                  <a:tcPr marL="82296" marT="27432" marB="27432">
+                    <a:solidFill>
+                      <a:srgbClr val="F5F4F0"/>
+                    </a:solidFill>
+                  </a:tcPr>
+                </a:tc>
+                <a:tc>
+                  <a:txBody>
+                    <a:bodyPr/>
+                    <a:lstStyle/>
+                    <a:p>
+                      <a:pPr algn="r"/>
+                      <a:r>
+                        <a:rPr sz="1600" b="1">
+                          <a:solidFill>
+                            <a:srgbClr val="1A1A19"/>
+                          </a:solidFill>
+                          <a:latin typeface="Calibri"/>
+                        </a:rPr>
                         <a:t>On time</a:t>
+                      </a:r>
+                    </a:p>
+                  </a:txBody>
+                  <a:tcPr marL="82296" marT="27432" marB="27432">
+                    <a:solidFill>
+                      <a:srgbClr val="F5F4F0"/>
+                    </a:solidFill>
+                  </a:tcPr>
+                </a:tc>
+                <a:tc>
+                  <a:txBody>
+                    <a:bodyPr/>
+                    <a:lstStyle/>
+                    <a:p>
+                      <a:pPr algn="r"/>
+                      <a:r>
+                        <a:rPr sz="1600" b="1">
+                          <a:solidFill>
+                            <a:srgbClr val="1A1A19"/>
+                          </a:solidFill>
+                          <a:latin typeface="Calibri"/>
+                        </a:rPr>
+                        <a:t>Min delivery</a:t>
                       </a:r>
                     </a:p>
                   </a:txBody>
@@ -6036,7 +8986,53 @@
                           </a:solidFill>
                           <a:latin typeface="Calibri"/>
                         </a:rPr>
+                        <a:t>6.9 M</a:t>
+                      </a:r>
+                    </a:p>
+                  </a:txBody>
+                  <a:tcPr marL="82296" marT="27432" marB="27432">
+                    <a:solidFill>
+                      <a:srgbClr val="FFFFFF"/>
+                    </a:solidFill>
+                  </a:tcPr>
+                </a:tc>
+                <a:tc>
+                  <a:txBody>
+                    <a:bodyPr/>
+                    <a:lstStyle/>
+                    <a:p>
+                      <a:pPr algn="r"/>
+                      <a:r>
+                        <a:rPr sz="1600" b="0">
+                          <a:solidFill>
+                            <a:srgbClr val="5C5B54"/>
+                          </a:solidFill>
+                          <a:latin typeface="Calibri"/>
+                        </a:rPr>
                         <a:t>0/30</a:t>
+                      </a:r>
+                    </a:p>
+                  </a:txBody>
+                  <a:tcPr marL="82296" marT="27432" marB="27432">
+                    <a:solidFill>
+                      <a:srgbClr val="FFFFFF"/>
+                    </a:solidFill>
+                  </a:tcPr>
+                </a:tc>
+                <a:tc>
+                  <a:txBody>
+                    <a:bodyPr/>
+                    <a:lstStyle/>
+                    <a:p>
+                      <a:pPr algn="r"/>
+                      <a:r>
+                        <a:rPr sz="1600" b="0">
+                          <a:solidFill>
+                            <a:srgbClr val="5C5B54"/>
+                          </a:solidFill>
+                          <a:latin typeface="Calibri"/>
+                        </a:rPr>
+                        <a:t>71%</a:t>
                       </a:r>
                     </a:p>
                   </a:txBody>
@@ -6103,11 +9099,57 @@
                       <a:r>
                         <a:rPr sz="1600" b="0">
                           <a:solidFill>
-                            <a:srgbClr val="E34948"/>
+                            <a:srgbClr val="5C5B54"/>
+                          </a:solidFill>
+                          <a:latin typeface="Calibri"/>
+                        </a:rPr>
+                        <a:t>9.2 M</a:t>
+                      </a:r>
+                    </a:p>
+                  </a:txBody>
+                  <a:tcPr marL="82296" marT="27432" marB="27432">
+                    <a:solidFill>
+                      <a:srgbClr val="FFFFFF"/>
+                    </a:solidFill>
+                  </a:tcPr>
+                </a:tc>
+                <a:tc>
+                  <a:txBody>
+                    <a:bodyPr/>
+                    <a:lstStyle/>
+                    <a:p>
+                      <a:pPr algn="r"/>
+                      <a:r>
+                        <a:rPr sz="1600" b="0">
+                          <a:solidFill>
+                            <a:srgbClr val="5C5B54"/>
                           </a:solidFill>
                           <a:latin typeface="Calibri"/>
                         </a:rPr>
                         <a:t>2/30</a:t>
+                      </a:r>
+                    </a:p>
+                  </a:txBody>
+                  <a:tcPr marL="82296" marT="27432" marB="27432">
+                    <a:solidFill>
+                      <a:srgbClr val="FFFFFF"/>
+                    </a:solidFill>
+                  </a:tcPr>
+                </a:tc>
+                <a:tc>
+                  <a:txBody>
+                    <a:bodyPr/>
+                    <a:lstStyle/>
+                    <a:p>
+                      <a:pPr algn="r"/>
+                      <a:r>
+                        <a:rPr sz="1600" b="0">
+                          <a:solidFill>
+                            <a:srgbClr val="5C5B54"/>
+                          </a:solidFill>
+                          <a:latin typeface="Calibri"/>
+                        </a:rPr>
+                        <a:t>85%</a:t>
                       </a:r>
                     </a:p>
                   </a:txBody>
@@ -6178,7 +9220,53 @@
                           </a:solidFill>
                           <a:latin typeface="Calibri"/>
                         </a:rPr>
+                        <a:t>9.6 M</a:t>
+                      </a:r>
+                    </a:p>
+                  </a:txBody>
+                  <a:tcPr marL="82296" marT="27432" marB="27432">
+                    <a:solidFill>
+                      <a:srgbClr val="FFFFFF"/>
+                    </a:solidFill>
+                  </a:tcPr>
+                </a:tc>
+                <a:tc>
+                  <a:txBody>
+                    <a:bodyPr/>
+                    <a:lstStyle/>
+                    <a:p>
+                      <a:pPr algn="r"/>
+                      <a:r>
+                        <a:rPr sz="1600" b="0">
+                          <a:solidFill>
+                            <a:srgbClr val="008300"/>
+                          </a:solidFill>
+                          <a:latin typeface="Calibri"/>
+                        </a:rPr>
                         <a:t>30/30</a:t>
+                      </a:r>
+                    </a:p>
+                  </a:txBody>
+                  <a:tcPr marL="82296" marT="27432" marB="27432">
+                    <a:solidFill>
+                      <a:srgbClr val="FFFFFF"/>
+                    </a:solidFill>
+                  </a:tcPr>
+                </a:tc>
+                <a:tc>
+                  <a:txBody>
+                    <a:bodyPr/>
+                    <a:lstStyle/>
+                    <a:p>
+                      <a:pPr algn="r"/>
+                      <a:r>
+                        <a:rPr sz="1600" b="0">
+                          <a:solidFill>
+                            <a:srgbClr val="008300"/>
+                          </a:solidFill>
+                          <a:latin typeface="Calibri"/>
+                        </a:rPr>
+                        <a:t>100%</a:t>
                       </a:r>
                     </a:p>
                   </a:txBody>
@@ -6224,8 +9312,8 @@
         </p:nvSpPr>
         <p:spPr>
           <a:xfrm>
-            <a:off x="822960" y="3977639"/>
-            <a:ext cx="10545775" cy="1371600"/>
+            <a:off x="822960" y="4277614"/>
+            <a:ext cx="10545775" cy="1325879"/>
           </a:xfrm>
           <a:prstGeom prst="rect">
             <a:avLst/>
@@ -6268,8 +9356,8 @@
         </p:nvSpPr>
         <p:spPr>
           <a:xfrm>
-            <a:off x="822960" y="3977639"/>
-            <a:ext cx="50800" cy="1371600"/>
+            <a:off x="822960" y="4277614"/>
+            <a:ext cx="50800" cy="1325879"/>
           </a:xfrm>
           <a:prstGeom prst="rect">
             <a:avLst/>
@@ -6312,8 +9400,8 @@
         </p:nvSpPr>
         <p:spPr>
           <a:xfrm>
-            <a:off x="1051560" y="4105655"/>
-            <a:ext cx="10088575" cy="1115568"/>
+            <a:off x="1051560" y="4414774"/>
+            <a:ext cx="10088575" cy="1051559"/>
           </a:xfrm>
           <a:prstGeom prst="rect">
             <a:avLst/>
@@ -6341,7 +9429,7 @@
                 </a:solidFill>
                 <a:latin typeface="Calibri"/>
               </a:rPr>
-              <a:t>Configured grants cost </a:t>
+              <a:t>Each periodic flow gets a standing allocation that costs </a:t>
             </a:r>
             <a:r>
               <a:rPr sz="1600" b="1">
@@ -6350,7 +9438,7 @@
                 </a:solidFill>
                 <a:latin typeface="Calibri"/>
               </a:rPr>
-              <a:t>zero PDCCH per slot and need no buffer-status round trip</a:t>
+              <a:t>zero PDCCH per slot and needs no BSR round trip</a:t>
             </a:r>
             <a:r>
               <a:rPr sz="1600" b="0">
@@ -6359,7 +9447,7 @@
                 </a:solidFill>
                 <a:latin typeface="Calibri"/>
               </a:rPr>
-              <a:t>. PF is throttled by both budgets at once and has no mechanism to bypass either — this is a capability gap, not a tuning gap, so no amount of PF tuning closes it.</a:t>
+              <a:t>. PF is throttled by both budgets at once and has no mechanism to bypass either — so no amount of PF tuning closes this.</a:t>
             </a:r>
           </a:p>
         </p:txBody>
@@ -6372,8 +9460,8 @@
         </p:nvSpPr>
         <p:spPr>
           <a:xfrm>
-            <a:off x="822960" y="5577840"/>
-            <a:ext cx="10545775" cy="457200"/>
+            <a:off x="822960" y="5877813"/>
+            <a:ext cx="10545775" cy="628650"/>
           </a:xfrm>
           <a:prstGeom prst="rect">
             <a:avLst/>
@@ -6401,7 +9489,7 @@
                 </a:solidFill>
                 <a:latin typeface="Calibri"/>
               </a:rPr>
-              <a:t>Independently reported by Larrañaga et al. (JNCA 2023) from ns-3/5G-LENA. We reproduce it in a simulator sharing no code with theirs.</a:t>
+              <a:t>Larrañaga et al. (JNCA 2023) report the same dominance of configured grants for time-critical industrial traffic from ns-3 / 5G-LENA — an independent simulator sharing no code with ours.</a:t>
             </a:r>
           </a:p>
         </p:txBody>
@@ -6414,7 +9502,7 @@
 </p:sld>
 </file>
 
-<file path=ppt/slides/slide5.xml><?xml version="1.0" encoding="utf-8"?>
+<file path=ppt/slides/slide8.xml><?xml version="1.0" encoding="utf-8"?>
 <p:sld xmlns:a="http://schemas.openxmlformats.org/drawingml/2006/main" xmlns:p="http://schemas.openxmlformats.org/presentationml/2006/main" xmlns:r="http://schemas.openxmlformats.org/officeDocument/2006/relationships">
   <p:cSld>
     <p:spTree>
@@ -6461,7 +9549,7 @@
                 </a:solidFill>
                 <a:latin typeface="Calibri"/>
               </a:rPr>
-              <a:t>RESULT · LATENCY_BOUND</a:t>
+              <a:t>LATENCY_BOUND  ·  DEADLINES UNDER SATURATION</a:t>
             </a:r>
           </a:p>
         </p:txBody>
@@ -6503,7 +9591,7 @@
                 </a:solidFill>
                 <a:latin typeface="Calibri"/>
               </a:rPr>
-              <a:t>Where it wins outright (2): deadline-blindness is silent</a:t>
+              <a:t>Result 2: deadline-blindness is silent</a:t>
             </a:r>
           </a:p>
         </p:txBody>
@@ -6561,7 +9649,7 @@
         <p:spPr>
           <a:xfrm>
             <a:off x="822960" y="1783080"/>
-            <a:ext cx="10545775" cy="457200"/>
+            <a:ext cx="10545775" cy="702310"/>
           </a:xfrm>
           <a:prstGeom prst="rect">
             <a:avLst/>
@@ -6589,7 +9677,7 @@
                 </a:solidFill>
                 <a:latin typeface="Calibri"/>
               </a:rPr>
-              <a:t>Eight interactive 5 Mbps streams, 12 ms deadline, sharing a saturated downlink with 80 Mbps of bulk.</a:t>
+              <a:t>Eight interactive 5 Mbps streams with a 12 ms deadline, sharing a saturated downlink with 80 Mbps of bulk.</a:t>
             </a:r>
           </a:p>
         </p:txBody>
@@ -6603,7 +9691,7 @@
           <p:nvPr/>
         </p:nvGraphicFramePr>
         <p:xfrm>
-          <a:off x="822960" y="2423160"/>
+          <a:off x="822960" y="2759710"/>
           <a:ext cx="8595357" cy="1243584"/>
         </p:xfrm>
         <a:graphic>
@@ -7026,7 +10114,7 @@
                       <a:r>
                         <a:rPr sz="1600" b="0">
                           <a:solidFill>
-                            <a:srgbClr val="5C5B54"/>
+                            <a:srgbClr val="008300"/>
                           </a:solidFill>
                           <a:latin typeface="Calibri"/>
                         </a:rPr>
@@ -7099,8 +10187,8 @@
         </p:nvSpPr>
         <p:spPr>
           <a:xfrm>
-            <a:off x="822960" y="4114800"/>
-            <a:ext cx="10545775" cy="1371600"/>
+            <a:off x="822960" y="4277614"/>
+            <a:ext cx="10545775" cy="1325879"/>
           </a:xfrm>
           <a:prstGeom prst="rect">
             <a:avLst/>
@@ -7143,8 +10231,8 @@
         </p:nvSpPr>
         <p:spPr>
           <a:xfrm>
-            <a:off x="822960" y="4114800"/>
-            <a:ext cx="50800" cy="1371600"/>
+            <a:off x="822960" y="4277614"/>
+            <a:ext cx="50800" cy="1325879"/>
           </a:xfrm>
           <a:prstGeom prst="rect">
             <a:avLst/>
@@ -7187,8 +10275,8 @@
         </p:nvSpPr>
         <p:spPr>
           <a:xfrm>
-            <a:off x="1051560" y="4242816"/>
-            <a:ext cx="10088575" cy="1115568"/>
+            <a:off x="1051560" y="4414774"/>
+            <a:ext cx="10088575" cy="1051559"/>
           </a:xfrm>
           <a:prstGeom prst="rect">
             <a:avLst/>
@@ -7216,7 +10304,7 @@
                 </a:solidFill>
                 <a:latin typeface="Calibri"/>
               </a:rPr>
-              <a:t>PF's control-flow mean delivery is </a:t>
+              <a:t>PF's mean delivery on the control flows is </a:t>
             </a:r>
             <a:r>
               <a:rPr sz="1600" b="1">
@@ -7247,8 +10335,8 @@
         </p:nvSpPr>
         <p:spPr>
           <a:xfrm>
-            <a:off x="822960" y="5669280"/>
-            <a:ext cx="10545775" cy="457200"/>
+            <a:off x="822960" y="5877813"/>
+            <a:ext cx="10545775" cy="628650"/>
           </a:xfrm>
           <a:prstGeom prst="rect">
             <a:avLst/>
@@ -7276,7 +10364,7 @@
                 </a:solidFill>
                 <a:latin typeface="Calibri"/>
               </a:rPr>
-              <a:t>The two-tier design pays for it explicitly — bulk drops 24.6 → 13.2 Mbps to clear every deadline.</a:t>
+              <a:t>The design pays for this explicitly and visibly — bulk throughput drops 24.6 → 13.2 Mbps to clear every deadline. That is the trade the QoS profile asked for.</a:t>
             </a:r>
           </a:p>
         </p:txBody>
@@ -7289,7 +10377,7 @@
 </p:sld>
 </file>
 
-<file path=ppt/slides/slide6.xml><?xml version="1.0" encoding="utf-8"?>
+<file path=ppt/slides/slide9.xml><?xml version="1.0" encoding="utf-8"?>
 <p:sld xmlns:a="http://schemas.openxmlformats.org/drawingml/2006/main" xmlns:p="http://schemas.openxmlformats.org/presentationml/2006/main" xmlns:r="http://schemas.openxmlformats.org/officeDocument/2006/relationships">
   <p:cSld>
     <p:spTree>
@@ -7336,7 +10424,7 @@
                 </a:solidFill>
                 <a:latin typeface="Calibri"/>
               </a:rPr>
-              <a:t>RESULT · FACTORY_ROBOTS</a:t>
+              <a:t>FACTORY_ROBOTS  ·  THE UPLINK DATA CHANNEL BINDS</a:t>
             </a:r>
           </a:p>
         </p:txBody>
@@ -7378,7 +10466,7 @@
                 </a:solidFill>
                 <a:latin typeface="Calibri"/>
               </a:rPr>
-              <a:t>Where it is mixed: the metric differs, not the outcome</a:t>
+              <a:t>Result 3: rate contracts, swept across offered load</a:t>
             </a:r>
           </a:p>
         </p:txBody>
@@ -7436,7 +10524,7 @@
         <p:spPr>
           <a:xfrm>
             <a:off x="822960" y="1719072"/>
-            <a:ext cx="5486400" cy="548640"/>
+            <a:ext cx="5486400" cy="702310"/>
           </a:xfrm>
           <a:prstGeom prst="rect">
             <a:avLst/>
@@ -7464,7 +10552,7 @@
                 </a:solidFill>
                 <a:latin typeface="Calibri"/>
               </a:rPr>
-              <a:t>Ten robots, uplink-heavy, swept across offered load. Two metrics disagree.</a:t>
+              <a:t>Ten robots, uplink-heavy. Capacity is fixed by spectrum, so the swept axis is offered load.</a:t>
             </a:r>
           </a:p>
         </p:txBody>
@@ -7496,7 +10584,7 @@
         <p:spPr>
           <a:xfrm>
             <a:off x="6492240" y="2148840"/>
-            <a:ext cx="4846320" cy="365760"/>
+            <a:ext cx="4846320" cy="334009"/>
           </a:xfrm>
           <a:prstGeom prst="rect">
             <a:avLst/>
@@ -7538,7 +10626,7 @@
           <p:nvPr/>
         </p:nvGraphicFramePr>
         <p:xfrm>
-          <a:off x="6492240" y="2606040"/>
+          <a:off x="6492240" y="2592577"/>
           <a:ext cx="4846319" cy="1554480"/>
         </p:xfrm>
         <a:graphic>
@@ -7919,8 +11007,8 @@
         </p:nvSpPr>
         <p:spPr>
           <a:xfrm>
-            <a:off x="6492240" y="4389120"/>
-            <a:ext cx="4846320" cy="1645920"/>
+            <a:off x="6492240" y="4421377"/>
+            <a:ext cx="4846320" cy="1823085"/>
           </a:xfrm>
           <a:prstGeom prst="rect">
             <a:avLst/>
@@ -7963,8 +11051,8 @@
         </p:nvSpPr>
         <p:spPr>
           <a:xfrm>
-            <a:off x="6492240" y="4389120"/>
-            <a:ext cx="50800" cy="1645920"/>
+            <a:off x="6492240" y="4421377"/>
+            <a:ext cx="50800" cy="1823085"/>
           </a:xfrm>
           <a:prstGeom prst="rect">
             <a:avLst/>
@@ -8007,8 +11095,8 @@
         </p:nvSpPr>
         <p:spPr>
           <a:xfrm>
-            <a:off x="6720840" y="4517136"/>
-            <a:ext cx="4389120" cy="1389888"/>
+            <a:off x="6720840" y="4558537"/>
+            <a:ext cx="4389120" cy="1548765"/>
           </a:xfrm>
           <a:prstGeom prst="rect">
             <a:avLst/>
@@ -8030,31 +11118,22 @@
               </a:spcAft>
             </a:pPr>
             <a:r>
-              <a:rPr sz="1600" b="0">
+              <a:rPr sz="1500" b="1">
                 <a:solidFill>
                   <a:srgbClr val="1A1A19"/>
                 </a:solidFill>
                 <a:latin typeface="Calibri"/>
               </a:rPr>
-              <a:t>At 0.67x load every robot gets </a:t>
-            </a:r>
-            <a:r>
-              <a:rPr sz="1600" b="1">
+              <a:t>At 0.50× we honour 10/10 contracts to PF's 8/10.</a:t>
+            </a:r>
+            <a:r>
+              <a:rPr sz="1500" b="0">
                 <a:solidFill>
                   <a:srgbClr val="1A1A19"/>
                 </a:solidFill>
                 <a:latin typeface="Calibri"/>
               </a:rPr>
-              <a:t>≥67%</a:t>
-            </a:r>
-            <a:r>
-              <a:rPr sz="1600" b="0">
-                <a:solidFill>
-                  <a:srgbClr val="1A1A19"/>
-                </a:solidFill>
-                <a:latin typeface="Calibri"/>
-              </a:rPr>
-              <a:t> of its rate under two-tier, while PF leaves its worst at 21% — yet PF scores 6/10 to our 1/10, because six of its flows clear the 95% bar and none of ours do.</a:t>
+              <a:t> Deeper in overload the two disagree about the metric, not the outcome: at 0.67× every robot holds ≥67% of its rate where PF's worst gets 21%.</a:t>
             </a:r>
           </a:p>
         </p:txBody>
@@ -8067,8 +11146,8 @@
         </p:nvSpPr>
         <p:spPr>
           <a:xfrm>
-            <a:off x="822960" y="6108192"/>
-            <a:ext cx="10545775" cy="640080"/>
+            <a:off x="822960" y="6172200"/>
+            <a:ext cx="10545775" cy="628650"/>
           </a:xfrm>
           <a:prstGeom prst="rect">
             <a:avLst/>
@@ -8096,1447 +11175,7 @@
                 </a:solidFill>
                 <a:latin typeface="Calibri"/>
               </a:rPr>
-              <a:t>A threshold count rewards concentrating a shortfall. This design spreads it. Which is better depends on whether 90% of a video feed is worth anything — for cameras yes, for a control loop no.</a:t>
-            </a:r>
-          </a:p>
-        </p:txBody>
-      </p:sp>
-    </p:spTree>
-  </p:cSld>
-  <p:clrMapOvr>
-    <a:masterClrMapping/>
-  </p:clrMapOvr>
-</p:sld>
-</file>
-
-<file path=ppt/slides/slide7.xml><?xml version="1.0" encoding="utf-8"?>
-<p:sld xmlns:a="http://schemas.openxmlformats.org/drawingml/2006/main" xmlns:p="http://schemas.openxmlformats.org/presentationml/2006/main" xmlns:r="http://schemas.openxmlformats.org/officeDocument/2006/relationships">
-  <p:cSld>
-    <p:spTree>
-      <p:nvGrpSpPr>
-        <p:cNvPr id="1" name=""/>
-        <p:cNvGrpSpPr/>
-        <p:nvPr/>
-      </p:nvGrpSpPr>
-      <p:grpSpPr/>
-      <p:sp>
-        <p:nvSpPr>
-          <p:cNvPr id="2" name="Rectangle 1"/>
-          <p:cNvSpPr/>
-          <p:nvPr/>
-        </p:nvSpPr>
-        <p:spPr>
-          <a:xfrm>
-            <a:off x="0" y="0"/>
-            <a:ext cx="12191695" cy="6858000"/>
-          </a:xfrm>
-          <a:prstGeom prst="rect">
-            <a:avLst/>
-          </a:prstGeom>
-          <a:solidFill>
-            <a:srgbClr val="F5F4F0"/>
-          </a:solidFill>
-          <a:ln>
-            <a:noFill/>
-          </a:ln>
-          <a:effectLst/>
-        </p:spPr>
-        <p:style>
-          <a:lnRef idx="1">
-            <a:schemeClr val="accent1"/>
-          </a:lnRef>
-          <a:fillRef idx="3">
-            <a:schemeClr val="accent1"/>
-          </a:fillRef>
-          <a:effectRef idx="2">
-            <a:schemeClr val="accent1"/>
-          </a:effectRef>
-          <a:fontRef idx="minor">
-            <a:schemeClr val="lt1"/>
-          </a:fontRef>
-        </p:style>
-        <p:txBody>
-          <a:bodyPr rtlCol="0" anchor="ctr"/>
-          <a:lstStyle/>
-          <a:p>
-            <a:pPr algn="ctr"/>
-          </a:p>
-        </p:txBody>
-      </p:sp>
-      <p:sp>
-        <p:nvSpPr>
-          <p:cNvPr id="3" name="TextBox 2"/>
-          <p:cNvSpPr txBox="1"/>
-          <p:nvPr/>
-        </p:nvSpPr>
-        <p:spPr>
-          <a:xfrm>
-            <a:off x="822960" y="2286000"/>
-            <a:ext cx="10545775" cy="1097280"/>
-          </a:xfrm>
-          <a:prstGeom prst="rect">
-            <a:avLst/>
-          </a:prstGeom>
-          <a:noFill/>
-        </p:spPr>
-        <p:txBody>
-          <a:bodyPr wrap="square">
-            <a:spAutoFit/>
-          </a:bodyPr>
-          <a:lstStyle/>
-          <a:p>
-            <a:pPr algn="l">
-              <a:lnSpc>
-                <a:spcPct val="120000"/>
-              </a:lnSpc>
-              <a:spcAft>
-                <a:spcPts val="600"/>
-              </a:spcAft>
-            </a:pPr>
-            <a:r>
-              <a:rPr sz="3200" b="0">
-                <a:solidFill>
-                  <a:srgbClr val="1A1A19"/>
-                </a:solidFill>
-                <a:latin typeface="Calibri"/>
-              </a:rPr>
-              <a:t>Every result above is a claim about a scheduler
-</a:t>
-            </a:r>
-            <a:r>
-              <a:rPr sz="3200" b="1">
-                <a:solidFill>
-                  <a:srgbClr val="1A1A19"/>
-                </a:solidFill>
-                <a:latin typeface="Calibri"/>
-              </a:rPr>
-              <a:t>mediated by a simulator.</a:t>
-            </a:r>
-          </a:p>
-        </p:txBody>
-      </p:sp>
-      <p:sp>
-        <p:nvSpPr>
-          <p:cNvPr id="4" name="Rectangle 3"/>
-          <p:cNvSpPr/>
-          <p:nvPr/>
-        </p:nvSpPr>
-        <p:spPr>
-          <a:xfrm>
-            <a:off x="822960" y="3977639"/>
-            <a:ext cx="2011680" cy="38100"/>
-          </a:xfrm>
-          <a:prstGeom prst="rect">
-            <a:avLst/>
-          </a:prstGeom>
-          <a:solidFill>
-            <a:srgbClr val="EB6834"/>
-          </a:solidFill>
-          <a:ln>
-            <a:noFill/>
-          </a:ln>
-          <a:effectLst/>
-        </p:spPr>
-        <p:style>
-          <a:lnRef idx="1">
-            <a:schemeClr val="accent1"/>
-          </a:lnRef>
-          <a:fillRef idx="3">
-            <a:schemeClr val="accent1"/>
-          </a:fillRef>
-          <a:effectRef idx="2">
-            <a:schemeClr val="accent1"/>
-          </a:effectRef>
-          <a:fontRef idx="minor">
-            <a:schemeClr val="lt1"/>
-          </a:fontRef>
-        </p:style>
-        <p:txBody>
-          <a:bodyPr rtlCol="0" anchor="ctr"/>
-          <a:lstStyle/>
-          <a:p>
-            <a:pPr algn="ctr"/>
-          </a:p>
-        </p:txBody>
-      </p:sp>
-      <p:sp>
-        <p:nvSpPr>
-          <p:cNvPr id="5" name="TextBox 4"/>
-          <p:cNvSpPr txBox="1"/>
-          <p:nvPr/>
-        </p:nvSpPr>
-        <p:spPr>
-          <a:xfrm>
-            <a:off x="822960" y="4251960"/>
-            <a:ext cx="10545775" cy="1097280"/>
-          </a:xfrm>
-          <a:prstGeom prst="rect">
-            <a:avLst/>
-          </a:prstGeom>
-          <a:noFill/>
-        </p:spPr>
-        <p:txBody>
-          <a:bodyPr wrap="square">
-            <a:spAutoFit/>
-          </a:bodyPr>
-          <a:lstStyle/>
-          <a:p>
-            <a:pPr algn="l">
-              <a:lnSpc>
-                <a:spcPct val="125000"/>
-              </a:lnSpc>
-              <a:spcAft>
-                <a:spcPts val="600"/>
-              </a:spcAft>
-            </a:pPr>
-            <a:r>
-              <a:rPr sz="1900" b="0">
-                <a:solidFill>
-                  <a:srgbClr val="5C5B54"/>
-                </a:solidFill>
-                <a:latin typeface="Calibri"/>
-              </a:rPr>
-              <a:t>Three times, a natural-looking modelling shortcut produced a result that did not survive being corrected. One of them was a headline finding of an earlier draft of this work.</a:t>
-            </a:r>
-          </a:p>
-        </p:txBody>
-      </p:sp>
-    </p:spTree>
-  </p:cSld>
-  <p:clrMapOvr>
-    <a:masterClrMapping/>
-  </p:clrMapOvr>
-</p:sld>
-</file>
-
-<file path=ppt/slides/slide8.xml><?xml version="1.0" encoding="utf-8"?>
-<p:sld xmlns:a="http://schemas.openxmlformats.org/drawingml/2006/main" xmlns:p="http://schemas.openxmlformats.org/presentationml/2006/main" xmlns:r="http://schemas.openxmlformats.org/officeDocument/2006/relationships">
-  <p:cSld>
-    <p:spTree>
-      <p:nvGrpSpPr>
-        <p:cNvPr id="1" name=""/>
-        <p:cNvGrpSpPr/>
-        <p:nvPr/>
-      </p:nvGrpSpPr>
-      <p:grpSpPr/>
-      <p:sp>
-        <p:nvSpPr>
-          <p:cNvPr id="2" name="TextBox 1"/>
-          <p:cNvSpPr txBox="1"/>
-          <p:nvPr/>
-        </p:nvSpPr>
-        <p:spPr>
-          <a:xfrm>
-            <a:off x="822960" y="502920"/>
-            <a:ext cx="10545775" cy="274320"/>
-          </a:xfrm>
-          <a:prstGeom prst="rect">
-            <a:avLst/>
-          </a:prstGeom>
-          <a:noFill/>
-        </p:spPr>
-        <p:txBody>
-          <a:bodyPr wrap="square">
-            <a:spAutoFit/>
-          </a:bodyPr>
-          <a:lstStyle/>
-          <a:p>
-            <a:pPr algn="l">
-              <a:lnSpc>
-                <a:spcPct val="125000"/>
-              </a:lnSpc>
-              <a:spcAft>
-                <a:spcPts val="600"/>
-              </a:spcAft>
-            </a:pPr>
-            <a:r>
-              <a:rPr sz="1100" b="1">
-                <a:solidFill>
-                  <a:srgbClr val="8A8980"/>
-                </a:solidFill>
-                <a:latin typeface="Calibri"/>
-              </a:rPr>
-              <a:t>SHORTCUT 1 · THE EXPENSIVE ONE</a:t>
-            </a:r>
-          </a:p>
-        </p:txBody>
-      </p:sp>
-      <p:sp>
-        <p:nvSpPr>
-          <p:cNvPr id="3" name="TextBox 2"/>
-          <p:cNvSpPr txBox="1"/>
-          <p:nvPr/>
-        </p:nvSpPr>
-        <p:spPr>
-          <a:xfrm>
-            <a:off x="822960" y="813816"/>
-            <a:ext cx="10545775" cy="640080"/>
-          </a:xfrm>
-          <a:prstGeom prst="rect">
-            <a:avLst/>
-          </a:prstGeom>
-          <a:noFill/>
-        </p:spPr>
-        <p:txBody>
-          <a:bodyPr wrap="square">
-            <a:spAutoFit/>
-          </a:bodyPr>
-          <a:lstStyle/>
-          <a:p>
-            <a:pPr algn="l">
-              <a:lnSpc>
-                <a:spcPct val="125000"/>
-              </a:lnSpc>
-              <a:spcAft>
-                <a:spcPts val="600"/>
-              </a:spcAft>
-            </a:pPr>
-            <a:r>
-              <a:rPr sz="3000" b="1">
-                <a:solidFill>
-                  <a:srgbClr val="1A1A19"/>
-                </a:solidFill>
-                <a:latin typeface="Calibri"/>
-              </a:rPr>
-              <a:t>The scheduler was filling the uplink transport block</a:t>
-            </a:r>
-          </a:p>
-        </p:txBody>
-      </p:sp>
-      <p:sp>
-        <p:nvSpPr>
-          <p:cNvPr id="4" name="Rectangle 3"/>
-          <p:cNvSpPr/>
-          <p:nvPr/>
-        </p:nvSpPr>
-        <p:spPr>
-          <a:xfrm>
-            <a:off x="822960" y="1481328"/>
-            <a:ext cx="10545775" cy="15875"/>
-          </a:xfrm>
-          <a:prstGeom prst="rect">
-            <a:avLst/>
-          </a:prstGeom>
-          <a:solidFill>
-            <a:srgbClr val="DDDCD6"/>
-          </a:solidFill>
-          <a:ln>
-            <a:noFill/>
-          </a:ln>
-          <a:effectLst/>
-        </p:spPr>
-        <p:style>
-          <a:lnRef idx="1">
-            <a:schemeClr val="accent1"/>
-          </a:lnRef>
-          <a:fillRef idx="3">
-            <a:schemeClr val="accent1"/>
-          </a:fillRef>
-          <a:effectRef idx="2">
-            <a:schemeClr val="accent1"/>
-          </a:effectRef>
-          <a:fontRef idx="minor">
-            <a:schemeClr val="lt1"/>
-          </a:fontRef>
-        </p:style>
-        <p:txBody>
-          <a:bodyPr rtlCol="0" anchor="ctr"/>
-          <a:lstStyle/>
-          <a:p>
-            <a:pPr algn="ctr"/>
-          </a:p>
-        </p:txBody>
-      </p:sp>
-      <p:sp>
-        <p:nvSpPr>
-          <p:cNvPr id="5" name="TextBox 4"/>
-          <p:cNvSpPr txBox="1"/>
-          <p:nvPr/>
-        </p:nvSpPr>
-        <p:spPr>
-          <a:xfrm>
-            <a:off x="822960" y="1737360"/>
-            <a:ext cx="10545775" cy="731520"/>
-          </a:xfrm>
-          <a:prstGeom prst="rect">
-            <a:avLst/>
-          </a:prstGeom>
-          <a:noFill/>
-        </p:spPr>
-        <p:txBody>
-          <a:bodyPr wrap="square">
-            <a:spAutoFit/>
-          </a:bodyPr>
-          <a:lstStyle/>
-          <a:p>
-            <a:pPr algn="l">
-              <a:lnSpc>
-                <a:spcPct val="125000"/>
-              </a:lnSpc>
-              <a:spcAft>
-                <a:spcPts val="600"/>
-              </a:spcAft>
-            </a:pPr>
-            <a:r>
-              <a:rPr sz="1700" b="0">
-                <a:solidFill>
-                  <a:srgbClr val="5C5B54"/>
-                </a:solidFill>
-                <a:latin typeface="Calibri"/>
-              </a:rPr>
-              <a:t>Our multiplexer was direction-agnostic — the same code split a UE's transport block in both directions, ordering flows by the </a:t>
-            </a:r>
-            <a:r>
-              <a:rPr sz="1700" b="1">
-                <a:solidFill>
-                  <a:srgbClr val="5C5B54"/>
-                </a:solidFill>
-                <a:latin typeface="Calibri"/>
-              </a:rPr>
-              <a:t>gNB's own virtual queues.</a:t>
-            </a:r>
-            <a:r>
-              <a:rPr sz="1700" b="0">
-                <a:solidFill>
-                  <a:srgbClr val="5C5B54"/>
-                </a:solidFill>
-                <a:latin typeface="Calibri"/>
-              </a:rPr>
-              <a:t> In the uplink no gNB may do that.</a:t>
-            </a:r>
-          </a:p>
-        </p:txBody>
-      </p:sp>
-      <p:graphicFrame>
-        <p:nvGraphicFramePr>
-          <p:cNvPr id="6" name="Table 5"/>
-          <p:cNvGraphicFramePr>
-            <a:graphicFrameLocks noGrp="1"/>
-          </p:cNvGraphicFramePr>
-          <p:nvPr/>
-        </p:nvGraphicFramePr>
-        <p:xfrm>
-          <a:off x="822960" y="2697480"/>
-          <a:ext cx="8778237" cy="932688"/>
-        </p:xfrm>
-        <a:graphic>
-          <a:graphicData uri="http://schemas.openxmlformats.org/drawingml/2006/table">
-            <a:tbl>
-              <a:tblPr firstRow="1" bandRow="1">
-                <a:tableStyleId>{5C22544A-7EE6-4342-B048-85BDC9FD1C3A}</a:tableStyleId>
-              </a:tblPr>
-              <a:tblGrid>
-                <a:gridCol w="4482505"/>
-                <a:gridCol w="933855"/>
-                <a:gridCol w="933855"/>
-                <a:gridCol w="1214011"/>
-                <a:gridCol w="1214011"/>
-              </a:tblGrid>
-              <a:tr h="310896">
-                <a:tc>
-                  <a:txBody>
-                    <a:bodyPr/>
-                    <a:lstStyle/>
-                    <a:p>
-                      <a:pPr algn="l"/>
-                      <a:r>
-                        <a:rPr sz="1500" b="1">
-                          <a:solidFill>
-                            <a:srgbClr val="1A1A19"/>
-                          </a:solidFill>
-                          <a:latin typeface="Calibri"/>
-                        </a:rPr>
-                        <a:t>Mixed-flow UE (GBR video + best-effort)</a:t>
-                      </a:r>
-                    </a:p>
-                  </a:txBody>
-                  <a:tcPr marL="82296" marT="27432" marB="27432">
-                    <a:solidFill>
-                      <a:srgbClr val="F5F4F0"/>
-                    </a:solidFill>
-                  </a:tcPr>
-                </a:tc>
-                <a:tc>
-                  <a:txBody>
-                    <a:bodyPr/>
-                    <a:lstStyle/>
-                    <a:p>
-                      <a:pPr algn="r"/>
-                      <a:r>
-                        <a:rPr sz="1500" b="1">
-                          <a:solidFill>
-                            <a:srgbClr val="1A1A19"/>
-                          </a:solidFill>
-                          <a:latin typeface="Calibri"/>
-                        </a:rPr>
-                        <a:t>RR</a:t>
-                      </a:r>
-                    </a:p>
-                  </a:txBody>
-                  <a:tcPr marL="82296" marT="27432" marB="27432">
-                    <a:solidFill>
-                      <a:srgbClr val="F5F4F0"/>
-                    </a:solidFill>
-                  </a:tcPr>
-                </a:tc>
-                <a:tc>
-                  <a:txBody>
-                    <a:bodyPr/>
-                    <a:lstStyle/>
-                    <a:p>
-                      <a:pPr algn="r"/>
-                      <a:r>
-                        <a:rPr sz="1500" b="1">
-                          <a:solidFill>
-                            <a:srgbClr val="1A1A19"/>
-                          </a:solidFill>
-                          <a:latin typeface="Calibri"/>
-                        </a:rPr>
-                        <a:t>PF</a:t>
-                      </a:r>
-                    </a:p>
-                  </a:txBody>
-                  <a:tcPr marL="82296" marT="27432" marB="27432">
-                    <a:solidFill>
-                      <a:srgbClr val="F5F4F0"/>
-                    </a:solidFill>
-                  </a:tcPr>
-                </a:tc>
-                <a:tc>
-                  <a:txBody>
-                    <a:bodyPr/>
-                    <a:lstStyle/>
-                    <a:p>
-                      <a:pPr algn="r"/>
-                      <a:r>
-                        <a:rPr sz="1500" b="1">
-                          <a:solidFill>
-                            <a:srgbClr val="1A1A19"/>
-                          </a:solidFill>
-                          <a:latin typeface="Calibri"/>
-                        </a:rPr>
-                        <a:t>Gradient</a:t>
-                      </a:r>
-                    </a:p>
-                  </a:txBody>
-                  <a:tcPr marL="82296" marT="27432" marB="27432">
-                    <a:solidFill>
-                      <a:srgbClr val="F5F4F0"/>
-                    </a:solidFill>
-                  </a:tcPr>
-                </a:tc>
-                <a:tc>
-                  <a:txBody>
-                    <a:bodyPr/>
-                    <a:lstStyle/>
-                    <a:p>
-                      <a:pPr algn="r"/>
-                      <a:r>
-                        <a:rPr sz="1500" b="1">
-                          <a:solidFill>
-                            <a:srgbClr val="1A1A19"/>
-                          </a:solidFill>
-                          <a:latin typeface="Calibri"/>
-                        </a:rPr>
-                        <a:t>Two-tier</a:t>
-                      </a:r>
-                    </a:p>
-                  </a:txBody>
-                  <a:tcPr marL="82296" marT="27432" marB="27432">
-                    <a:solidFill>
-                      <a:srgbClr val="F5F4F0"/>
-                    </a:solidFill>
-                  </a:tcPr>
-                </a:tc>
-              </a:tr>
-              <a:tr h="310896">
-                <a:tc>
-                  <a:txBody>
-                    <a:bodyPr/>
-                    <a:lstStyle/>
-                    <a:p>
-                      <a:pPr algn="l"/>
-                      <a:r>
-                        <a:rPr sz="1500" b="0">
-                          <a:solidFill>
-                            <a:srgbClr val="5C5B54"/>
-                          </a:solidFill>
-                          <a:latin typeface="Calibri"/>
-                        </a:rPr>
-                        <a:t>Scheduler fills the block  (what we had)</a:t>
-                      </a:r>
-                    </a:p>
-                  </a:txBody>
-                  <a:tcPr marL="82296" marT="27432" marB="27432">
-                    <a:solidFill>
-                      <a:srgbClr val="FFFFFF"/>
-                    </a:solidFill>
-                  </a:tcPr>
-                </a:tc>
-                <a:tc>
-                  <a:txBody>
-                    <a:bodyPr/>
-                    <a:lstStyle/>
-                    <a:p>
-                      <a:pPr algn="r"/>
-                      <a:r>
-                        <a:rPr sz="1500" b="0">
-                          <a:solidFill>
-                            <a:srgbClr val="5C5B54"/>
-                          </a:solidFill>
-                          <a:latin typeface="Calibri"/>
-                        </a:rPr>
-                        <a:t>3%</a:t>
-                      </a:r>
-                    </a:p>
-                  </a:txBody>
-                  <a:tcPr marL="82296" marT="27432" marB="27432">
-                    <a:solidFill>
-                      <a:srgbClr val="FFFFFF"/>
-                    </a:solidFill>
-                  </a:tcPr>
-                </a:tc>
-                <a:tc>
-                  <a:txBody>
-                    <a:bodyPr/>
-                    <a:lstStyle/>
-                    <a:p>
-                      <a:pPr algn="r"/>
-                      <a:r>
-                        <a:rPr sz="1500" b="0">
-                          <a:solidFill>
-                            <a:srgbClr val="5C5B54"/>
-                          </a:solidFill>
-                          <a:latin typeface="Calibri"/>
-                        </a:rPr>
-                        <a:t>3%</a:t>
-                      </a:r>
-                    </a:p>
-                  </a:txBody>
-                  <a:tcPr marL="82296" marT="27432" marB="27432">
-                    <a:solidFill>
-                      <a:srgbClr val="FFFFFF"/>
-                    </a:solidFill>
-                  </a:tcPr>
-                </a:tc>
-                <a:tc>
-                  <a:txBody>
-                    <a:bodyPr/>
-                    <a:lstStyle/>
-                    <a:p>
-                      <a:pPr algn="r"/>
-                      <a:r>
-                        <a:rPr sz="1500" b="0">
-                          <a:solidFill>
-                            <a:srgbClr val="5C5B54"/>
-                          </a:solidFill>
-                          <a:latin typeface="Calibri"/>
-                        </a:rPr>
-                        <a:t>3%</a:t>
-                      </a:r>
-                    </a:p>
-                  </a:txBody>
-                  <a:tcPr marL="82296" marT="27432" marB="27432">
-                    <a:solidFill>
-                      <a:srgbClr val="FFFFFF"/>
-                    </a:solidFill>
-                  </a:tcPr>
-                </a:tc>
-                <a:tc>
-                  <a:txBody>
-                    <a:bodyPr/>
-                    <a:lstStyle/>
-                    <a:p>
-                      <a:pPr algn="r"/>
-                      <a:r>
-                        <a:rPr sz="1500" b="0">
-                          <a:solidFill>
-                            <a:srgbClr val="EB6834"/>
-                          </a:solidFill>
-                          <a:latin typeface="Calibri"/>
-                        </a:rPr>
-                        <a:t>53%</a:t>
-                      </a:r>
-                    </a:p>
-                  </a:txBody>
-                  <a:tcPr marL="82296" marT="27432" marB="27432">
-                    <a:solidFill>
-                      <a:srgbClr val="FFFFFF"/>
-                    </a:solidFill>
-                  </a:tcPr>
-                </a:tc>
-              </a:tr>
-              <a:tr h="310896">
-                <a:tc>
-                  <a:txBody>
-                    <a:bodyPr/>
-                    <a:lstStyle/>
-                    <a:p>
-                      <a:pPr algn="l"/>
-                      <a:r>
-                        <a:rPr sz="1500" b="0">
-                          <a:solidFill>
-                            <a:srgbClr val="5C5B54"/>
-                          </a:solidFill>
-                          <a:latin typeface="Calibri"/>
-                        </a:rPr>
-                        <a:t>UE fills the block  (TS 38.321 §5.4.3.1)</a:t>
-                      </a:r>
-                    </a:p>
-                  </a:txBody>
-                  <a:tcPr marL="82296" marT="27432" marB="27432">
-                    <a:solidFill>
-                      <a:srgbClr val="FFFFFF"/>
-                    </a:solidFill>
-                  </a:tcPr>
-                </a:tc>
-                <a:tc>
-                  <a:txBody>
-                    <a:bodyPr/>
-                    <a:lstStyle/>
-                    <a:p>
-                      <a:pPr algn="r"/>
-                      <a:r>
-                        <a:rPr sz="1500" b="0">
-                          <a:solidFill>
-                            <a:srgbClr val="008300"/>
-                          </a:solidFill>
-                          <a:latin typeface="Calibri"/>
-                        </a:rPr>
-                        <a:t>100%</a:t>
-                      </a:r>
-                    </a:p>
-                  </a:txBody>
-                  <a:tcPr marL="82296" marT="27432" marB="27432">
-                    <a:solidFill>
-                      <a:srgbClr val="FFFFFF"/>
-                    </a:solidFill>
-                  </a:tcPr>
-                </a:tc>
-                <a:tc>
-                  <a:txBody>
-                    <a:bodyPr/>
-                    <a:lstStyle/>
-                    <a:p>
-                      <a:pPr algn="r"/>
-                      <a:r>
-                        <a:rPr sz="1500" b="0">
-                          <a:solidFill>
-                            <a:srgbClr val="008300"/>
-                          </a:solidFill>
-                          <a:latin typeface="Calibri"/>
-                        </a:rPr>
-                        <a:t>100%</a:t>
-                      </a:r>
-                    </a:p>
-                  </a:txBody>
-                  <a:tcPr marL="82296" marT="27432" marB="27432">
-                    <a:solidFill>
-                      <a:srgbClr val="FFFFFF"/>
-                    </a:solidFill>
-                  </a:tcPr>
-                </a:tc>
-                <a:tc>
-                  <a:txBody>
-                    <a:bodyPr/>
-                    <a:lstStyle/>
-                    <a:p>
-                      <a:pPr algn="r"/>
-                      <a:r>
-                        <a:rPr sz="1500" b="0">
-                          <a:solidFill>
-                            <a:srgbClr val="5C5B54"/>
-                          </a:solidFill>
-                          <a:latin typeface="Calibri"/>
-                        </a:rPr>
-                        <a:t>72%</a:t>
-                      </a:r>
-                    </a:p>
-                  </a:txBody>
-                  <a:tcPr marL="82296" marT="27432" marB="27432">
-                    <a:solidFill>
-                      <a:srgbClr val="FFFFFF"/>
-                    </a:solidFill>
-                  </a:tcPr>
-                </a:tc>
-                <a:tc>
-                  <a:txBody>
-                    <a:bodyPr/>
-                    <a:lstStyle/>
-                    <a:p>
-                      <a:pPr algn="r"/>
-                      <a:r>
-                        <a:rPr sz="1500" b="0">
-                          <a:solidFill>
-                            <a:srgbClr val="5C5B54"/>
-                          </a:solidFill>
-                          <a:latin typeface="Calibri"/>
-                        </a:rPr>
-                        <a:t>89%</a:t>
-                      </a:r>
-                    </a:p>
-                  </a:txBody>
-                  <a:tcPr marL="82296" marT="27432" marB="27432">
-                    <a:solidFill>
-                      <a:srgbClr val="FFFFFF"/>
-                    </a:solidFill>
-                  </a:tcPr>
-                </a:tc>
-              </a:tr>
-            </a:tbl>
-          </a:graphicData>
-        </a:graphic>
-      </p:graphicFrame>
-      <p:sp>
-        <p:nvSpPr>
-          <p:cNvPr id="7" name="Rectangle 6"/>
-          <p:cNvSpPr/>
-          <p:nvPr/>
-        </p:nvSpPr>
-        <p:spPr>
-          <a:xfrm>
-            <a:off x="822960" y="4114800"/>
-            <a:ext cx="10545775" cy="1417320"/>
-          </a:xfrm>
-          <a:prstGeom prst="rect">
-            <a:avLst/>
-          </a:prstGeom>
-          <a:solidFill>
-            <a:srgbClr val="F5F4F0"/>
-          </a:solidFill>
-          <a:ln>
-            <a:noFill/>
-          </a:ln>
-          <a:effectLst/>
-        </p:spPr>
-        <p:style>
-          <a:lnRef idx="1">
-            <a:schemeClr val="accent1"/>
-          </a:lnRef>
-          <a:fillRef idx="3">
-            <a:schemeClr val="accent1"/>
-          </a:fillRef>
-          <a:effectRef idx="2">
-            <a:schemeClr val="accent1"/>
-          </a:effectRef>
-          <a:fontRef idx="minor">
-            <a:schemeClr val="lt1"/>
-          </a:fontRef>
-        </p:style>
-        <p:txBody>
-          <a:bodyPr rtlCol="0" anchor="ctr"/>
-          <a:lstStyle/>
-          <a:p>
-            <a:pPr algn="ctr"/>
-          </a:p>
-        </p:txBody>
-      </p:sp>
-      <p:sp>
-        <p:nvSpPr>
-          <p:cNvPr id="8" name="Rectangle 7"/>
-          <p:cNvSpPr/>
-          <p:nvPr/>
-        </p:nvSpPr>
-        <p:spPr>
-          <a:xfrm>
-            <a:off x="822960" y="4114800"/>
-            <a:ext cx="50800" cy="1417320"/>
-          </a:xfrm>
-          <a:prstGeom prst="rect">
-            <a:avLst/>
-          </a:prstGeom>
-          <a:solidFill>
-            <a:srgbClr val="E34948"/>
-          </a:solidFill>
-          <a:ln>
-            <a:noFill/>
-          </a:ln>
-          <a:effectLst/>
-        </p:spPr>
-        <p:style>
-          <a:lnRef idx="1">
-            <a:schemeClr val="accent1"/>
-          </a:lnRef>
-          <a:fillRef idx="3">
-            <a:schemeClr val="accent1"/>
-          </a:fillRef>
-          <a:effectRef idx="2">
-            <a:schemeClr val="accent1"/>
-          </a:effectRef>
-          <a:fontRef idx="minor">
-            <a:schemeClr val="lt1"/>
-          </a:fontRef>
-        </p:style>
-        <p:txBody>
-          <a:bodyPr rtlCol="0" anchor="ctr"/>
-          <a:lstStyle/>
-          <a:p>
-            <a:pPr algn="ctr"/>
-          </a:p>
-        </p:txBody>
-      </p:sp>
-      <p:sp>
-        <p:nvSpPr>
-          <p:cNvPr id="9" name="TextBox 8"/>
-          <p:cNvSpPr txBox="1"/>
-          <p:nvPr/>
-        </p:nvSpPr>
-        <p:spPr>
-          <a:xfrm>
-            <a:off x="1051560" y="4242816"/>
-            <a:ext cx="10088575" cy="1161288"/>
-          </a:xfrm>
-          <a:prstGeom prst="rect">
-            <a:avLst/>
-          </a:prstGeom>
-          <a:noFill/>
-        </p:spPr>
-        <p:txBody>
-          <a:bodyPr wrap="square">
-            <a:spAutoFit/>
-          </a:bodyPr>
-          <a:lstStyle/>
-          <a:p>
-            <a:pPr algn="l">
-              <a:lnSpc>
-                <a:spcPct val="125000"/>
-              </a:lnSpc>
-              <a:spcAft>
-                <a:spcPts val="600"/>
-              </a:spcAft>
-            </a:pPr>
-            <a:r>
-              <a:rPr sz="1600" b="0">
-                <a:solidFill>
-                  <a:srgbClr val="1A1A19"/>
-                </a:solidFill>
-                <a:latin typeface="Calibri"/>
-              </a:rPr>
-              <a:t>We had described the top row as a clean demonstration of QoS-aware multiplexing. </a:t>
-            </a:r>
-            <a:r>
-              <a:rPr sz="1600" b="1">
-                <a:solidFill>
-                  <a:srgbClr val="1A1A19"/>
-                </a:solidFill>
-                <a:latin typeface="Calibri"/>
-              </a:rPr>
-              <a:t>It was the UE's prioritised-bit-rate configuration all along</a:t>
-            </a:r>
-            <a:r>
-              <a:rPr sz="1600" b="0">
-                <a:solidFill>
-                  <a:srgbClr val="1A1A19"/>
-                </a:solidFill>
-                <a:latin typeface="Calibri"/>
-              </a:rPr>
-              <a:t> — available to every scheduler. Correcting it also raised PF's contract count at 0.50x load from 5/10 to 8/10.</a:t>
-            </a:r>
-          </a:p>
-        </p:txBody>
-      </p:sp>
-      <p:sp>
-        <p:nvSpPr>
-          <p:cNvPr id="10" name="TextBox 9"/>
-          <p:cNvSpPr txBox="1"/>
-          <p:nvPr/>
-        </p:nvSpPr>
-        <p:spPr>
-          <a:xfrm>
-            <a:off x="822960" y="5715000"/>
-            <a:ext cx="10545775" cy="457200"/>
-          </a:xfrm>
-          <a:prstGeom prst="rect">
-            <a:avLst/>
-          </a:prstGeom>
-          <a:noFill/>
-        </p:spPr>
-        <p:txBody>
-          <a:bodyPr wrap="square">
-            <a:spAutoFit/>
-          </a:bodyPr>
-          <a:lstStyle/>
-          <a:p>
-            <a:pPr algn="l">
-              <a:lnSpc>
-                <a:spcPct val="125000"/>
-              </a:lnSpc>
-              <a:spcAft>
-                <a:spcPts val="600"/>
-              </a:spcAft>
-            </a:pPr>
-            <a:r>
-              <a:rPr sz="1500" b="0">
-                <a:solidFill>
-                  <a:srgbClr val="8A8980"/>
-                </a:solidFill>
-                <a:latin typeface="Calibri"/>
-              </a:rPr>
-              <a:t>The gNB grants a block; the UE splits it by its own logical-channel prioritisation. The gNB configures the PBRs but never learns the split.</a:t>
-            </a:r>
-          </a:p>
-        </p:txBody>
-      </p:sp>
-    </p:spTree>
-  </p:cSld>
-  <p:clrMapOvr>
-    <a:masterClrMapping/>
-  </p:clrMapOvr>
-</p:sld>
-</file>
-
-<file path=ppt/slides/slide9.xml><?xml version="1.0" encoding="utf-8"?>
-<p:sld xmlns:a="http://schemas.openxmlformats.org/drawingml/2006/main" xmlns:p="http://schemas.openxmlformats.org/presentationml/2006/main" xmlns:r="http://schemas.openxmlformats.org/officeDocument/2006/relationships">
-  <p:cSld>
-    <p:spTree>
-      <p:nvGrpSpPr>
-        <p:cNvPr id="1" name=""/>
-        <p:cNvGrpSpPr/>
-        <p:nvPr/>
-      </p:nvGrpSpPr>
-      <p:grpSpPr/>
-      <p:sp>
-        <p:nvSpPr>
-          <p:cNvPr id="2" name="TextBox 1"/>
-          <p:cNvSpPr txBox="1"/>
-          <p:nvPr/>
-        </p:nvSpPr>
-        <p:spPr>
-          <a:xfrm>
-            <a:off x="822960" y="502920"/>
-            <a:ext cx="10545775" cy="274320"/>
-          </a:xfrm>
-          <a:prstGeom prst="rect">
-            <a:avLst/>
-          </a:prstGeom>
-          <a:noFill/>
-        </p:spPr>
-        <p:txBody>
-          <a:bodyPr wrap="square">
-            <a:spAutoFit/>
-          </a:bodyPr>
-          <a:lstStyle/>
-          <a:p>
-            <a:pPr algn="l">
-              <a:lnSpc>
-                <a:spcPct val="125000"/>
-              </a:lnSpc>
-              <a:spcAft>
-                <a:spcPts val="600"/>
-              </a:spcAft>
-            </a:pPr>
-            <a:r>
-              <a:rPr sz="1100" b="1">
-                <a:solidFill>
-                  <a:srgbClr val="8A8980"/>
-                </a:solidFill>
-                <a:latin typeface="Calibri"/>
-              </a:rPr>
-              <a:t>SHORTCUTS 2 AND 3</a:t>
-            </a:r>
-          </a:p>
-        </p:txBody>
-      </p:sp>
-      <p:sp>
-        <p:nvSpPr>
-          <p:cNvPr id="3" name="TextBox 2"/>
-          <p:cNvSpPr txBox="1"/>
-          <p:nvPr/>
-        </p:nvSpPr>
-        <p:spPr>
-          <a:xfrm>
-            <a:off x="822960" y="813816"/>
-            <a:ext cx="10545775" cy="640080"/>
-          </a:xfrm>
-          <a:prstGeom prst="rect">
-            <a:avLst/>
-          </a:prstGeom>
-          <a:noFill/>
-        </p:spPr>
-        <p:txBody>
-          <a:bodyPr wrap="square">
-            <a:spAutoFit/>
-          </a:bodyPr>
-          <a:lstStyle/>
-          <a:p>
-            <a:pPr algn="l">
-              <a:lnSpc>
-                <a:spcPct val="125000"/>
-              </a:lnSpc>
-              <a:spcAft>
-                <a:spcPts val="600"/>
-              </a:spcAft>
-            </a:pPr>
-            <a:r>
-              <a:rPr sz="3000" b="1">
-                <a:solidFill>
-                  <a:srgbClr val="1A1A19"/>
-                </a:solidFill>
-                <a:latin typeface="Calibri"/>
-              </a:rPr>
-              <a:t>Two more, and what they have in common</a:t>
-            </a:r>
-          </a:p>
-        </p:txBody>
-      </p:sp>
-      <p:sp>
-        <p:nvSpPr>
-          <p:cNvPr id="4" name="Rectangle 3"/>
-          <p:cNvSpPr/>
-          <p:nvPr/>
-        </p:nvSpPr>
-        <p:spPr>
-          <a:xfrm>
-            <a:off x="822960" y="1481328"/>
-            <a:ext cx="10545775" cy="15875"/>
-          </a:xfrm>
-          <a:prstGeom prst="rect">
-            <a:avLst/>
-          </a:prstGeom>
-          <a:solidFill>
-            <a:srgbClr val="DDDCD6"/>
-          </a:solidFill>
-          <a:ln>
-            <a:noFill/>
-          </a:ln>
-          <a:effectLst/>
-        </p:spPr>
-        <p:style>
-          <a:lnRef idx="1">
-            <a:schemeClr val="accent1"/>
-          </a:lnRef>
-          <a:fillRef idx="3">
-            <a:schemeClr val="accent1"/>
-          </a:fillRef>
-          <a:effectRef idx="2">
-            <a:schemeClr val="accent1"/>
-          </a:effectRef>
-          <a:fontRef idx="minor">
-            <a:schemeClr val="lt1"/>
-          </a:fontRef>
-        </p:style>
-        <p:txBody>
-          <a:bodyPr rtlCol="0" anchor="ctr"/>
-          <a:lstStyle/>
-          <a:p>
-            <a:pPr algn="ctr"/>
-          </a:p>
-        </p:txBody>
-      </p:sp>
-      <p:sp>
-        <p:nvSpPr>
-          <p:cNvPr id="5" name="TextBox 4"/>
-          <p:cNvSpPr txBox="1"/>
-          <p:nvPr/>
-        </p:nvSpPr>
-        <p:spPr>
-          <a:xfrm>
-            <a:off x="822960" y="1737360"/>
-            <a:ext cx="5394960" cy="2377440"/>
-          </a:xfrm>
-          <a:prstGeom prst="rect">
-            <a:avLst/>
-          </a:prstGeom>
-          <a:noFill/>
-        </p:spPr>
-        <p:txBody>
-          <a:bodyPr wrap="square">
-            <a:spAutoFit/>
-          </a:bodyPr>
-          <a:lstStyle/>
-          <a:p>
-            <a:pPr algn="l">
-              <a:lnSpc>
-                <a:spcPct val="125000"/>
-              </a:lnSpc>
-              <a:spcAft>
-                <a:spcPts val="600"/>
-              </a:spcAft>
-            </a:pPr>
-            <a:r>
-              <a:rPr sz="1800" b="1">
-                <a:solidFill>
-                  <a:srgbClr val="EB6834"/>
-                </a:solidFill>
-                <a:latin typeface="Calibri"/>
-              </a:rPr>
-              <a:t>Flows shared a priority level</a:t>
-            </a:r>
-          </a:p>
-          <a:p>
-            <a:pPr algn="l">
-              <a:lnSpc>
-                <a:spcPct val="125000"/>
-              </a:lnSpc>
-              <a:spcAft>
-                <a:spcPts val="600"/>
-              </a:spcAft>
-            </a:pPr>
-            <a:r>
-              <a:rPr sz="1600" b="0">
-                <a:solidFill>
-                  <a:srgbClr val="5C5B54"/>
-                </a:solidFill>
-                <a:latin typeface="Calibri"/>
-              </a:rPr>
-              <a:t>With every flow at one priority, the multiplexer's sort silently fell back to the order flows appear in the config file. Results were reproducible only by accident.</a:t>
-            </a:r>
-          </a:p>
-          <a:p>
-            <a:pPr algn="l">
-              <a:lnSpc>
-                <a:spcPct val="125000"/>
-              </a:lnSpc>
-              <a:spcAft>
-                <a:spcPts val="600"/>
-              </a:spcAft>
-            </a:pPr>
-            <a:r>
-              <a:rPr sz="1600" b="0">
-                <a:solidFill>
-                  <a:srgbClr val="8A8980"/>
-                </a:solidFill>
-                <a:latin typeface="Calibri"/>
-              </a:rPr>
-              <a:t>Deriving priority from the standardised 5QI fixed it — and the numbers did not change, which is exactly why this class of error survives testing.</a:t>
-            </a:r>
-          </a:p>
-        </p:txBody>
-      </p:sp>
-      <p:sp>
-        <p:nvSpPr>
-          <p:cNvPr id="6" name="TextBox 5"/>
-          <p:cNvSpPr txBox="1"/>
-          <p:nvPr/>
-        </p:nvSpPr>
-        <p:spPr>
-          <a:xfrm>
-            <a:off x="6492240" y="1737360"/>
-            <a:ext cx="4846320" cy="2377440"/>
-          </a:xfrm>
-          <a:prstGeom prst="rect">
-            <a:avLst/>
-          </a:prstGeom>
-          <a:noFill/>
-        </p:spPr>
-        <p:txBody>
-          <a:bodyPr wrap="square">
-            <a:spAutoFit/>
-          </a:bodyPr>
-          <a:lstStyle/>
-          <a:p>
-            <a:pPr algn="l">
-              <a:lnSpc>
-                <a:spcPct val="125000"/>
-              </a:lnSpc>
-              <a:spcAft>
-                <a:spcPts val="600"/>
-              </a:spcAft>
-            </a:pPr>
-            <a:r>
-              <a:rPr sz="1800" b="1">
-                <a:solidFill>
-                  <a:srgbClr val="EB6834"/>
-                </a:solidFill>
-                <a:latin typeface="Calibri"/>
-              </a:rPr>
-              <a:t>Tier-1 was handed the true offered load</a:t>
-            </a:r>
-          </a:p>
-          <a:p>
-            <a:pPr algn="l">
-              <a:lnSpc>
-                <a:spcPct val="125000"/>
-              </a:lnSpc>
-              <a:spcAft>
-                <a:spcPts val="600"/>
-              </a:spcAft>
-            </a:pPr>
-            <a:r>
-              <a:rPr sz="1600" b="0">
-                <a:solidFill>
-                  <a:srgbClr val="5C5B54"/>
-                </a:solidFill>
-                <a:latin typeface="Calibri"/>
-              </a:rPr>
-              <a:t>Read straight from the traffic generator: exact, noise-free, static. No gNB has that.</a:t>
-            </a:r>
-          </a:p>
-          <a:p>
-            <a:pPr algn="l">
-              <a:lnSpc>
-                <a:spcPct val="125000"/>
-              </a:lnSpc>
-              <a:spcAft>
-                <a:spcPts val="600"/>
-              </a:spcAft>
-            </a:pPr>
-            <a:r>
-              <a:rPr sz="1600" b="0">
-                <a:solidFill>
-                  <a:srgbClr val="8A8980"/>
-                </a:solidFill>
-                <a:latin typeface="Calibri"/>
-              </a:rPr>
-              <a:t>Estimating it instead produced a starvation lock-in — a starved flow's data ages out, so it stops appearing in the arrival count. The flow never stopped asking; we stopped counting.</a:t>
-            </a:r>
-          </a:p>
-        </p:txBody>
-      </p:sp>
-      <p:sp>
-        <p:nvSpPr>
-          <p:cNvPr id="7" name="Rectangle 6"/>
-          <p:cNvSpPr/>
-          <p:nvPr/>
-        </p:nvSpPr>
-        <p:spPr>
-          <a:xfrm>
-            <a:off x="822960" y="4206240"/>
-            <a:ext cx="10545775" cy="1965960"/>
-          </a:xfrm>
-          <a:prstGeom prst="rect">
-            <a:avLst/>
-          </a:prstGeom>
-          <a:solidFill>
-            <a:srgbClr val="F5F4F0"/>
-          </a:solidFill>
-          <a:ln>
-            <a:noFill/>
-          </a:ln>
-          <a:effectLst/>
-        </p:spPr>
-        <p:style>
-          <a:lnRef idx="1">
-            <a:schemeClr val="accent1"/>
-          </a:lnRef>
-          <a:fillRef idx="3">
-            <a:schemeClr val="accent1"/>
-          </a:fillRef>
-          <a:effectRef idx="2">
-            <a:schemeClr val="accent1"/>
-          </a:effectRef>
-          <a:fontRef idx="minor">
-            <a:schemeClr val="lt1"/>
-          </a:fontRef>
-        </p:style>
-        <p:txBody>
-          <a:bodyPr rtlCol="0" anchor="ctr"/>
-          <a:lstStyle/>
-          <a:p>
-            <a:pPr algn="ctr"/>
-          </a:p>
-        </p:txBody>
-      </p:sp>
-      <p:sp>
-        <p:nvSpPr>
-          <p:cNvPr id="8" name="Rectangle 7"/>
-          <p:cNvSpPr/>
-          <p:nvPr/>
-        </p:nvSpPr>
-        <p:spPr>
-          <a:xfrm>
-            <a:off x="822960" y="4206240"/>
-            <a:ext cx="50800" cy="1965960"/>
-          </a:xfrm>
-          <a:prstGeom prst="rect">
-            <a:avLst/>
-          </a:prstGeom>
-          <a:solidFill>
-            <a:srgbClr val="EB6834"/>
-          </a:solidFill>
-          <a:ln>
-            <a:noFill/>
-          </a:ln>
-          <a:effectLst/>
-        </p:spPr>
-        <p:style>
-          <a:lnRef idx="1">
-            <a:schemeClr val="accent1"/>
-          </a:lnRef>
-          <a:fillRef idx="3">
-            <a:schemeClr val="accent1"/>
-          </a:fillRef>
-          <a:effectRef idx="2">
-            <a:schemeClr val="accent1"/>
-          </a:effectRef>
-          <a:fontRef idx="minor">
-            <a:schemeClr val="lt1"/>
-          </a:fontRef>
-        </p:style>
-        <p:txBody>
-          <a:bodyPr rtlCol="0" anchor="ctr"/>
-          <a:lstStyle/>
-          <a:p>
-            <a:pPr algn="ctr"/>
-          </a:p>
-        </p:txBody>
-      </p:sp>
-      <p:sp>
-        <p:nvSpPr>
-          <p:cNvPr id="9" name="TextBox 8"/>
-          <p:cNvSpPr txBox="1"/>
-          <p:nvPr/>
-        </p:nvSpPr>
-        <p:spPr>
-          <a:xfrm>
-            <a:off x="1051560" y="4334256"/>
-            <a:ext cx="10088575" cy="1709928"/>
-          </a:xfrm>
-          <a:prstGeom prst="rect">
-            <a:avLst/>
-          </a:prstGeom>
-          <a:noFill/>
-        </p:spPr>
-        <p:txBody>
-          <a:bodyPr wrap="square">
-            <a:spAutoFit/>
-          </a:bodyPr>
-          <a:lstStyle/>
-          <a:p>
-            <a:pPr algn="l">
-              <a:lnSpc>
-                <a:spcPct val="125000"/>
-              </a:lnSpc>
-              <a:spcAft>
-                <a:spcPts val="600"/>
-              </a:spcAft>
-            </a:pPr>
-            <a:r>
-              <a:rPr sz="1600" b="0">
-                <a:solidFill>
-                  <a:srgbClr val="1A1A19"/>
-                </a:solidFill>
-                <a:latin typeface="Calibri"/>
-              </a:rPr>
-              <a:t>All three gave the scheduler information or authority the 3GPP split does not grant it. </a:t>
-            </a:r>
-            <a:r>
-              <a:rPr sz="1600" b="1">
-                <a:solidFill>
-                  <a:srgbClr val="1A1A19"/>
-                </a:solidFill>
-                <a:latin typeface="Calibri"/>
-              </a:rPr>
-              <a:t>All three flattered the scheduler, not the baselines</a:t>
-            </a:r>
-            <a:r>
-              <a:rPr sz="1600" b="0">
-                <a:solidFill>
-                  <a:srgbClr val="1A1A19"/>
-                </a:solidFill>
-                <a:latin typeface="Calibri"/>
-              </a:rPr>
-              <a:t> — which is not coincidence: a simulator is written from the scheduler's point of view, so its conveniences accrue there.
-The check we now apply: for every quantity the scheduler reads — </a:t>
-            </a:r>
-            <a:r>
-              <a:rPr sz="1600" b="1">
-                <a:solidFill>
-                  <a:srgbClr val="1A1A19"/>
-                </a:solidFill>
-                <a:latin typeface="Calibri"/>
-              </a:rPr>
-              <a:t>which network element learns this, and how?</a:t>
+              <a:t>A threshold count rewards concentrating the shortfall; the max-min floor spreads it, and α picks between them. This deep into overload the operator's real lever is admission control.</a:t>
             </a:r>
           </a:p>
         </p:txBody>

--- a/deck/two-tier-scheduler.pptx
+++ b/deck/two-tier-scheduler.pptx
@@ -6207,7 +6207,7 @@
         <p:spPr>
           <a:xfrm>
             <a:off x="822960" y="1664208"/>
-            <a:ext cx="5760720" cy="352424"/>
+            <a:ext cx="5760720" cy="628650"/>
           </a:xfrm>
           <a:prstGeom prst="rect">
             <a:avLst/>
@@ -6235,186 +6235,35 @@
                 </a:solidFill>
                 <a:latin typeface="Calibri"/>
               </a:rPr>
-              <a:t>Rates r_i ≥ 0, slacks s ≥ 0, one feasible set F(floor):</a:t>
-            </a:r>
-          </a:p>
-        </p:txBody>
-      </p:sp>
-      <p:sp>
-        <p:nvSpPr>
-          <p:cNvPr id="6" name="TextBox 5"/>
-          <p:cNvSpPr txBox="1"/>
+              <a:t>Decision variables are a target rate per flow and the shortfall slacks. All solves share one feasible set:</a:t>
+            </a:r>
+          </a:p>
+        </p:txBody>
+      </p:sp>
+      <p:pic>
+        <p:nvPicPr>
+          <p:cNvPr id="6" name="Picture 5" descr="eq-f50d6a4aa5749e1a.png"/>
+          <p:cNvPicPr>
+            <a:picLocks noChangeAspect="1"/>
+          </p:cNvPicPr>
           <p:nvPr/>
-        </p:nvSpPr>
-        <p:spPr>
-          <a:xfrm>
-            <a:off x="822960" y="2144649"/>
-            <a:ext cx="5760720" cy="2141118"/>
+        </p:nvPicPr>
+        <p:blipFill>
+          <a:blip r:embed="rId2"/>
+          <a:stretch>
+            <a:fillRect/>
+          </a:stretch>
+        </p:blipFill>
+        <p:spPr>
+          <a:xfrm>
+            <a:off x="822960" y="2439162"/>
+            <a:ext cx="5760720" cy="1826866"/>
           </a:xfrm>
           <a:prstGeom prst="rect">
             <a:avLst/>
           </a:prstGeom>
-          <a:noFill/>
-        </p:spPr>
-        <p:txBody>
-          <a:bodyPr wrap="square">
-            <a:spAutoFit/>
-          </a:bodyPr>
-          <a:lstStyle/>
-          <a:p>
-            <a:pPr algn="l">
-              <a:lnSpc>
-                <a:spcPct val="130000"/>
-              </a:lnSpc>
-              <a:spcAft>
-                <a:spcPts val="0"/>
-              </a:spcAft>
-            </a:pPr>
-            <a:r>
-              <a:rPr sz="1400" b="0">
-                <a:solidFill>
-                  <a:srgbClr val="1A1A19"/>
-                </a:solidFill>
-                <a:latin typeface="Consolas"/>
-              </a:rPr>
-              <a:t>Σ_{i∈d} r_i / SE_i  ≤  C_d</a:t>
-            </a:r>
-          </a:p>
-          <a:p>
-            <a:pPr algn="l">
-              <a:lnSpc>
-                <a:spcPct val="110000"/>
-              </a:lnSpc>
-              <a:spcAft>
-                <a:spcPts val="700"/>
-              </a:spcAft>
-            </a:pPr>
-            <a:r>
-              <a:rPr sz="1100" b="0">
-                <a:solidFill>
-                  <a:srgbClr val="8A8980"/>
-                </a:solidFill>
-                <a:latin typeface="Calibri"/>
-              </a:rPr>
-              <a:t>capacity in PRB-symbols, special slot included</a:t>
-            </a:r>
-          </a:p>
-          <a:p>
-            <a:pPr algn="l">
-              <a:lnSpc>
-                <a:spcPct val="130000"/>
-              </a:lnSpc>
-              <a:spcAft>
-                <a:spcPts val="0"/>
-              </a:spcAft>
-            </a:pPr>
-            <a:r>
-              <a:rPr sz="1400" b="0">
-                <a:solidFill>
-                  <a:srgbClr val="1A1A19"/>
-                </a:solidFill>
-                <a:latin typeface="Consolas"/>
-              </a:rPr>
-              <a:t>r_i + s_i  ≥  G_i</a:t>
-            </a:r>
-          </a:p>
-          <a:p>
-            <a:pPr algn="l">
-              <a:lnSpc>
-                <a:spcPct val="110000"/>
-              </a:lnSpc>
-              <a:spcAft>
-                <a:spcPts val="700"/>
-              </a:spcAft>
-            </a:pPr>
-            <a:r>
-              <a:rPr sz="1100" b="0">
-                <a:solidFill>
-                  <a:srgbClr val="8A8980"/>
-                </a:solidFill>
-                <a:latin typeface="Calibri"/>
-              </a:rPr>
-              <a:t>GBR contract — soft, so overload stays feasible</a:t>
-            </a:r>
-          </a:p>
-          <a:p>
-            <a:pPr algn="l">
-              <a:lnSpc>
-                <a:spcPct val="130000"/>
-              </a:lnSpc>
-              <a:spcAft>
-                <a:spcPts val="0"/>
-              </a:spcAft>
-            </a:pPr>
-            <a:r>
-              <a:rPr sz="1400" b="0">
-                <a:solidFill>
-                  <a:srgbClr val="1A1A19"/>
-                </a:solidFill>
-                <a:latin typeface="Consolas"/>
-              </a:rPr>
-              <a:t>r_i  ≥  floor_i</a:t>
-            </a:r>
-          </a:p>
-          <a:p>
-            <a:pPr algn="l">
-              <a:lnSpc>
-                <a:spcPct val="110000"/>
-              </a:lnSpc>
-              <a:spcAft>
-                <a:spcPts val="700"/>
-              </a:spcAft>
-            </a:pPr>
-            <a:r>
-              <a:rPr sz="1100" b="0">
-                <a:solidFill>
-                  <a:srgbClr val="8A8980"/>
-                </a:solidFill>
-                <a:latin typeface="Calibri"/>
-              </a:rPr>
-              <a:t>max-min floor — hard</a:t>
-            </a:r>
-          </a:p>
-          <a:p>
-            <a:pPr algn="l">
-              <a:lnSpc>
-                <a:spcPct val="130000"/>
-              </a:lnSpc>
-              <a:spcAft>
-                <a:spcPts val="0"/>
-              </a:spcAft>
-            </a:pPr>
-            <a:r>
-              <a:rPr sz="1400" b="0">
-                <a:solidFill>
-                  <a:srgbClr val="1A1A19"/>
-                </a:solidFill>
-                <a:latin typeface="Consolas"/>
-              </a:rPr>
-              <a:t>Σ_{i∈σ} r_i/SE_i + s_σ  ≥  φ_σ·C_d</a:t>
-            </a:r>
-          </a:p>
-          <a:p>
-            <a:pPr algn="l">
-              <a:lnSpc>
-                <a:spcPct val="110000"/>
-              </a:lnSpc>
-              <a:spcAft>
-                <a:spcPts val="700"/>
-              </a:spcAft>
-            </a:pPr>
-            <a:r>
-              <a:rPr sz="1100" b="0">
-                <a:solidFill>
-                  <a:srgbClr val="8A8980"/>
-                </a:solidFill>
-                <a:latin typeface="Calibri"/>
-              </a:rPr>
-              <a:t>slice share — soft, demand-capped, work-conserving</a:t>
-            </a:r>
-          </a:p>
-        </p:txBody>
-      </p:sp>
+        </p:spPr>
+      </p:pic>
       <p:sp>
         <p:nvSpPr>
           <p:cNvPr id="7" name="TextBox 6"/>
@@ -6423,7 +6272,7 @@
         </p:nvSpPr>
         <p:spPr>
           <a:xfrm>
-            <a:off x="822960" y="4432071"/>
+            <a:off x="822960" y="4412332"/>
             <a:ext cx="5760720" cy="352424"/>
           </a:xfrm>
           <a:prstGeom prst="rect">
@@ -6457,105 +6306,30 @@
           </a:p>
         </p:txBody>
       </p:sp>
-      <p:sp>
-        <p:nvSpPr>
-          <p:cNvPr id="8" name="TextBox 7"/>
-          <p:cNvSpPr txBox="1"/>
+      <p:pic>
+        <p:nvPicPr>
+          <p:cNvPr id="8" name="Picture 7" descr="eq-50143fa3ad7f07fc.png"/>
+          <p:cNvPicPr>
+            <a:picLocks noChangeAspect="1"/>
+          </p:cNvPicPr>
           <p:nvPr/>
-        </p:nvSpPr>
-        <p:spPr>
-          <a:xfrm>
-            <a:off x="822960" y="4912512"/>
-            <a:ext cx="5760720" cy="1249324"/>
+        </p:nvPicPr>
+        <p:blipFill>
+          <a:blip r:embed="rId3"/>
+          <a:stretch>
+            <a:fillRect/>
+          </a:stretch>
+        </p:blipFill>
+        <p:spPr>
+          <a:xfrm>
+            <a:off x="822960" y="4892773"/>
+            <a:ext cx="5760720" cy="1436462"/>
           </a:xfrm>
           <a:prstGeom prst="rect">
             <a:avLst/>
           </a:prstGeom>
-          <a:noFill/>
-        </p:spPr>
-        <p:txBody>
-          <a:bodyPr wrap="square">
-            <a:spAutoFit/>
-          </a:bodyPr>
-          <a:lstStyle/>
-          <a:p>
-            <a:pPr algn="l">
-              <a:lnSpc>
-                <a:spcPct val="130000"/>
-              </a:lnSpc>
-              <a:spcAft>
-                <a:spcPts val="0"/>
-              </a:spcAft>
-            </a:pPr>
-            <a:r>
-              <a:rPr sz="1400" b="0">
-                <a:solidFill>
-                  <a:srgbClr val="1A1A19"/>
-                </a:solidFill>
-                <a:latin typeface="Consolas"/>
-              </a:rPr>
-              <a:t>A.  t* = max t  s.t.  r_i ≥ t·Ĝ_i  ∀ GBR</a:t>
-            </a:r>
-          </a:p>
-          <a:p>
-            <a:pPr algn="l">
-              <a:lnSpc>
-                <a:spcPct val="110000"/>
-              </a:lnSpc>
-              <a:spcAft>
-                <a:spcPts val="700"/>
-              </a:spcAft>
-            </a:pPr>
-            <a:r>
-              <a:rPr sz="1100" b="0">
-                <a:solidFill>
-                  <a:srgbClr val="8A8980"/>
-                </a:solidFill>
-                <a:latin typeface="Calibri"/>
-              </a:rPr>
-              <a:t>then  floor_i = α·t*·Ĝ_i</a:t>
-            </a:r>
-          </a:p>
-          <a:p>
-            <a:pPr algn="l">
-              <a:lnSpc>
-                <a:spcPct val="130000"/>
-              </a:lnSpc>
-              <a:spcAft>
-                <a:spcPts val="700"/>
-              </a:spcAft>
-            </a:pPr>
-            <a:r>
-              <a:rPr sz="1400" b="0">
-                <a:solidFill>
-                  <a:srgbClr val="1A1A19"/>
-                </a:solidFill>
-                <a:latin typeface="Consolas"/>
-              </a:rPr>
-              <a:t>B1. S* = min Σ p_i·s_i + p_σ Σ SE_σ·s_σ</a:t>
-            </a:r>
-          </a:p>
-          <a:p>
-            <a:pPr algn="l">
-              <a:lnSpc>
-                <a:spcPct val="130000"/>
-              </a:lnSpc>
-              <a:spcAft>
-                <a:spcPts val="700"/>
-              </a:spcAft>
-            </a:pPr>
-            <a:r>
-              <a:rPr sz="1400" b="0">
-                <a:solidFill>
-                  <a:srgbClr val="1A1A19"/>
-                </a:solidFill>
-                <a:latin typeface="Consolas"/>
-              </a:rPr>
-              <a:t>B2.      max Σ w_c·log(r_i+ε)  s.t. Σ p_i·s_i ≤ S*</a:t>
-            </a:r>
-          </a:p>
-        </p:txBody>
-      </p:sp>
+        </p:spPr>
+      </p:pic>
       <p:sp>
         <p:nvSpPr>
           <p:cNvPr id="9" name="Rectangle 8"/>
@@ -7022,124 +6796,30 @@
           </a:p>
         </p:txBody>
       </p:sp>
-      <p:sp>
-        <p:nvSpPr>
-          <p:cNvPr id="6" name="TextBox 5"/>
-          <p:cNvSpPr txBox="1"/>
+      <p:pic>
+        <p:nvPicPr>
+          <p:cNvPr id="6" name="Picture 5" descr="eq-0fd006bf10302264.png"/>
+          <p:cNvPicPr>
+            <a:picLocks noChangeAspect="1"/>
+          </p:cNvPicPr>
           <p:nvPr/>
-        </p:nvSpPr>
+        </p:nvPicPr>
+        <p:blipFill>
+          <a:blip r:embed="rId2"/>
+          <a:stretch>
+            <a:fillRect/>
+          </a:stretch>
+        </p:blipFill>
         <p:spPr>
           <a:xfrm>
             <a:off x="822960" y="2420874"/>
-            <a:ext cx="5760720" cy="1427581"/>
+            <a:ext cx="5760720" cy="1119470"/>
           </a:xfrm>
           <a:prstGeom prst="rect">
             <a:avLst/>
           </a:prstGeom>
-          <a:noFill/>
-        </p:spPr>
-        <p:txBody>
-          <a:bodyPr wrap="square">
-            <a:spAutoFit/>
-          </a:bodyPr>
-          <a:lstStyle/>
-          <a:p>
-            <a:pPr algn="l">
-              <a:lnSpc>
-                <a:spcPct val="130000"/>
-              </a:lnSpc>
-              <a:spcAft>
-                <a:spcPts val="0"/>
-              </a:spcAft>
-            </a:pPr>
-            <a:r>
-              <a:rPr sz="1400" b="0">
-                <a:solidFill>
-                  <a:srgbClr val="1A1A19"/>
-                </a:solidFill>
-                <a:latin typeface="Consolas"/>
-              </a:rPr>
-              <a:t>Q_i += r_i·Δ ;  Q_i ← min(Q_i, ceil_i)</a:t>
-            </a:r>
-          </a:p>
-          <a:p>
-            <a:pPr algn="l">
-              <a:lnSpc>
-                <a:spcPct val="110000"/>
-              </a:lnSpc>
-              <a:spcAft>
-                <a:spcPts val="700"/>
-              </a:spcAft>
-            </a:pPr>
-            <a:r>
-              <a:rPr sz="1100" b="0">
-                <a:solidFill>
-                  <a:srgbClr val="8A8980"/>
-                </a:solidFill>
-                <a:latin typeface="Calibri"/>
-              </a:rPr>
-              <a:t>grow by the Tier-1 target, then clamp</a:t>
-            </a:r>
-          </a:p>
-          <a:p>
-            <a:pPr algn="l">
-              <a:lnSpc>
-                <a:spcPct val="130000"/>
-              </a:lnSpc>
-              <a:spcAft>
-                <a:spcPts val="700"/>
-              </a:spcAft>
-            </a:pPr>
-            <a:r>
-              <a:rPr sz="1400" b="0">
-                <a:solidFill>
-                  <a:srgbClr val="1A1A19"/>
-                </a:solidFill>
-                <a:latin typeface="Consolas"/>
-              </a:rPr>
-              <a:t>serve ;  Q_i ← max(0, Q_i − delivered_i)</a:t>
-            </a:r>
-          </a:p>
-          <a:p>
-            <a:pPr algn="l">
-              <a:lnSpc>
-                <a:spcPct val="130000"/>
-              </a:lnSpc>
-              <a:spcAft>
-                <a:spcPts val="0"/>
-              </a:spcAft>
-            </a:pPr>
-            <a:r>
-              <a:rPr sz="1400" b="0">
-                <a:solidFill>
-                  <a:srgbClr val="1A1A19"/>
-                </a:solidFill>
-                <a:latin typeface="Consolas"/>
-              </a:rPr>
-              <a:t>ceil_i = max(0, min(r_i·W, A_i^W) − D_i^W)</a:t>
-            </a:r>
-          </a:p>
-          <a:p>
-            <a:pPr algn="l">
-              <a:lnSpc>
-                <a:spcPct val="110000"/>
-              </a:lnSpc>
-              <a:spcAft>
-                <a:spcPts val="700"/>
-              </a:spcAft>
-            </a:pPr>
-            <a:r>
-              <a:rPr sz="1100" b="0">
-                <a:solidFill>
-                  <a:srgbClr val="8A8980"/>
-                </a:solidFill>
-                <a:latin typeface="Calibri"/>
-              </a:rPr>
-              <a:t>the debt the flow legitimately accrued over the window W</a:t>
-            </a:r>
-          </a:p>
-        </p:txBody>
-      </p:sp>
+        </p:spPr>
+      </p:pic>
       <p:sp>
         <p:nvSpPr>
           <p:cNvPr id="7" name="TextBox 6"/>
@@ -7148,7 +6828,7 @@
         </p:nvSpPr>
         <p:spPr>
           <a:xfrm>
-            <a:off x="822960" y="3994759"/>
+            <a:off x="822960" y="3686648"/>
             <a:ext cx="5760720" cy="352424"/>
           </a:xfrm>
           <a:prstGeom prst="rect">
@@ -7182,16 +6862,40 @@
           </a:p>
         </p:txBody>
       </p:sp>
-      <p:sp>
-        <p:nvSpPr>
-          <p:cNvPr id="8" name="TextBox 7"/>
+      <p:pic>
+        <p:nvPicPr>
+          <p:cNvPr id="8" name="Picture 7" descr="eq-bcb1b5e8bb20f488.png"/>
+          <p:cNvPicPr>
+            <a:picLocks noChangeAspect="1"/>
+          </p:cNvPicPr>
+          <p:nvPr/>
+        </p:nvPicPr>
+        <p:blipFill>
+          <a:blip r:embed="rId3"/>
+          <a:stretch>
+            <a:fillRect/>
+          </a:stretch>
+        </p:blipFill>
+        <p:spPr>
+          <a:xfrm>
+            <a:off x="822960" y="4167089"/>
+            <a:ext cx="5760720" cy="994141"/>
+          </a:xfrm>
+          <a:prstGeom prst="rect">
+            <a:avLst/>
+          </a:prstGeom>
+        </p:spPr>
+      </p:pic>
+      <p:sp>
+        <p:nvSpPr>
+          <p:cNvPr id="9" name="TextBox 8"/>
           <p:cNvSpPr txBox="1"/>
           <p:nvPr/>
         </p:nvSpPr>
         <p:spPr>
           <a:xfrm>
-            <a:off x="822960" y="4475200"/>
-            <a:ext cx="5760720" cy="1427581"/>
+            <a:off x="822960" y="5289246"/>
+            <a:ext cx="5760720" cy="904875"/>
           </a:xfrm>
           <a:prstGeom prst="rect">
             <a:avLst/>
@@ -7206,110 +6910,34 @@
           <a:p>
             <a:pPr algn="l">
               <a:lnSpc>
-                <a:spcPct val="130000"/>
+                <a:spcPct val="125000"/>
               </a:lnSpc>
               <a:spcAft>
-                <a:spcPts val="0"/>
+                <a:spcPts val="600"/>
               </a:spcAft>
             </a:pPr>
             <a:r>
-              <a:rPr sz="1400" b="0">
-                <a:solidFill>
-                  <a:srgbClr val="1A1A19"/>
-                </a:solidFill>
-                <a:latin typeface="Consolas"/>
-              </a:rPr>
-              <a:t>Q̃_i = Q_i + w_d·(HoL_i/PDB_i)^κ · max_j Q_j</a:t>
-            </a:r>
-          </a:p>
-          <a:p>
-            <a:pPr algn="l">
-              <a:lnSpc>
-                <a:spcPct val="110000"/>
-              </a:lnSpc>
-              <a:spcAft>
-                <a:spcPts val="700"/>
-              </a:spcAft>
-            </a:pPr>
-            <a:r>
-              <a:rPr sz="1100" b="0">
-                <a:solidFill>
-                  <a:srgbClr val="8A8980"/>
-                </a:solidFill>
-                <a:latin typeface="Calibri"/>
-              </a:rPr>
-              <a:t>deadline urgency, scaled by the system-wide max queue</a:t>
-            </a:r>
-          </a:p>
-          <a:p>
-            <a:pPr algn="l">
-              <a:lnSpc>
-                <a:spcPct val="130000"/>
-              </a:lnSpc>
-              <a:spcAft>
-                <a:spcPts val="0"/>
-              </a:spcAft>
-            </a:pPr>
-            <a:r>
-              <a:rPr sz="1400" b="0">
-                <a:solidFill>
-                  <a:srgbClr val="1A1A19"/>
-                </a:solidFill>
-                <a:latin typeface="Consolas"/>
-              </a:rPr>
-              <a:t>M_u = ( Σ_{i∈u} Q̃_i ) · SE_u</a:t>
-            </a:r>
-          </a:p>
-          <a:p>
-            <a:pPr algn="l">
-              <a:lnSpc>
-                <a:spcPct val="110000"/>
-              </a:lnSpc>
-              <a:spcAft>
-                <a:spcPts val="700"/>
-              </a:spcAft>
-            </a:pPr>
-            <a:r>
-              <a:rPr sz="1100" b="0">
-                <a:solidFill>
-                  <a:srgbClr val="8A8980"/>
-                </a:solidFill>
-                <a:latin typeface="Calibri"/>
-              </a:rPr>
-              <a:t>rank UEs — opportunistic and rate-tracking at once</a:t>
-            </a:r>
-          </a:p>
-          <a:p>
-            <a:pPr algn="l">
-              <a:lnSpc>
-                <a:spcPct val="130000"/>
-              </a:lnSpc>
-              <a:spcAft>
-                <a:spcPts val="700"/>
-              </a:spcAft>
-            </a:pPr>
-            <a:r>
-              <a:rPr sz="1400" b="0">
-                <a:solidFill>
-                  <a:srgbClr val="1A1A19"/>
-                </a:solidFill>
-                <a:latin typeface="Consolas"/>
-              </a:rPr>
-              <a:t>fill the TB by TS 38.321 LCP: priority, then Q̃_i</a:t>
-            </a:r>
-          </a:p>
-        </p:txBody>
-      </p:sp>
-      <p:sp>
-        <p:nvSpPr>
-          <p:cNvPr id="9" name="Rectangle 8"/>
+              <a:rPr sz="1500" b="0">
+                <a:solidFill>
+                  <a:srgbClr val="5C5B54"/>
+                </a:solidFill>
+                <a:latin typeface="Calibri"/>
+              </a:rPr>
+              <a:t>The granted transport block is then filled by TS 38.321 logical-channel prioritisation: by priority level, then by adjusted queue.</a:t>
+            </a:r>
+          </a:p>
+        </p:txBody>
+      </p:sp>
+      <p:sp>
+        <p:nvSpPr>
+          <p:cNvPr id="10" name="Rectangle 9"/>
           <p:cNvSpPr/>
           <p:nvPr/>
         </p:nvSpPr>
         <p:spPr>
           <a:xfrm>
             <a:off x="6949440" y="1691640"/>
-            <a:ext cx="4434840" cy="1546859"/>
+            <a:ext cx="4434840" cy="1823085"/>
           </a:xfrm>
           <a:prstGeom prst="rect">
             <a:avLst/>
@@ -7346,14 +6974,14 @@
       </p:sp>
       <p:sp>
         <p:nvSpPr>
-          <p:cNvPr id="10" name="Rectangle 9"/>
+          <p:cNvPr id="11" name="Rectangle 10"/>
           <p:cNvSpPr/>
           <p:nvPr/>
         </p:nvSpPr>
         <p:spPr>
           <a:xfrm>
             <a:off x="6949440" y="1691640"/>
-            <a:ext cx="50800" cy="1546859"/>
+            <a:ext cx="50800" cy="1823085"/>
           </a:xfrm>
           <a:prstGeom prst="rect">
             <a:avLst/>
@@ -7390,14 +7018,14 @@
       </p:sp>
       <p:sp>
         <p:nvSpPr>
-          <p:cNvPr id="11" name="TextBox 10"/>
+          <p:cNvPr id="12" name="TextBox 11"/>
           <p:cNvSpPr txBox="1"/>
           <p:nvPr/>
         </p:nvSpPr>
         <p:spPr>
           <a:xfrm>
             <a:off x="7178040" y="1828800"/>
-            <a:ext cx="3977640" cy="1272539"/>
+            <a:ext cx="3977640" cy="1548765"/>
           </a:xfrm>
           <a:prstGeom prst="rect">
             <a:avLst/>
@@ -7425,7 +7053,7 @@
                 </a:solidFill>
                 <a:latin typeface="Calibri"/>
               </a:rPr>
-              <a:t>Q_i is a </a:t>
+              <a:t>The virtual queue is a </a:t>
             </a:r>
             <a:r>
               <a:rPr sz="1500" b="1">
@@ -7450,13 +7078,13 @@
       </p:sp>
       <p:sp>
         <p:nvSpPr>
-          <p:cNvPr id="12" name="Rectangle 11"/>
+          <p:cNvPr id="13" name="Rectangle 12"/>
           <p:cNvSpPr/>
           <p:nvPr/>
         </p:nvSpPr>
         <p:spPr>
           <a:xfrm>
-            <a:off x="6949440" y="3421379"/>
+            <a:off x="6949440" y="3697605"/>
             <a:ext cx="4434840" cy="1546859"/>
           </a:xfrm>
           <a:prstGeom prst="rect">
@@ -7494,13 +7122,13 @@
       </p:sp>
       <p:sp>
         <p:nvSpPr>
-          <p:cNvPr id="13" name="Rectangle 12"/>
+          <p:cNvPr id="14" name="Rectangle 13"/>
           <p:cNvSpPr/>
           <p:nvPr/>
         </p:nvSpPr>
         <p:spPr>
           <a:xfrm>
-            <a:off x="6949440" y="3421379"/>
+            <a:off x="6949440" y="3697605"/>
             <a:ext cx="50800" cy="1546859"/>
           </a:xfrm>
           <a:prstGeom prst="rect">
@@ -7538,13 +7166,13 @@
       </p:sp>
       <p:sp>
         <p:nvSpPr>
-          <p:cNvPr id="14" name="TextBox 13"/>
+          <p:cNvPr id="15" name="TextBox 14"/>
           <p:cNvSpPr txBox="1"/>
           <p:nvPr/>
         </p:nvSpPr>
         <p:spPr>
           <a:xfrm>
-            <a:off x="7178040" y="3558539"/>
+            <a:off x="7178040" y="3834765"/>
             <a:ext cx="3977640" cy="1272539"/>
           </a:xfrm>
           <a:prstGeom prst="rect">
@@ -7598,13 +7226,13 @@
       </p:sp>
       <p:sp>
         <p:nvSpPr>
-          <p:cNvPr id="15" name="Rectangle 14"/>
+          <p:cNvPr id="16" name="Rectangle 15"/>
           <p:cNvSpPr/>
           <p:nvPr/>
         </p:nvSpPr>
         <p:spPr>
           <a:xfrm>
-            <a:off x="6949440" y="5151118"/>
+            <a:off x="6949440" y="5427344"/>
             <a:ext cx="4434840" cy="1546859"/>
           </a:xfrm>
           <a:prstGeom prst="rect">
@@ -7642,13 +7270,13 @@
       </p:sp>
       <p:sp>
         <p:nvSpPr>
-          <p:cNvPr id="16" name="Rectangle 15"/>
+          <p:cNvPr id="17" name="Rectangle 16"/>
           <p:cNvSpPr/>
           <p:nvPr/>
         </p:nvSpPr>
         <p:spPr>
           <a:xfrm>
-            <a:off x="6949440" y="5151118"/>
+            <a:off x="6949440" y="5427344"/>
             <a:ext cx="50800" cy="1546859"/>
           </a:xfrm>
           <a:prstGeom prst="rect">
@@ -7686,13 +7314,13 @@
       </p:sp>
       <p:sp>
         <p:nvSpPr>
-          <p:cNvPr id="17" name="TextBox 16"/>
+          <p:cNvPr id="18" name="TextBox 17"/>
           <p:cNvSpPr txBox="1"/>
           <p:nvPr/>
         </p:nvSpPr>
         <p:spPr>
           <a:xfrm>
-            <a:off x="7178040" y="5288278"/>
+            <a:off x="7178040" y="5564504"/>
             <a:ext cx="3977640" cy="1272539"/>
           </a:xfrm>
           <a:prstGeom prst="rect">
